--- a/OpenCFO-pitch-deck.pptx
+++ b/OpenCFO-pitch-deck.pptx
@@ -3111,7 +3111,7 @@
             <a:avLst/>
           </a:prstGeom>
           <a:solidFill>
-            <a:srgbClr val="072F35"/>
+            <a:srgbClr val="1A2426"/>
           </a:solidFill>
           <a:ln>
             <a:noFill/>
@@ -3147,14 +3147,14 @@
         </p:nvSpPr>
         <p:spPr>
           <a:xfrm>
-            <a:off x="0" y="0"/>
-            <a:ext cx="164592" cy="6858000"/>
+            <a:off x="685800" y="1417320"/>
+            <a:ext cx="1051560" cy="38100"/>
           </a:xfrm>
           <a:prstGeom prst="rect">
             <a:avLst/>
           </a:prstGeom>
           <a:solidFill>
-            <a:srgbClr val="FC821F"/>
+            <a:srgbClr val="C45C12"/>
           </a:solidFill>
           <a:ln>
             <a:noFill/>
@@ -3190,8 +3190,8 @@
         </p:nvSpPr>
         <p:spPr>
           <a:xfrm>
-            <a:off x="640080" y="1417320"/>
-            <a:ext cx="7315200" cy="320040"/>
+            <a:off x="685800" y="1645920"/>
+            <a:ext cx="9144000" cy="457200"/>
           </a:xfrm>
           <a:prstGeom prst="rect">
             <a:avLst/>
@@ -3199,18 +3199,30 @@
           <a:noFill/>
         </p:spPr>
         <p:txBody>
-          <a:bodyPr wrap="square" anchor="t"/>
-          <a:lstStyle/>
-          <a:p>
-            <a:pPr algn="l"/>
-            <a:r>
-              <a:rPr sz="1600" b="1">
-                <a:solidFill>
-                  <a:srgbClr val="49D6CE"/>
-                </a:solidFill>
-                <a:latin typeface="Calibri"/>
+          <a:bodyPr wrap="square">
+            <a:spAutoFit/>
+          </a:bodyPr>
+          <a:lstStyle/>
+          <a:p>
+            <a:pPr algn="l">
+              <a:lnSpc>
+                <a:spcPct val="105000"/>
+              </a:lnSpc>
+              <a:spcBef>
+                <a:spcPts val="0"/>
+              </a:spcBef>
+              <a:spcAft>
+                <a:spcPts val="0"/>
+              </a:spcAft>
+            </a:pPr>
+            <a:r>
+              <a:rPr sz="2000" b="0" i="0">
+                <a:solidFill>
+                  <a:srgbClr val="C45C12"/>
+                </a:solidFill>
+                <a:latin typeface="Inter"/>
               </a:rPr>
-              <a:t>OPENCFO</a:t>
+              <a:t>OpenCFO</a:t>
             </a:r>
           </a:p>
         </p:txBody>
@@ -3223,8 +3235,8 @@
         </p:nvSpPr>
         <p:spPr>
           <a:xfrm>
-            <a:off x="640080" y="1874519"/>
-            <a:ext cx="10058400" cy="1645920"/>
+            <a:off x="658368" y="2148840"/>
+            <a:ext cx="10058400" cy="2011680"/>
           </a:xfrm>
           <a:prstGeom prst="rect">
             <a:avLst/>
@@ -3232,19 +3244,31 @@
           <a:noFill/>
         </p:spPr>
         <p:txBody>
-          <a:bodyPr wrap="square" anchor="t"/>
-          <a:lstStyle/>
-          <a:p>
-            <a:pPr algn="l"/>
-            <a:r>
-              <a:rPr sz="4800" b="1">
-                <a:solidFill>
-                  <a:srgbClr val="FFFFFF"/>
-                </a:solidFill>
-                <a:latin typeface="Calibri"/>
+          <a:bodyPr wrap="square">
+            <a:spAutoFit/>
+          </a:bodyPr>
+          <a:lstStyle/>
+          <a:p>
+            <a:pPr algn="l">
+              <a:lnSpc>
+                <a:spcPct val="95000"/>
+              </a:lnSpc>
+              <a:spcBef>
+                <a:spcPts val="0"/>
+              </a:spcBef>
+              <a:spcAft>
+                <a:spcPts val="0"/>
+              </a:spcAft>
+            </a:pPr>
+            <a:r>
+              <a:rPr sz="4400" b="0" i="0">
+                <a:solidFill>
+                  <a:srgbClr val="FFFCF7"/>
+                </a:solidFill>
+                <a:latin typeface="Liberation Serif"/>
               </a:rPr>
-              <a:t>Control cash flows.
-Boost working capital.</a:t>
+              <a:t>Cash control for teams
+that already have an ERP.</a:t>
             </a:r>
           </a:p>
         </p:txBody>
@@ -3257,8 +3281,8 @@
         </p:nvSpPr>
         <p:spPr>
           <a:xfrm>
-            <a:off x="640080" y="3977639"/>
-            <a:ext cx="8686800" cy="1005840"/>
+            <a:off x="685800" y="4709160"/>
+            <a:ext cx="8229600" cy="731520"/>
           </a:xfrm>
           <a:prstGeom prst="rect">
             <a:avLst/>
@@ -3266,65 +3290,77 @@
           <a:noFill/>
         </p:spPr>
         <p:txBody>
-          <a:bodyPr wrap="square" anchor="t"/>
-          <a:lstStyle/>
-          <a:p>
-            <a:pPr algn="l"/>
-            <a:r>
-              <a:rPr sz="2000" b="0">
-                <a:solidFill>
-                  <a:srgbClr val="C8EEEF"/>
-                </a:solidFill>
-                <a:latin typeface="Calibri"/>
+          <a:bodyPr wrap="square">
+            <a:spAutoFit/>
+          </a:bodyPr>
+          <a:lstStyle/>
+          <a:p>
+            <a:pPr algn="l">
+              <a:lnSpc>
+                <a:spcPct val="115000"/>
+              </a:lnSpc>
+              <a:spcBef>
+                <a:spcPts val="0"/>
+              </a:spcBef>
+              <a:spcAft>
+                <a:spcPts val="0"/>
+              </a:spcAft>
+            </a:pPr>
+            <a:r>
+              <a:rPr sz="1800" b="0" i="0">
+                <a:solidFill>
+                  <a:srgbClr val="C9D0CE"/>
+                </a:solidFill>
+                <a:latin typeface="Inter"/>
               </a:rPr>
-              <a:t>The agentic finance platform that automates accounts receivable,
-accounts payable, and treasury on top of the ERP you already run.</a:t>
-            </a:r>
-          </a:p>
-        </p:txBody>
-      </p:sp>
-      <p:sp>
-        <p:nvSpPr>
-          <p:cNvPr id="7" name="Rounded Rectangle 6"/>
-          <p:cNvSpPr/>
-          <p:nvPr/>
-        </p:nvSpPr>
-        <p:spPr>
-          <a:xfrm>
-            <a:off x="640080" y="5349240"/>
-            <a:ext cx="2194560" cy="502920"/>
-          </a:xfrm>
-          <a:prstGeom prst="roundRect">
-            <a:avLst>
-              <a:gd name="adj" fmla="val 12000"/>
-            </a:avLst>
-          </a:prstGeom>
-          <a:solidFill>
-            <a:srgbClr val="FC821F"/>
-          </a:solidFill>
-          <a:ln>
-            <a:noFill/>
-          </a:ln>
-        </p:spPr>
-        <p:style>
-          <a:lnRef idx="1">
-            <a:schemeClr val="accent1"/>
-          </a:lnRef>
-          <a:fillRef idx="3">
-            <a:schemeClr val="accent1"/>
-          </a:fillRef>
-          <a:effectRef idx="2">
-            <a:schemeClr val="accent1"/>
-          </a:effectRef>
-          <a:fontRef idx="minor">
-            <a:schemeClr val="lt1"/>
-          </a:fontRef>
-        </p:style>
-        <p:txBody>
-          <a:bodyPr rtlCol="0" anchor="ctr"/>
-          <a:lstStyle/>
-          <a:p>
-            <a:pPr algn="ctr"/>
+              <a:t>Accounts receivable, accounts payable, and treasury.
+The books stay in the ERP. The follow-up does not.</a:t>
+            </a:r>
+          </a:p>
+        </p:txBody>
+      </p:sp>
+      <p:sp>
+        <p:nvSpPr>
+          <p:cNvPr id="7" name="TextBox 6"/>
+          <p:cNvSpPr txBox="1"/>
+          <p:nvPr/>
+        </p:nvSpPr>
+        <p:spPr>
+          <a:xfrm>
+            <a:off x="685800" y="5989320"/>
+            <a:ext cx="5486400" cy="274320"/>
+          </a:xfrm>
+          <a:prstGeom prst="rect">
+            <a:avLst/>
+          </a:prstGeom>
+          <a:noFill/>
+        </p:spPr>
+        <p:txBody>
+          <a:bodyPr wrap="square">
+            <a:spAutoFit/>
+          </a:bodyPr>
+          <a:lstStyle/>
+          <a:p>
+            <a:pPr algn="l">
+              <a:lnSpc>
+                <a:spcPct val="105000"/>
+              </a:lnSpc>
+              <a:spcBef>
+                <a:spcPts val="0"/>
+              </a:spcBef>
+              <a:spcAft>
+                <a:spcPts val="0"/>
+              </a:spcAft>
+            </a:pPr>
+            <a:r>
+              <a:rPr sz="1400" b="0" i="0">
+                <a:solidFill>
+                  <a:srgbClr val="E7E2D8"/>
+                </a:solidFill>
+                <a:latin typeface="Inter"/>
+              </a:rPr>
+              <a:t>opencfo.tech</a:t>
+            </a:r>
           </a:p>
         </p:txBody>
       </p:sp>
@@ -3336,8 +3372,8 @@
         </p:nvSpPr>
         <p:spPr>
           <a:xfrm>
-            <a:off x="640080" y="5413248"/>
-            <a:ext cx="2194560" cy="384048"/>
+            <a:off x="7772400" y="5989320"/>
+            <a:ext cx="3657600" cy="274320"/>
           </a:xfrm>
           <a:prstGeom prst="rect">
             <a:avLst/>
@@ -3345,51 +3381,30 @@
           <a:noFill/>
         </p:spPr>
         <p:txBody>
-          <a:bodyPr wrap="square" anchor="t"/>
-          <a:lstStyle/>
-          <a:p>
-            <a:pPr algn="ctr"/>
-            <a:r>
-              <a:rPr sz="1600" b="1">
-                <a:solidFill>
-                  <a:srgbClr val="FFFFFF"/>
-                </a:solidFill>
-                <a:latin typeface="Calibri"/>
+          <a:bodyPr wrap="square">
+            <a:spAutoFit/>
+          </a:bodyPr>
+          <a:lstStyle/>
+          <a:p>
+            <a:pPr algn="r">
+              <a:lnSpc>
+                <a:spcPct val="105000"/>
+              </a:lnSpc>
+              <a:spcBef>
+                <a:spcPts val="0"/>
+              </a:spcBef>
+              <a:spcAft>
+                <a:spcPts val="0"/>
+              </a:spcAft>
+            </a:pPr>
+            <a:r>
+              <a:rPr sz="1400" b="0" i="0">
+                <a:solidFill>
+                  <a:srgbClr val="E7E2D8"/>
+                </a:solidFill>
+                <a:latin typeface="Inter"/>
               </a:rPr>
-              <a:t>opencfo.tech</a:t>
-            </a:r>
-          </a:p>
-        </p:txBody>
-      </p:sp>
-      <p:sp>
-        <p:nvSpPr>
-          <p:cNvPr id="9" name="TextBox 8"/>
-          <p:cNvSpPr txBox="1"/>
-          <p:nvPr/>
-        </p:nvSpPr>
-        <p:spPr>
-          <a:xfrm>
-            <a:off x="8595360" y="5989320"/>
-            <a:ext cx="3108960" cy="365760"/>
-          </a:xfrm>
-          <a:prstGeom prst="rect">
-            <a:avLst/>
-          </a:prstGeom>
-          <a:noFill/>
-        </p:spPr>
-        <p:txBody>
-          <a:bodyPr wrap="square" anchor="t"/>
-          <a:lstStyle/>
-          <a:p>
-            <a:pPr algn="r"/>
-            <a:r>
-              <a:rPr sz="1400" b="0">
-                <a:solidFill>
-                  <a:srgbClr val="49D6CE"/>
-                </a:solidFill>
-                <a:latin typeface="Calibri"/>
-              </a:rPr>
-              <a:t>Seed-stage  ·  2026</a:t>
+              <a:t>September 2026</a:t>
             </a:r>
           </a:p>
         </p:txBody>
@@ -3427,7 +3442,7 @@
             <a:avLst/>
           </a:prstGeom>
           <a:solidFill>
-            <a:srgbClr val="FFFFFF"/>
+            <a:srgbClr val="F7F5F0"/>
           </a:solidFill>
           <a:ln>
             <a:noFill/>
@@ -3457,20 +3472,111 @@
       </p:sp>
       <p:sp>
         <p:nvSpPr>
-          <p:cNvPr id="3" name="Rectangle 2"/>
+          <p:cNvPr id="3" name="TextBox 2"/>
+          <p:cNvSpPr txBox="1"/>
+          <p:nvPr/>
+        </p:nvSpPr>
+        <p:spPr>
+          <a:xfrm>
+            <a:off x="685800" y="438912"/>
+            <a:ext cx="10515600" cy="1280160"/>
+          </a:xfrm>
+          <a:prstGeom prst="rect">
+            <a:avLst/>
+          </a:prstGeom>
+          <a:noFill/>
+        </p:spPr>
+        <p:txBody>
+          <a:bodyPr wrap="square">
+            <a:spAutoFit/>
+          </a:bodyPr>
+          <a:lstStyle/>
+          <a:p>
+            <a:pPr algn="l">
+              <a:lnSpc>
+                <a:spcPct val="95000"/>
+              </a:lnSpc>
+              <a:spcBef>
+                <a:spcPts val="0"/>
+              </a:spcBef>
+              <a:spcAft>
+                <a:spcPts val="0"/>
+              </a:spcAft>
+            </a:pPr>
+            <a:r>
+              <a:rPr sz="3400" b="0" i="0">
+                <a:solidFill>
+                  <a:srgbClr val="1A2426"/>
+                </a:solidFill>
+                <a:latin typeface="Liberation Serif"/>
+              </a:rPr>
+              <a:t>The books are fine.
+Getting paid is the messy part.</a:t>
+            </a:r>
+          </a:p>
+        </p:txBody>
+      </p:sp>
+      <p:sp>
+        <p:nvSpPr>
+          <p:cNvPr id="4" name="TextBox 3"/>
+          <p:cNvSpPr txBox="1"/>
+          <p:nvPr/>
+        </p:nvSpPr>
+        <p:spPr>
+          <a:xfrm>
+            <a:off x="685800" y="2148840"/>
+            <a:ext cx="10241280" cy="1188720"/>
+          </a:xfrm>
+          <a:prstGeom prst="rect">
+            <a:avLst/>
+          </a:prstGeom>
+          <a:noFill/>
+        </p:spPr>
+        <p:txBody>
+          <a:bodyPr wrap="square">
+            <a:spAutoFit/>
+          </a:bodyPr>
+          <a:lstStyle/>
+          <a:p>
+            <a:pPr algn="l">
+              <a:lnSpc>
+                <a:spcPct val="120000"/>
+              </a:lnSpc>
+              <a:spcBef>
+                <a:spcPts val="0"/>
+              </a:spcBef>
+              <a:spcAft>
+                <a:spcPts val="0"/>
+              </a:spcAft>
+            </a:pPr>
+            <a:r>
+              <a:rPr sz="1800" b="0" i="0">
+                <a:solidFill>
+                  <a:srgbClr val="5C6566"/>
+                </a:solidFill>
+                <a:latin typeface="Inter"/>
+              </a:rPr>
+              <a:t>A controller can close the month and still not know which customers will pay this week, which bills should wait, or what the bank balance will be on Friday. That work sits in inboxes, shared drives, and a cash spreadsheet someone updates by hand.</a:t>
+            </a:r>
+          </a:p>
+        </p:txBody>
+      </p:sp>
+      <p:sp>
+        <p:nvSpPr>
+          <p:cNvPr id="5" name="Rectangle 4"/>
           <p:cNvSpPr/>
           <p:nvPr/>
         </p:nvSpPr>
         <p:spPr>
           <a:xfrm>
-            <a:off x="0" y="0"/>
-            <a:ext cx="12191695" cy="109728"/>
+            <a:off x="685800" y="3520440"/>
+            <a:ext cx="10789920" cy="9525"/>
           </a:xfrm>
           <a:prstGeom prst="rect">
             <a:avLst/>
           </a:prstGeom>
           <a:solidFill>
-            <a:srgbClr val="FC821F"/>
+            <a:srgbClr val="D8D1C6"/>
           </a:solidFill>
           <a:ln>
             <a:noFill/>
@@ -3500,14 +3606,14 @@
       </p:sp>
       <p:sp>
         <p:nvSpPr>
-          <p:cNvPr id="4" name="TextBox 3"/>
+          <p:cNvPr id="6" name="TextBox 5"/>
           <p:cNvSpPr txBox="1"/>
           <p:nvPr/>
         </p:nvSpPr>
         <p:spPr>
           <a:xfrm>
-            <a:off x="594360" y="365760"/>
-            <a:ext cx="9144000" cy="274320"/>
+            <a:off x="685800" y="3593592"/>
+            <a:ext cx="2286000" cy="411480"/>
           </a:xfrm>
           <a:prstGeom prst="rect">
             <a:avLst/>
@@ -3515,32 +3621,44 @@
           <a:noFill/>
         </p:spPr>
         <p:txBody>
-          <a:bodyPr wrap="square" anchor="t"/>
-          <a:lstStyle/>
-          <a:p>
-            <a:pPr algn="l"/>
-            <a:r>
-              <a:rPr sz="1300" b="1">
-                <a:solidFill>
-                  <a:srgbClr val="FC821F"/>
-                </a:solidFill>
-                <a:latin typeface="Calibri"/>
+          <a:bodyPr wrap="square">
+            <a:spAutoFit/>
+          </a:bodyPr>
+          <a:lstStyle/>
+          <a:p>
+            <a:pPr algn="l">
+              <a:lnSpc>
+                <a:spcPct val="105000"/>
+              </a:lnSpc>
+              <a:spcBef>
+                <a:spcPts val="0"/>
+              </a:spcBef>
+              <a:spcAft>
+                <a:spcPts val="0"/>
+              </a:spcAft>
+            </a:pPr>
+            <a:r>
+              <a:rPr sz="1500" b="1" i="0">
+                <a:solidFill>
+                  <a:srgbClr val="1A2426"/>
+                </a:solidFill>
+                <a:latin typeface="Inter"/>
               </a:rPr>
-              <a:t>THE PROBLEM</a:t>
-            </a:r>
-          </a:p>
-        </p:txBody>
-      </p:sp>
-      <p:sp>
-        <p:nvSpPr>
-          <p:cNvPr id="5" name="TextBox 4"/>
+              <a:t>Collections</a:t>
+            </a:r>
+          </a:p>
+        </p:txBody>
+      </p:sp>
+      <p:sp>
+        <p:nvSpPr>
+          <p:cNvPr id="7" name="TextBox 6"/>
           <p:cNvSpPr txBox="1"/>
           <p:nvPr/>
         </p:nvSpPr>
         <p:spPr>
           <a:xfrm>
-            <a:off x="594360" y="685800"/>
-            <a:ext cx="10972800" cy="822960"/>
+            <a:off x="3108960" y="3593592"/>
+            <a:ext cx="8321040" cy="457200"/>
           </a:xfrm>
           <a:prstGeom prst="rect">
             <a:avLst/>
@@ -3548,45 +3666,53 @@
           <a:noFill/>
         </p:spPr>
         <p:txBody>
-          <a:bodyPr wrap="square" anchor="t"/>
-          <a:lstStyle/>
-          <a:p>
-            <a:pPr algn="l"/>
-            <a:r>
-              <a:rPr sz="3200" b="1">
-                <a:solidFill>
-                  <a:srgbClr val="072F35"/>
-                </a:solidFill>
-                <a:latin typeface="Calibri"/>
+          <a:bodyPr wrap="square">
+            <a:spAutoFit/>
+          </a:bodyPr>
+          <a:lstStyle/>
+          <a:p>
+            <a:pPr algn="l">
+              <a:lnSpc>
+                <a:spcPct val="105000"/>
+              </a:lnSpc>
+              <a:spcBef>
+                <a:spcPts val="0"/>
+              </a:spcBef>
+              <a:spcAft>
+                <a:spcPts val="0"/>
+              </a:spcAft>
+            </a:pPr>
+            <a:r>
+              <a:rPr sz="1500" b="0" i="0">
+                <a:solidFill>
+                  <a:srgbClr val="5C6566"/>
+                </a:solidFill>
+                <a:latin typeface="Inter"/>
               </a:rPr>
-              <a:t>Cash is trapped between the invoice and the bank.</a:t>
-            </a:r>
-          </a:p>
-        </p:txBody>
-      </p:sp>
-      <p:sp>
-        <p:nvSpPr>
-          <p:cNvPr id="6" name="Rounded Rectangle 5"/>
+              <a:t>Reminders go out when someone has time. The oldest invoices are not always the ones that get a call.</a:t>
+            </a:r>
+          </a:p>
+        </p:txBody>
+      </p:sp>
+      <p:sp>
+        <p:nvSpPr>
+          <p:cNvPr id="8" name="Rectangle 7"/>
           <p:cNvSpPr/>
           <p:nvPr/>
         </p:nvSpPr>
         <p:spPr>
           <a:xfrm>
-            <a:off x="594360" y="2148840"/>
-            <a:ext cx="3566160" cy="3383280"/>
-          </a:xfrm>
-          <a:prstGeom prst="roundRect">
-            <a:avLst>
-              <a:gd name="adj" fmla="val 12000"/>
-            </a:avLst>
+            <a:off x="685800" y="4178808"/>
+            <a:ext cx="10789920" cy="9525"/>
+          </a:xfrm>
+          <a:prstGeom prst="rect">
+            <a:avLst/>
           </a:prstGeom>
           <a:solidFill>
-            <a:srgbClr val="F3FFFE"/>
+            <a:srgbClr val="D8D1C6"/>
           </a:solidFill>
-          <a:ln w="15875">
-            <a:solidFill>
-              <a:srgbClr val="C0EDEE"/>
-            </a:solidFill>
+          <a:ln>
+            <a:noFill/>
           </a:ln>
         </p:spPr>
         <p:style>
@@ -3613,80 +3739,14 @@
       </p:sp>
       <p:sp>
         <p:nvSpPr>
-          <p:cNvPr id="7" name="TextBox 6"/>
-          <p:cNvSpPr txBox="1"/>
-          <p:nvPr/>
-        </p:nvSpPr>
-        <p:spPr>
-          <a:xfrm>
-            <a:off x="868680" y="2377440"/>
-            <a:ext cx="2926080" cy="548640"/>
-          </a:xfrm>
-          <a:prstGeom prst="rect">
-            <a:avLst/>
-          </a:prstGeom>
-          <a:noFill/>
-        </p:spPr>
-        <p:txBody>
-          <a:bodyPr wrap="square" anchor="t"/>
-          <a:lstStyle/>
-          <a:p>
-            <a:pPr algn="l"/>
-            <a:r>
-              <a:rPr sz="2800" b="1">
-                <a:solidFill>
-                  <a:srgbClr val="FC821F"/>
-                </a:solidFill>
-                <a:latin typeface="Calibri"/>
-              </a:rPr>
-              <a:t>01</a:t>
-            </a:r>
-          </a:p>
-        </p:txBody>
-      </p:sp>
-      <p:sp>
-        <p:nvSpPr>
-          <p:cNvPr id="8" name="TextBox 7"/>
-          <p:cNvSpPr txBox="1"/>
-          <p:nvPr/>
-        </p:nvSpPr>
-        <p:spPr>
-          <a:xfrm>
-            <a:off x="868680" y="3108960"/>
-            <a:ext cx="3017520" cy="731520"/>
-          </a:xfrm>
-          <a:prstGeom prst="rect">
-            <a:avLst/>
-          </a:prstGeom>
-          <a:noFill/>
-        </p:spPr>
-        <p:txBody>
-          <a:bodyPr wrap="square" anchor="t"/>
-          <a:lstStyle/>
-          <a:p>
-            <a:pPr algn="l"/>
-            <a:r>
-              <a:rPr sz="2200" b="1">
-                <a:solidFill>
-                  <a:srgbClr val="072F35"/>
-                </a:solidFill>
-                <a:latin typeface="Calibri"/>
-              </a:rPr>
-              <a:t>Slow collections</a:t>
-            </a:r>
-          </a:p>
-        </p:txBody>
-      </p:sp>
-      <p:sp>
-        <p:nvSpPr>
           <p:cNvPr id="9" name="TextBox 8"/>
           <p:cNvSpPr txBox="1"/>
           <p:nvPr/>
         </p:nvSpPr>
         <p:spPr>
           <a:xfrm>
-            <a:off x="868680" y="3977639"/>
-            <a:ext cx="3017520" cy="1280160"/>
+            <a:off x="685800" y="4251960"/>
+            <a:ext cx="2286000" cy="411480"/>
           </a:xfrm>
           <a:prstGeom prst="rect">
             <a:avLst/>
@@ -3694,45 +3754,98 @@
           <a:noFill/>
         </p:spPr>
         <p:txBody>
-          <a:bodyPr wrap="square" anchor="t"/>
-          <a:lstStyle/>
-          <a:p>
-            <a:pPr algn="l"/>
-            <a:r>
-              <a:rPr sz="1500" b="0">
-                <a:solidFill>
-                  <a:srgbClr val="3D5C62"/>
-                </a:solidFill>
-                <a:latin typeface="Calibri"/>
+          <a:bodyPr wrap="square">
+            <a:spAutoFit/>
+          </a:bodyPr>
+          <a:lstStyle/>
+          <a:p>
+            <a:pPr algn="l">
+              <a:lnSpc>
+                <a:spcPct val="105000"/>
+              </a:lnSpc>
+              <a:spcBef>
+                <a:spcPts val="0"/>
+              </a:spcBef>
+              <a:spcAft>
+                <a:spcPts val="0"/>
+              </a:spcAft>
+            </a:pPr>
+            <a:r>
+              <a:rPr sz="1500" b="1" i="0">
+                <a:solidFill>
+                  <a:srgbClr val="1A2426"/>
+                </a:solidFill>
+                <a:latin typeface="Inter"/>
               </a:rPr>
-              <a:t>Follow-ups live in inboxes and spreadsheets. Days sales outstanding drifts, and cash arrives late.</a:t>
-            </a:r>
-          </a:p>
-        </p:txBody>
-      </p:sp>
-      <p:sp>
-        <p:nvSpPr>
-          <p:cNvPr id="10" name="Rounded Rectangle 9"/>
+              <a:t>Cash application</a:t>
+            </a:r>
+          </a:p>
+        </p:txBody>
+      </p:sp>
+      <p:sp>
+        <p:nvSpPr>
+          <p:cNvPr id="10" name="TextBox 9"/>
+          <p:cNvSpPr txBox="1"/>
+          <p:nvPr/>
+        </p:nvSpPr>
+        <p:spPr>
+          <a:xfrm>
+            <a:off x="3108960" y="4251960"/>
+            <a:ext cx="8321040" cy="457200"/>
+          </a:xfrm>
+          <a:prstGeom prst="rect">
+            <a:avLst/>
+          </a:prstGeom>
+          <a:noFill/>
+        </p:spPr>
+        <p:txBody>
+          <a:bodyPr wrap="square">
+            <a:spAutoFit/>
+          </a:bodyPr>
+          <a:lstStyle/>
+          <a:p>
+            <a:pPr algn="l">
+              <a:lnSpc>
+                <a:spcPct val="105000"/>
+              </a:lnSpc>
+              <a:spcBef>
+                <a:spcPts val="0"/>
+              </a:spcBef>
+              <a:spcAft>
+                <a:spcPts val="0"/>
+              </a:spcAft>
+            </a:pPr>
+            <a:r>
+              <a:rPr sz="1500" b="0" i="0">
+                <a:solidFill>
+                  <a:srgbClr val="5C6566"/>
+                </a:solidFill>
+                <a:latin typeface="Inter"/>
+              </a:rPr>
+              <a:t>A payment arrives. Matching it to the right invoice is still a person and a remittance PDF.</a:t>
+            </a:r>
+          </a:p>
+        </p:txBody>
+      </p:sp>
+      <p:sp>
+        <p:nvSpPr>
+          <p:cNvPr id="11" name="Rectangle 10"/>
           <p:cNvSpPr/>
           <p:nvPr/>
         </p:nvSpPr>
         <p:spPr>
           <a:xfrm>
-            <a:off x="4389120" y="2148840"/>
-            <a:ext cx="3566160" cy="3383280"/>
-          </a:xfrm>
-          <a:prstGeom prst="roundRect">
-            <a:avLst>
-              <a:gd name="adj" fmla="val 12000"/>
-            </a:avLst>
+            <a:off x="685800" y="4837176"/>
+            <a:ext cx="10789920" cy="9525"/>
+          </a:xfrm>
+          <a:prstGeom prst="rect">
+            <a:avLst/>
           </a:prstGeom>
           <a:solidFill>
-            <a:srgbClr val="F3FFFE"/>
+            <a:srgbClr val="D8D1C6"/>
           </a:solidFill>
-          <a:ln w="15875">
-            <a:solidFill>
-              <a:srgbClr val="C0EDEE"/>
-            </a:solidFill>
+          <a:ln>
+            <a:noFill/>
           </a:ln>
         </p:spPr>
         <p:style>
@@ -3759,47 +3872,14 @@
       </p:sp>
       <p:sp>
         <p:nvSpPr>
-          <p:cNvPr id="11" name="TextBox 10"/>
-          <p:cNvSpPr txBox="1"/>
-          <p:nvPr/>
-        </p:nvSpPr>
-        <p:spPr>
-          <a:xfrm>
-            <a:off x="4663440" y="2377440"/>
-            <a:ext cx="2926080" cy="548640"/>
-          </a:xfrm>
-          <a:prstGeom prst="rect">
-            <a:avLst/>
-          </a:prstGeom>
-          <a:noFill/>
-        </p:spPr>
-        <p:txBody>
-          <a:bodyPr wrap="square" anchor="t"/>
-          <a:lstStyle/>
-          <a:p>
-            <a:pPr algn="l"/>
-            <a:r>
-              <a:rPr sz="2800" b="1">
-                <a:solidFill>
-                  <a:srgbClr val="FC821F"/>
-                </a:solidFill>
-                <a:latin typeface="Calibri"/>
-              </a:rPr>
-              <a:t>02</a:t>
-            </a:r>
-          </a:p>
-        </p:txBody>
-      </p:sp>
-      <p:sp>
-        <p:nvSpPr>
           <p:cNvPr id="12" name="TextBox 11"/>
           <p:cNvSpPr txBox="1"/>
           <p:nvPr/>
         </p:nvSpPr>
         <p:spPr>
           <a:xfrm>
-            <a:off x="4663440" y="3108960"/>
-            <a:ext cx="3017520" cy="731520"/>
+            <a:off x="685800" y="4910328"/>
+            <a:ext cx="2286000" cy="411480"/>
           </a:xfrm>
           <a:prstGeom prst="rect">
             <a:avLst/>
@@ -3807,18 +3887,30 @@
           <a:noFill/>
         </p:spPr>
         <p:txBody>
-          <a:bodyPr wrap="square" anchor="t"/>
-          <a:lstStyle/>
-          <a:p>
-            <a:pPr algn="l"/>
-            <a:r>
-              <a:rPr sz="2200" b="1">
-                <a:solidFill>
-                  <a:srgbClr val="072F35"/>
-                </a:solidFill>
-                <a:latin typeface="Calibri"/>
+          <a:bodyPr wrap="square">
+            <a:spAutoFit/>
+          </a:bodyPr>
+          <a:lstStyle/>
+          <a:p>
+            <a:pPr algn="l">
+              <a:lnSpc>
+                <a:spcPct val="105000"/>
+              </a:lnSpc>
+              <a:spcBef>
+                <a:spcPts val="0"/>
+              </a:spcBef>
+              <a:spcAft>
+                <a:spcPts val="0"/>
+              </a:spcAft>
+            </a:pPr>
+            <a:r>
+              <a:rPr sz="1500" b="1" i="0">
+                <a:solidFill>
+                  <a:srgbClr val="1A2426"/>
+                </a:solidFill>
+                <a:latin typeface="Inter"/>
               </a:rPr>
-              <a:t>Payables without control</a:t>
+              <a:t>Payables</a:t>
             </a:r>
           </a:p>
         </p:txBody>
@@ -3831,8 +3923,8 @@
         </p:nvSpPr>
         <p:spPr>
           <a:xfrm>
-            <a:off x="4663440" y="3977639"/>
-            <a:ext cx="3017520" cy="1280160"/>
+            <a:off x="3108960" y="4910328"/>
+            <a:ext cx="8321040" cy="457200"/>
           </a:xfrm>
           <a:prstGeom prst="rect">
             <a:avLst/>
@@ -3840,45 +3932,53 @@
           <a:noFill/>
         </p:spPr>
         <p:txBody>
-          <a:bodyPr wrap="square" anchor="t"/>
-          <a:lstStyle/>
-          <a:p>
-            <a:pPr algn="l"/>
-            <a:r>
-              <a:rPr sz="1500" b="0">
-                <a:solidFill>
-                  <a:srgbClr val="3D5C62"/>
-                </a:solidFill>
-                <a:latin typeface="Calibri"/>
+          <a:bodyPr wrap="square">
+            <a:spAutoFit/>
+          </a:bodyPr>
+          <a:lstStyle/>
+          <a:p>
+            <a:pPr algn="l">
+              <a:lnSpc>
+                <a:spcPct val="105000"/>
+              </a:lnSpc>
+              <a:spcBef>
+                <a:spcPts val="0"/>
+              </a:spcBef>
+              <a:spcAft>
+                <a:spcPts val="0"/>
+              </a:spcAft>
+            </a:pPr>
+            <a:r>
+              <a:rPr sz="1500" b="0" i="0">
+                <a:solidFill>
+                  <a:srgbClr val="5C6566"/>
+                </a:solidFill>
+                <a:latin typeface="Inter"/>
               </a:rPr>
-              <a:t>Invoices, approvals, and payment timing sit in different tools. Errors and missed discounts follow.</a:t>
-            </a:r>
-          </a:p>
-        </p:txBody>
-      </p:sp>
-      <p:sp>
-        <p:nvSpPr>
-          <p:cNvPr id="14" name="Rounded Rectangle 13"/>
+              <a:t>The bill, the approval, and the day you actually pay are three different places.</a:t>
+            </a:r>
+          </a:p>
+        </p:txBody>
+      </p:sp>
+      <p:sp>
+        <p:nvSpPr>
+          <p:cNvPr id="14" name="Rectangle 13"/>
           <p:cNvSpPr/>
           <p:nvPr/>
         </p:nvSpPr>
         <p:spPr>
           <a:xfrm>
-            <a:off x="8183880" y="2148840"/>
-            <a:ext cx="3566160" cy="3383280"/>
-          </a:xfrm>
-          <a:prstGeom prst="roundRect">
-            <a:avLst>
-              <a:gd name="adj" fmla="val 12000"/>
-            </a:avLst>
+            <a:off x="685800" y="5495544"/>
+            <a:ext cx="10789920" cy="9525"/>
+          </a:xfrm>
+          <a:prstGeom prst="rect">
+            <a:avLst/>
           </a:prstGeom>
           <a:solidFill>
-            <a:srgbClr val="F3FFFE"/>
+            <a:srgbClr val="D8D1C6"/>
           </a:solidFill>
-          <a:ln w="15875">
-            <a:solidFill>
-              <a:srgbClr val="C0EDEE"/>
-            </a:solidFill>
+          <a:ln>
+            <a:noFill/>
           </a:ln>
         </p:spPr>
         <p:style>
@@ -3911,8 +4011,8 @@
         </p:nvSpPr>
         <p:spPr>
           <a:xfrm>
-            <a:off x="8458200" y="2377440"/>
-            <a:ext cx="2926080" cy="548640"/>
+            <a:off x="685800" y="5568696"/>
+            <a:ext cx="2286000" cy="411480"/>
           </a:xfrm>
           <a:prstGeom prst="rect">
             <a:avLst/>
@@ -3920,18 +4020,30 @@
           <a:noFill/>
         </p:spPr>
         <p:txBody>
-          <a:bodyPr wrap="square" anchor="t"/>
-          <a:lstStyle/>
-          <a:p>
-            <a:pPr algn="l"/>
-            <a:r>
-              <a:rPr sz="2800" b="1">
-                <a:solidFill>
-                  <a:srgbClr val="FC821F"/>
-                </a:solidFill>
-                <a:latin typeface="Calibri"/>
+          <a:bodyPr wrap="square">
+            <a:spAutoFit/>
+          </a:bodyPr>
+          <a:lstStyle/>
+          <a:p>
+            <a:pPr algn="l">
+              <a:lnSpc>
+                <a:spcPct val="105000"/>
+              </a:lnSpc>
+              <a:spcBef>
+                <a:spcPts val="0"/>
+              </a:spcBef>
+              <a:spcAft>
+                <a:spcPts val="0"/>
+              </a:spcAft>
+            </a:pPr>
+            <a:r>
+              <a:rPr sz="1500" b="1" i="0">
+                <a:solidFill>
+                  <a:srgbClr val="1A2426"/>
+                </a:solidFill>
+                <a:latin typeface="Inter"/>
               </a:rPr>
-              <a:t>03</a:t>
+              <a:t>Cash position</a:t>
             </a:r>
           </a:p>
         </p:txBody>
@@ -3944,8 +4056,8 @@
         </p:nvSpPr>
         <p:spPr>
           <a:xfrm>
-            <a:off x="8458200" y="3108960"/>
-            <a:ext cx="3017520" cy="731520"/>
+            <a:off x="3108960" y="5568696"/>
+            <a:ext cx="8321040" cy="457200"/>
           </a:xfrm>
           <a:prstGeom prst="rect">
             <a:avLst/>
@@ -3953,18 +4065,30 @@
           <a:noFill/>
         </p:spPr>
         <p:txBody>
-          <a:bodyPr wrap="square" anchor="t"/>
-          <a:lstStyle/>
-          <a:p>
-            <a:pPr algn="l"/>
-            <a:r>
-              <a:rPr sz="2200" b="1">
-                <a:solidFill>
-                  <a:srgbClr val="072F35"/>
-                </a:solidFill>
-                <a:latin typeface="Calibri"/>
+          <a:bodyPr wrap="square">
+            <a:spAutoFit/>
+          </a:bodyPr>
+          <a:lstStyle/>
+          <a:p>
+            <a:pPr algn="l">
+              <a:lnSpc>
+                <a:spcPct val="105000"/>
+              </a:lnSpc>
+              <a:spcBef>
+                <a:spcPts val="0"/>
+              </a:spcBef>
+              <a:spcAft>
+                <a:spcPts val="0"/>
+              </a:spcAft>
+            </a:pPr>
+            <a:r>
+              <a:rPr sz="1500" b="0" i="0">
+                <a:solidFill>
+                  <a:srgbClr val="5C6566"/>
+                </a:solidFill>
+                <a:latin typeface="Inter"/>
               </a:rPr>
-              <a:t>Treasury after the fact</a:t>
+              <a:t>Treasury is whatever was exported from the banks yesterday.</a:t>
             </a:r>
           </a:p>
         </p:txBody>
@@ -3977,8 +4101,8 @@
         </p:nvSpPr>
         <p:spPr>
           <a:xfrm>
-            <a:off x="8458200" y="3977639"/>
-            <a:ext cx="3017520" cy="1280160"/>
+            <a:off x="640080" y="6446520"/>
+            <a:ext cx="7315200" cy="256032"/>
           </a:xfrm>
           <a:prstGeom prst="rect">
             <a:avLst/>
@@ -3986,18 +4110,30 @@
           <a:noFill/>
         </p:spPr>
         <p:txBody>
-          <a:bodyPr wrap="square" anchor="t"/>
-          <a:lstStyle/>
-          <a:p>
-            <a:pPr algn="l"/>
-            <a:r>
-              <a:rPr sz="1500" b="0">
-                <a:solidFill>
-                  <a:srgbClr val="3D5C62"/>
-                </a:solidFill>
-                <a:latin typeface="Calibri"/>
+          <a:bodyPr wrap="square">
+            <a:spAutoFit/>
+          </a:bodyPr>
+          <a:lstStyle/>
+          <a:p>
+            <a:pPr algn="l">
+              <a:lnSpc>
+                <a:spcPct val="105000"/>
+              </a:lnSpc>
+              <a:spcBef>
+                <a:spcPts val="0"/>
+              </a:spcBef>
+              <a:spcAft>
+                <a:spcPts val="0"/>
+              </a:spcAft>
+            </a:pPr>
+            <a:r>
+              <a:rPr sz="1100" b="0" i="0">
+                <a:solidFill>
+                  <a:srgbClr val="5C6566"/>
+                </a:solidFill>
+                <a:latin typeface="Inter"/>
               </a:rPr>
-              <a:t>Cash positions, FX, and liquidity are reconciled after the close, not while the money is moving.</a:t>
+              <a:t>opencfo.tech</a:t>
             </a:r>
           </a:p>
         </p:txBody>
@@ -4010,8 +4146,8 @@
         </p:nvSpPr>
         <p:spPr>
           <a:xfrm>
-            <a:off x="594360" y="5852160"/>
-            <a:ext cx="10972800" cy="548640"/>
+            <a:off x="9326880" y="6446520"/>
+            <a:ext cx="2194560" cy="256032"/>
           </a:xfrm>
           <a:prstGeom prst="rect">
             <a:avLst/>
@@ -4019,18 +4155,30 @@
           <a:noFill/>
         </p:spPr>
         <p:txBody>
-          <a:bodyPr wrap="square" anchor="t"/>
-          <a:lstStyle/>
-          <a:p>
-            <a:pPr algn="l"/>
-            <a:r>
-              <a:rPr sz="1800" b="1">
-                <a:solidFill>
-                  <a:srgbClr val="072F35"/>
-                </a:solidFill>
-                <a:latin typeface="Calibri"/>
+          <a:bodyPr wrap="square">
+            <a:spAutoFit/>
+          </a:bodyPr>
+          <a:lstStyle/>
+          <a:p>
+            <a:pPr algn="r">
+              <a:lnSpc>
+                <a:spcPct val="105000"/>
+              </a:lnSpc>
+              <a:spcBef>
+                <a:spcPts val="0"/>
+              </a:spcBef>
+              <a:spcAft>
+                <a:spcPts val="0"/>
+              </a:spcAft>
+            </a:pPr>
+            <a:r>
+              <a:rPr sz="1100" b="0" i="0">
+                <a:solidFill>
+                  <a:srgbClr val="5C6566"/>
+                </a:solidFill>
+                <a:latin typeface="Inter"/>
               </a:rPr>
-              <a:t>The ERP stores the numbers. It does not run the next action.</a:t>
+              <a:t>2  /  9</a:t>
             </a:r>
           </a:p>
         </p:txBody>
@@ -4068,7 +4216,7 @@
             <a:avLst/>
           </a:prstGeom>
           <a:solidFill>
-            <a:srgbClr val="072F35"/>
+            <a:srgbClr val="F7F5F0"/>
           </a:solidFill>
           <a:ln>
             <a:noFill/>
@@ -4104,8 +4252,8 @@
         </p:nvSpPr>
         <p:spPr>
           <a:xfrm>
-            <a:off x="594360" y="365760"/>
-            <a:ext cx="9144000" cy="274320"/>
+            <a:off x="685800" y="457200"/>
+            <a:ext cx="10058400" cy="365760"/>
           </a:xfrm>
           <a:prstGeom prst="rect">
             <a:avLst/>
@@ -4113,18 +4261,30 @@
           <a:noFill/>
         </p:spPr>
         <p:txBody>
-          <a:bodyPr wrap="square" anchor="t"/>
-          <a:lstStyle/>
-          <a:p>
-            <a:pPr algn="l"/>
-            <a:r>
-              <a:rPr sz="1300" b="1">
-                <a:solidFill>
-                  <a:srgbClr val="49D6CE"/>
-                </a:solidFill>
-                <a:latin typeface="Calibri"/>
+          <a:bodyPr wrap="square">
+            <a:spAutoFit/>
+          </a:bodyPr>
+          <a:lstStyle/>
+          <a:p>
+            <a:pPr algn="l">
+              <a:lnSpc>
+                <a:spcPct val="105000"/>
+              </a:lnSpc>
+              <a:spcBef>
+                <a:spcPts val="0"/>
+              </a:spcBef>
+              <a:spcAft>
+                <a:spcPts val="0"/>
+              </a:spcAft>
+            </a:pPr>
+            <a:r>
+              <a:rPr sz="1400" b="0" i="0">
+                <a:solidFill>
+                  <a:srgbClr val="C45C12"/>
+                </a:solidFill>
+                <a:latin typeface="Inter"/>
               </a:rPr>
-              <a:t>THE PRODUCT</a:t>
+              <a:t>What we do</a:t>
             </a:r>
           </a:p>
         </p:txBody>
@@ -4137,8 +4297,8 @@
         </p:nvSpPr>
         <p:spPr>
           <a:xfrm>
-            <a:off x="594360" y="731520"/>
-            <a:ext cx="10972800" cy="1188720"/>
+            <a:off x="685800" y="960120"/>
+            <a:ext cx="10515600" cy="1828800"/>
           </a:xfrm>
           <a:prstGeom prst="rect">
             <a:avLst/>
@@ -4146,19 +4306,31 @@
           <a:noFill/>
         </p:spPr>
         <p:txBody>
-          <a:bodyPr wrap="square" anchor="t"/>
-          <a:lstStyle/>
-          <a:p>
-            <a:pPr algn="l"/>
-            <a:r>
-              <a:rPr sz="3400" b="1">
-                <a:solidFill>
-                  <a:srgbClr val="FFFFFF"/>
-                </a:solidFill>
-                <a:latin typeface="Calibri"/>
+          <a:bodyPr wrap="square">
+            <a:spAutoFit/>
+          </a:bodyPr>
+          <a:lstStyle/>
+          <a:p>
+            <a:pPr algn="l">
+              <a:lnSpc>
+                <a:spcPct val="98000"/>
+              </a:lnSpc>
+              <a:spcBef>
+                <a:spcPts val="0"/>
+              </a:spcBef>
+              <a:spcAft>
+                <a:spcPts val="0"/>
+              </a:spcAft>
+            </a:pPr>
+            <a:r>
+              <a:rPr sz="3600" b="0" i="0">
+                <a:solidFill>
+                  <a:srgbClr val="1A2426"/>
+                </a:solidFill>
+                <a:latin typeface="Liberation Serif"/>
               </a:rPr>
-              <a:t>One system of intelligence
-above the system of record.</a:t>
+              <a:t>OpenCFO sits on top of the
+ERP and does the cash work.</a:t>
             </a:r>
           </a:p>
         </p:txBody>
@@ -4171,8 +4343,8 @@
         </p:nvSpPr>
         <p:spPr>
           <a:xfrm>
-            <a:off x="594360" y="2468880"/>
-            <a:ext cx="10515600" cy="822960"/>
+            <a:off x="685800" y="3108960"/>
+            <a:ext cx="6583680" cy="2377440"/>
           </a:xfrm>
           <a:prstGeom prst="rect">
             <a:avLst/>
@@ -4180,40 +4352,95 @@
           <a:noFill/>
         </p:spPr>
         <p:txBody>
-          <a:bodyPr wrap="square" anchor="t"/>
-          <a:lstStyle/>
-          <a:p>
-            <a:pPr algn="l"/>
-            <a:r>
-              <a:rPr sz="1800" b="0">
-                <a:solidFill>
-                  <a:srgbClr val="D5F4F4"/>
-                </a:solidFill>
-                <a:latin typeface="Calibri"/>
+          <a:bodyPr wrap="square">
+            <a:spAutoFit/>
+          </a:bodyPr>
+          <a:lstStyle/>
+          <a:p>
+            <a:pPr algn="l">
+              <a:lnSpc>
+                <a:spcPct val="120000"/>
+              </a:lnSpc>
+              <a:spcBef>
+                <a:spcPts val="0"/>
+              </a:spcBef>
+              <a:spcAft>
+                <a:spcPts val="0"/>
+              </a:spcAft>
+            </a:pPr>
+            <a:r>
+              <a:rPr sz="1800" b="0" i="0">
+                <a:solidFill>
+                  <a:srgbClr val="5C6566"/>
+                </a:solidFill>
+                <a:latin typeface="Inter"/>
               </a:rPr>
-              <a:t>OpenCFO connects to the ERP, the accounting system, and the banks. AI agents monitor, decide, and act on cash flow, then sync the result back.</a:t>
-            </a:r>
-          </a:p>
-        </p:txBody>
-      </p:sp>
-      <p:sp>
-        <p:nvSpPr>
-          <p:cNvPr id="6" name="Rounded Rectangle 5"/>
+              <a:t>We connect to the accounting system and the banks. From there the product runs the jobs a finance team keeps doing by hand: chasing invoices, applying cash, moving bills through approval, and showing cash across accounts.</a:t>
+            </a:r>
+          </a:p>
+        </p:txBody>
+      </p:sp>
+      <p:sp>
+        <p:nvSpPr>
+          <p:cNvPr id="6" name="TextBox 5"/>
+          <p:cNvSpPr txBox="1"/>
+          <p:nvPr/>
+        </p:nvSpPr>
+        <p:spPr>
+          <a:xfrm>
+            <a:off x="7680960" y="3154680"/>
+            <a:ext cx="3840480" cy="2377440"/>
+          </a:xfrm>
+          <a:prstGeom prst="rect">
+            <a:avLst/>
+          </a:prstGeom>
+          <a:noFill/>
+        </p:spPr>
+        <p:txBody>
+          <a:bodyPr wrap="square">
+            <a:spAutoFit/>
+          </a:bodyPr>
+          <a:lstStyle/>
+          <a:p>
+            <a:pPr algn="l">
+              <a:lnSpc>
+                <a:spcPct val="120000"/>
+              </a:lnSpc>
+              <a:spcBef>
+                <a:spcPts val="0"/>
+              </a:spcBef>
+              <a:spcAft>
+                <a:spcPts val="0"/>
+              </a:spcAft>
+            </a:pPr>
+            <a:r>
+              <a:rPr sz="1800" b="0" i="0">
+                <a:solidFill>
+                  <a:srgbClr val="1A2426"/>
+                </a:solidFill>
+                <a:latin typeface="Inter"/>
+              </a:rPr>
+              <a:t>The ERP stays the system of record. We are not asking anyone to move their ledger.</a:t>
+            </a:r>
+          </a:p>
+        </p:txBody>
+      </p:sp>
+      <p:sp>
+        <p:nvSpPr>
+          <p:cNvPr id="7" name="Rectangle 6"/>
           <p:cNvSpPr/>
           <p:nvPr/>
         </p:nvSpPr>
         <p:spPr>
           <a:xfrm>
-            <a:off x="594360" y="3566160"/>
-            <a:ext cx="1371600" cy="685800"/>
-          </a:xfrm>
-          <a:prstGeom prst="roundRect">
-            <a:avLst>
-              <a:gd name="adj" fmla="val 12000"/>
-            </a:avLst>
+            <a:off x="7680960" y="3063240"/>
+            <a:ext cx="1005840" cy="31750"/>
+          </a:xfrm>
+          <a:prstGeom prst="rect">
+            <a:avLst/>
           </a:prstGeom>
           <a:solidFill>
-            <a:srgbClr val="FC821F"/>
+            <a:srgbClr val="C45C12"/>
           </a:solidFill>
           <a:ln>
             <a:noFill/>
@@ -4243,47 +4470,14 @@
       </p:sp>
       <p:sp>
         <p:nvSpPr>
-          <p:cNvPr id="7" name="TextBox 6"/>
-          <p:cNvSpPr txBox="1"/>
-          <p:nvPr/>
-        </p:nvSpPr>
-        <p:spPr>
-          <a:xfrm>
-            <a:off x="594360" y="3712463"/>
-            <a:ext cx="1371600" cy="411480"/>
-          </a:xfrm>
-          <a:prstGeom prst="rect">
-            <a:avLst/>
-          </a:prstGeom>
-          <a:noFill/>
-        </p:spPr>
-        <p:txBody>
-          <a:bodyPr wrap="square" anchor="t"/>
-          <a:lstStyle/>
-          <a:p>
-            <a:pPr algn="ctr"/>
-            <a:r>
-              <a:rPr sz="1800" b="1">
-                <a:solidFill>
-                  <a:srgbClr val="FFFFFF"/>
-                </a:solidFill>
-                <a:latin typeface="Calibri"/>
-              </a:rPr>
-              <a:t>AR</a:t>
-            </a:r>
-          </a:p>
-        </p:txBody>
-      </p:sp>
-      <p:sp>
-        <p:nvSpPr>
           <p:cNvPr id="8" name="TextBox 7"/>
           <p:cNvSpPr txBox="1"/>
           <p:nvPr/>
         </p:nvSpPr>
         <p:spPr>
           <a:xfrm>
-            <a:off x="2194560" y="3703320"/>
-            <a:ext cx="8686800" cy="457200"/>
+            <a:off x="640080" y="6446520"/>
+            <a:ext cx="7315200" cy="256032"/>
           </a:xfrm>
           <a:prstGeom prst="rect">
             <a:avLst/>
@@ -4291,77 +4485,44 @@
           <a:noFill/>
         </p:spPr>
         <p:txBody>
-          <a:bodyPr wrap="square" anchor="t"/>
-          <a:lstStyle/>
-          <a:p>
-            <a:pPr algn="l"/>
-            <a:r>
-              <a:rPr sz="2000" b="0">
-                <a:solidFill>
-                  <a:srgbClr val="FFFFFF"/>
-                </a:solidFill>
-                <a:latin typeface="Calibri"/>
+          <a:bodyPr wrap="square">
+            <a:spAutoFit/>
+          </a:bodyPr>
+          <a:lstStyle/>
+          <a:p>
+            <a:pPr algn="l">
+              <a:lnSpc>
+                <a:spcPct val="105000"/>
+              </a:lnSpc>
+              <a:spcBef>
+                <a:spcPts val="0"/>
+              </a:spcBef>
+              <a:spcAft>
+                <a:spcPts val="0"/>
+              </a:spcAft>
+            </a:pPr>
+            <a:r>
+              <a:rPr sz="1100" b="0" i="0">
+                <a:solidFill>
+                  <a:srgbClr val="5C6566"/>
+                </a:solidFill>
+                <a:latin typeface="Inter"/>
               </a:rPr>
-              <a:t>Collections, cash application, and credit risk in one view.</a:t>
-            </a:r>
-          </a:p>
-        </p:txBody>
-      </p:sp>
-      <p:sp>
-        <p:nvSpPr>
-          <p:cNvPr id="9" name="Rounded Rectangle 8"/>
-          <p:cNvSpPr/>
-          <p:nvPr/>
-        </p:nvSpPr>
-        <p:spPr>
-          <a:xfrm>
-            <a:off x="594360" y="4480560"/>
-            <a:ext cx="1371600" cy="685800"/>
-          </a:xfrm>
-          <a:prstGeom prst="roundRect">
-            <a:avLst>
-              <a:gd name="adj" fmla="val 12000"/>
-            </a:avLst>
-          </a:prstGeom>
-          <a:solidFill>
-            <a:srgbClr val="FC821F"/>
-          </a:solidFill>
-          <a:ln>
-            <a:noFill/>
-          </a:ln>
-        </p:spPr>
-        <p:style>
-          <a:lnRef idx="1">
-            <a:schemeClr val="accent1"/>
-          </a:lnRef>
-          <a:fillRef idx="3">
-            <a:schemeClr val="accent1"/>
-          </a:fillRef>
-          <a:effectRef idx="2">
-            <a:schemeClr val="accent1"/>
-          </a:effectRef>
-          <a:fontRef idx="minor">
-            <a:schemeClr val="lt1"/>
-          </a:fontRef>
-        </p:style>
-        <p:txBody>
-          <a:bodyPr rtlCol="0" anchor="ctr"/>
-          <a:lstStyle/>
-          <a:p>
-            <a:pPr algn="ctr"/>
-          </a:p>
-        </p:txBody>
-      </p:sp>
-      <p:sp>
-        <p:nvSpPr>
-          <p:cNvPr id="10" name="TextBox 9"/>
+              <a:t>opencfo.tech</a:t>
+            </a:r>
+          </a:p>
+        </p:txBody>
+      </p:sp>
+      <p:sp>
+        <p:nvSpPr>
+          <p:cNvPr id="9" name="TextBox 8"/>
           <p:cNvSpPr txBox="1"/>
           <p:nvPr/>
         </p:nvSpPr>
         <p:spPr>
           <a:xfrm>
-            <a:off x="594360" y="4626864"/>
-            <a:ext cx="1371600" cy="411480"/>
+            <a:off x="9326880" y="6446520"/>
+            <a:ext cx="2194560" cy="256032"/>
           </a:xfrm>
           <a:prstGeom prst="rect">
             <a:avLst/>
@@ -4369,162 +4530,30 @@
           <a:noFill/>
         </p:spPr>
         <p:txBody>
-          <a:bodyPr wrap="square" anchor="t"/>
-          <a:lstStyle/>
-          <a:p>
-            <a:pPr algn="ctr"/>
-            <a:r>
-              <a:rPr sz="1800" b="1">
-                <a:solidFill>
-                  <a:srgbClr val="FFFFFF"/>
-                </a:solidFill>
-                <a:latin typeface="Calibri"/>
+          <a:bodyPr wrap="square">
+            <a:spAutoFit/>
+          </a:bodyPr>
+          <a:lstStyle/>
+          <a:p>
+            <a:pPr algn="r">
+              <a:lnSpc>
+                <a:spcPct val="105000"/>
+              </a:lnSpc>
+              <a:spcBef>
+                <a:spcPts val="0"/>
+              </a:spcBef>
+              <a:spcAft>
+                <a:spcPts val="0"/>
+              </a:spcAft>
+            </a:pPr>
+            <a:r>
+              <a:rPr sz="1100" b="0" i="0">
+                <a:solidFill>
+                  <a:srgbClr val="5C6566"/>
+                </a:solidFill>
+                <a:latin typeface="Inter"/>
               </a:rPr>
-              <a:t>AP</a:t>
-            </a:r>
-          </a:p>
-        </p:txBody>
-      </p:sp>
-      <p:sp>
-        <p:nvSpPr>
-          <p:cNvPr id="11" name="TextBox 10"/>
-          <p:cNvSpPr txBox="1"/>
-          <p:nvPr/>
-        </p:nvSpPr>
-        <p:spPr>
-          <a:xfrm>
-            <a:off x="2194560" y="4617720"/>
-            <a:ext cx="8686800" cy="457200"/>
-          </a:xfrm>
-          <a:prstGeom prst="rect">
-            <a:avLst/>
-          </a:prstGeom>
-          <a:noFill/>
-        </p:spPr>
-        <p:txBody>
-          <a:bodyPr wrap="square" anchor="t"/>
-          <a:lstStyle/>
-          <a:p>
-            <a:pPr algn="l"/>
-            <a:r>
-              <a:rPr sz="2000" b="0">
-                <a:solidFill>
-                  <a:srgbClr val="FFFFFF"/>
-                </a:solidFill>
-                <a:latin typeface="Calibri"/>
-              </a:rPr>
-              <a:t>Invoice capture, 2-way and 3-way match, and payment timing.</a:t>
-            </a:r>
-          </a:p>
-        </p:txBody>
-      </p:sp>
-      <p:sp>
-        <p:nvSpPr>
-          <p:cNvPr id="12" name="Rounded Rectangle 11"/>
-          <p:cNvSpPr/>
-          <p:nvPr/>
-        </p:nvSpPr>
-        <p:spPr>
-          <a:xfrm>
-            <a:off x="594360" y="5394960"/>
-            <a:ext cx="1371600" cy="685800"/>
-          </a:xfrm>
-          <a:prstGeom prst="roundRect">
-            <a:avLst>
-              <a:gd name="adj" fmla="val 12000"/>
-            </a:avLst>
-          </a:prstGeom>
-          <a:solidFill>
-            <a:srgbClr val="FC821F"/>
-          </a:solidFill>
-          <a:ln>
-            <a:noFill/>
-          </a:ln>
-        </p:spPr>
-        <p:style>
-          <a:lnRef idx="1">
-            <a:schemeClr val="accent1"/>
-          </a:lnRef>
-          <a:fillRef idx="3">
-            <a:schemeClr val="accent1"/>
-          </a:fillRef>
-          <a:effectRef idx="2">
-            <a:schemeClr val="accent1"/>
-          </a:effectRef>
-          <a:fontRef idx="minor">
-            <a:schemeClr val="lt1"/>
-          </a:fontRef>
-        </p:style>
-        <p:txBody>
-          <a:bodyPr rtlCol="0" anchor="ctr"/>
-          <a:lstStyle/>
-          <a:p>
-            <a:pPr algn="ctr"/>
-          </a:p>
-        </p:txBody>
-      </p:sp>
-      <p:sp>
-        <p:nvSpPr>
-          <p:cNvPr id="13" name="TextBox 12"/>
-          <p:cNvSpPr txBox="1"/>
-          <p:nvPr/>
-        </p:nvSpPr>
-        <p:spPr>
-          <a:xfrm>
-            <a:off x="594360" y="5541264"/>
-            <a:ext cx="1371600" cy="411480"/>
-          </a:xfrm>
-          <a:prstGeom prst="rect">
-            <a:avLst/>
-          </a:prstGeom>
-          <a:noFill/>
-        </p:spPr>
-        <p:txBody>
-          <a:bodyPr wrap="square" anchor="t"/>
-          <a:lstStyle/>
-          <a:p>
-            <a:pPr algn="ctr"/>
-            <a:r>
-              <a:rPr sz="1800" b="1">
-                <a:solidFill>
-                  <a:srgbClr val="FFFFFF"/>
-                </a:solidFill>
-                <a:latin typeface="Calibri"/>
-              </a:rPr>
-              <a:t>Treasury</a:t>
-            </a:r>
-          </a:p>
-        </p:txBody>
-      </p:sp>
-      <p:sp>
-        <p:nvSpPr>
-          <p:cNvPr id="14" name="TextBox 13"/>
-          <p:cNvSpPr txBox="1"/>
-          <p:nvPr/>
-        </p:nvSpPr>
-        <p:spPr>
-          <a:xfrm>
-            <a:off x="2194560" y="5532120"/>
-            <a:ext cx="8686800" cy="457200"/>
-          </a:xfrm>
-          <a:prstGeom prst="rect">
-            <a:avLst/>
-          </a:prstGeom>
-          <a:noFill/>
-        </p:spPr>
-        <p:txBody>
-          <a:bodyPr wrap="square" anchor="t"/>
-          <a:lstStyle/>
-          <a:p>
-            <a:pPr algn="l"/>
-            <a:r>
-              <a:rPr sz="2000" b="0">
-                <a:solidFill>
-                  <a:srgbClr val="FFFFFF"/>
-                </a:solidFill>
-                <a:latin typeface="Calibri"/>
-              </a:rPr>
-              <a:t>Cash positions, liquidity risk, and FX across entities.</a:t>
+              <a:t>3  /  9</a:t>
             </a:r>
           </a:p>
         </p:txBody>
@@ -4562,7 +4591,7 @@
             <a:avLst/>
           </a:prstGeom>
           <a:solidFill>
-            <a:srgbClr val="FFFFFF"/>
+            <a:srgbClr val="F7F5F0"/>
           </a:solidFill>
           <a:ln>
             <a:noFill/>
@@ -4592,44 +4621,46 @@
       </p:sp>
       <p:sp>
         <p:nvSpPr>
-          <p:cNvPr id="3" name="Rectangle 2"/>
-          <p:cNvSpPr/>
-          <p:nvPr/>
-        </p:nvSpPr>
-        <p:spPr>
-          <a:xfrm>
-            <a:off x="0" y="0"/>
-            <a:ext cx="12191695" cy="109728"/>
-          </a:xfrm>
-          <a:prstGeom prst="rect">
-            <a:avLst/>
-          </a:prstGeom>
-          <a:solidFill>
-            <a:srgbClr val="FC821F"/>
-          </a:solidFill>
-          <a:ln>
-            <a:noFill/>
-          </a:ln>
-        </p:spPr>
-        <p:style>
-          <a:lnRef idx="1">
-            <a:schemeClr val="accent1"/>
-          </a:lnRef>
-          <a:fillRef idx="3">
-            <a:schemeClr val="accent1"/>
-          </a:fillRef>
-          <a:effectRef idx="2">
-            <a:schemeClr val="accent1"/>
-          </a:effectRef>
-          <a:fontRef idx="minor">
-            <a:schemeClr val="lt1"/>
-          </a:fontRef>
-        </p:style>
-        <p:txBody>
-          <a:bodyPr rtlCol="0" anchor="ctr"/>
-          <a:lstStyle/>
-          <a:p>
-            <a:pPr algn="ctr"/>
+          <p:cNvPr id="3" name="TextBox 2"/>
+          <p:cNvSpPr txBox="1"/>
+          <p:nvPr/>
+        </p:nvSpPr>
+        <p:spPr>
+          <a:xfrm>
+            <a:off x="685800" y="411480"/>
+            <a:ext cx="10058400" cy="320040"/>
+          </a:xfrm>
+          <a:prstGeom prst="rect">
+            <a:avLst/>
+          </a:prstGeom>
+          <a:noFill/>
+        </p:spPr>
+        <p:txBody>
+          <a:bodyPr wrap="square">
+            <a:spAutoFit/>
+          </a:bodyPr>
+          <a:lstStyle/>
+          <a:p>
+            <a:pPr algn="l">
+              <a:lnSpc>
+                <a:spcPct val="105000"/>
+              </a:lnSpc>
+              <a:spcBef>
+                <a:spcPts val="0"/>
+              </a:spcBef>
+              <a:spcAft>
+                <a:spcPts val="0"/>
+              </a:spcAft>
+            </a:pPr>
+            <a:r>
+              <a:rPr sz="1400" b="0" i="0">
+                <a:solidFill>
+                  <a:srgbClr val="C45C12"/>
+                </a:solidFill>
+                <a:latin typeface="Inter"/>
+              </a:rPr>
+              <a:t>Receivables</a:t>
+            </a:r>
           </a:p>
         </p:txBody>
       </p:sp>
@@ -4641,8 +4672,8 @@
         </p:nvSpPr>
         <p:spPr>
           <a:xfrm>
-            <a:off x="502920" y="292608"/>
-            <a:ext cx="10972800" cy="256032"/>
+            <a:off x="685800" y="822960"/>
+            <a:ext cx="10058400" cy="914400"/>
           </a:xfrm>
           <a:prstGeom prst="rect">
             <a:avLst/>
@@ -4650,18 +4681,30 @@
           <a:noFill/>
         </p:spPr>
         <p:txBody>
-          <a:bodyPr wrap="square" anchor="t"/>
-          <a:lstStyle/>
-          <a:p>
-            <a:pPr algn="l"/>
-            <a:r>
-              <a:rPr sz="1300" b="1">
-                <a:solidFill>
-                  <a:srgbClr val="FC821F"/>
-                </a:solidFill>
-                <a:latin typeface="Calibri"/>
+          <a:bodyPr wrap="square">
+            <a:spAutoFit/>
+          </a:bodyPr>
+          <a:lstStyle/>
+          <a:p>
+            <a:pPr algn="l">
+              <a:lnSpc>
+                <a:spcPct val="105000"/>
+              </a:lnSpc>
+              <a:spcBef>
+                <a:spcPts val="0"/>
+              </a:spcBef>
+              <a:spcAft>
+                <a:spcPts val="0"/>
+              </a:spcAft>
+            </a:pPr>
+            <a:r>
+              <a:rPr sz="3000" b="0" i="0">
+                <a:solidFill>
+                  <a:srgbClr val="1A2426"/>
+                </a:solidFill>
+                <a:latin typeface="Liberation Serif"/>
               </a:rPr>
-              <a:t>WHAT IT DOES</a:t>
+              <a:t>One view of who owes you, and what to do next.</a:t>
             </a:r>
           </a:p>
         </p:txBody>
@@ -4674,8 +4717,8 @@
         </p:nvSpPr>
         <p:spPr>
           <a:xfrm>
-            <a:off x="502920" y="566928"/>
-            <a:ext cx="10972800" cy="548640"/>
+            <a:off x="685800" y="2148840"/>
+            <a:ext cx="1097280" cy="365760"/>
           </a:xfrm>
           <a:prstGeom prst="rect">
             <a:avLst/>
@@ -4683,109 +4726,121 @@
           <a:noFill/>
         </p:spPr>
         <p:txBody>
-          <a:bodyPr wrap="square" anchor="t"/>
-          <a:lstStyle/>
-          <a:p>
-            <a:pPr algn="l"/>
-            <a:r>
-              <a:rPr sz="3000" b="1">
-                <a:solidFill>
-                  <a:srgbClr val="072F35"/>
-                </a:solidFill>
-                <a:latin typeface="Calibri"/>
+          <a:bodyPr wrap="square">
+            <a:spAutoFit/>
+          </a:bodyPr>
+          <a:lstStyle/>
+          <a:p>
+            <a:pPr algn="l">
+              <a:lnSpc>
+                <a:spcPct val="105000"/>
+              </a:lnSpc>
+              <a:spcBef>
+                <a:spcPts val="0"/>
+              </a:spcBef>
+              <a:spcAft>
+                <a:spcPts val="0"/>
+              </a:spcAft>
+            </a:pPr>
+            <a:r>
+              <a:rPr sz="1600" b="0" i="0">
+                <a:solidFill>
+                  <a:srgbClr val="C45C12"/>
+                </a:solidFill>
+                <a:latin typeface="Liberation Serif"/>
               </a:rPr>
-              <a:t>Three workflows. One cash picture.</a:t>
-            </a:r>
-          </a:p>
-        </p:txBody>
-      </p:sp>
-      <p:sp>
-        <p:nvSpPr>
-          <p:cNvPr id="6" name="Rounded Rectangle 5"/>
-          <p:cNvSpPr/>
-          <p:nvPr/>
-        </p:nvSpPr>
-        <p:spPr>
-          <a:xfrm>
-            <a:off x="457200" y="1463040"/>
-            <a:ext cx="3703320" cy="4846320"/>
-          </a:xfrm>
-          <a:prstGeom prst="roundRect">
-            <a:avLst>
-              <a:gd name="adj" fmla="val 12000"/>
-            </a:avLst>
-          </a:prstGeom>
-          <a:solidFill>
-            <a:srgbClr val="F3FFFE"/>
-          </a:solidFill>
-          <a:ln w="15875">
-            <a:solidFill>
-              <a:srgbClr val="C0EDEE"/>
-            </a:solidFill>
-          </a:ln>
-        </p:spPr>
-        <p:style>
-          <a:lnRef idx="1">
-            <a:schemeClr val="accent1"/>
-          </a:lnRef>
-          <a:fillRef idx="3">
-            <a:schemeClr val="accent1"/>
-          </a:fillRef>
-          <a:effectRef idx="2">
-            <a:schemeClr val="accent1"/>
-          </a:effectRef>
-          <a:fontRef idx="minor">
-            <a:schemeClr val="lt1"/>
-          </a:fontRef>
-        </p:style>
-        <p:txBody>
-          <a:bodyPr rtlCol="0" anchor="ctr"/>
-          <a:lstStyle/>
-          <a:p>
-            <a:pPr algn="ctr"/>
-          </a:p>
-        </p:txBody>
-      </p:sp>
-      <p:sp>
-        <p:nvSpPr>
-          <p:cNvPr id="7" name="Rectangle 6"/>
-          <p:cNvSpPr/>
-          <p:nvPr/>
-        </p:nvSpPr>
-        <p:spPr>
-          <a:xfrm>
-            <a:off x="457200" y="1463040"/>
-            <a:ext cx="3703320" cy="109728"/>
-          </a:xfrm>
-          <a:prstGeom prst="rect">
-            <a:avLst/>
-          </a:prstGeom>
-          <a:solidFill>
-            <a:srgbClr val="FC821F"/>
-          </a:solidFill>
-          <a:ln>
-            <a:noFill/>
-          </a:ln>
-        </p:spPr>
-        <p:style>
-          <a:lnRef idx="1">
-            <a:schemeClr val="accent1"/>
-          </a:lnRef>
-          <a:fillRef idx="3">
-            <a:schemeClr val="accent1"/>
-          </a:fillRef>
-          <a:effectRef idx="2">
-            <a:schemeClr val="accent1"/>
-          </a:effectRef>
-          <a:fontRef idx="minor">
-            <a:schemeClr val="lt1"/>
-          </a:fontRef>
-        </p:style>
-        <p:txBody>
-          <a:bodyPr rtlCol="0" anchor="ctr"/>
-          <a:lstStyle/>
-          <a:p>
-            <a:pPr algn="ctr"/>
+              <a:t>01</a:t>
+            </a:r>
+          </a:p>
+        </p:txBody>
+      </p:sp>
+      <p:sp>
+        <p:nvSpPr>
+          <p:cNvPr id="6" name="TextBox 5"/>
+          <p:cNvSpPr txBox="1"/>
+          <p:nvPr/>
+        </p:nvSpPr>
+        <p:spPr>
+          <a:xfrm>
+            <a:off x="1920240" y="2103120"/>
+            <a:ext cx="8686800" cy="365760"/>
+          </a:xfrm>
+          <a:prstGeom prst="rect">
+            <a:avLst/>
+          </a:prstGeom>
+          <a:noFill/>
+        </p:spPr>
+        <p:txBody>
+          <a:bodyPr wrap="square">
+            <a:spAutoFit/>
+          </a:bodyPr>
+          <a:lstStyle/>
+          <a:p>
+            <a:pPr algn="l">
+              <a:lnSpc>
+                <a:spcPct val="105000"/>
+              </a:lnSpc>
+              <a:spcBef>
+                <a:spcPts val="0"/>
+              </a:spcBef>
+              <a:spcAft>
+                <a:spcPts val="0"/>
+              </a:spcAft>
+            </a:pPr>
+            <a:r>
+              <a:rPr sz="2000" b="0" i="0">
+                <a:solidFill>
+                  <a:srgbClr val="1A2426"/>
+                </a:solidFill>
+                <a:latin typeface="Liberation Serif"/>
+              </a:rPr>
+              <a:t>Collections</a:t>
+            </a:r>
+          </a:p>
+        </p:txBody>
+      </p:sp>
+      <p:sp>
+        <p:nvSpPr>
+          <p:cNvPr id="7" name="TextBox 6"/>
+          <p:cNvSpPr txBox="1"/>
+          <p:nvPr/>
+        </p:nvSpPr>
+        <p:spPr>
+          <a:xfrm>
+            <a:off x="1920240" y="2532888"/>
+            <a:ext cx="8778240" cy="640080"/>
+          </a:xfrm>
+          <a:prstGeom prst="rect">
+            <a:avLst/>
+          </a:prstGeom>
+          <a:noFill/>
+        </p:spPr>
+        <p:txBody>
+          <a:bodyPr wrap="square">
+            <a:spAutoFit/>
+          </a:bodyPr>
+          <a:lstStyle/>
+          <a:p>
+            <a:pPr algn="l">
+              <a:lnSpc>
+                <a:spcPct val="105000"/>
+              </a:lnSpc>
+              <a:spcBef>
+                <a:spcPts val="0"/>
+              </a:spcBef>
+              <a:spcAft>
+                <a:spcPts val="0"/>
+              </a:spcAft>
+            </a:pPr>
+            <a:r>
+              <a:rPr sz="1600" b="0" i="0">
+                <a:solidFill>
+                  <a:srgbClr val="5C6566"/>
+                </a:solidFill>
+                <a:latin typeface="Inter"/>
+              </a:rPr>
+              <a:t>The queue is ranked. Follow-ups go out without a clerk building the list each morning.</a:t>
+            </a:r>
           </a:p>
         </p:txBody>
       </p:sp>
@@ -4797,8 +4852,8 @@
         </p:nvSpPr>
         <p:spPr>
           <a:xfrm>
-            <a:off x="685800" y="1737360"/>
-            <a:ext cx="3246120" cy="822960"/>
+            <a:off x="685800" y="3291840"/>
+            <a:ext cx="1097280" cy="365760"/>
           </a:xfrm>
           <a:prstGeom prst="rect">
             <a:avLst/>
@@ -4806,18 +4861,30 @@
           <a:noFill/>
         </p:spPr>
         <p:txBody>
-          <a:bodyPr wrap="square" anchor="t"/>
-          <a:lstStyle/>
-          <a:p>
-            <a:pPr algn="l"/>
-            <a:r>
-              <a:rPr sz="2200" b="1">
-                <a:solidFill>
-                  <a:srgbClr val="072F35"/>
-                </a:solidFill>
-                <a:latin typeface="Calibri"/>
+          <a:bodyPr wrap="square">
+            <a:spAutoFit/>
+          </a:bodyPr>
+          <a:lstStyle/>
+          <a:p>
+            <a:pPr algn="l">
+              <a:lnSpc>
+                <a:spcPct val="105000"/>
+              </a:lnSpc>
+              <a:spcBef>
+                <a:spcPts val="0"/>
+              </a:spcBef>
+              <a:spcAft>
+                <a:spcPts val="0"/>
+              </a:spcAft>
+            </a:pPr>
+            <a:r>
+              <a:rPr sz="1600" b="0" i="0">
+                <a:solidFill>
+                  <a:srgbClr val="C45C12"/>
+                </a:solidFill>
+                <a:latin typeface="Liberation Serif"/>
               </a:rPr>
-              <a:t>Accounts receivable</a:t>
+              <a:t>02</a:t>
             </a:r>
           </a:p>
         </p:txBody>
@@ -4830,8 +4897,8 @@
         </p:nvSpPr>
         <p:spPr>
           <a:xfrm>
-            <a:off x="685800" y="2743200"/>
-            <a:ext cx="3246120" cy="685800"/>
+            <a:off x="1920240" y="3246120"/>
+            <a:ext cx="8686800" cy="365760"/>
           </a:xfrm>
           <a:prstGeom prst="rect">
             <a:avLst/>
@@ -4839,18 +4906,30 @@
           <a:noFill/>
         </p:spPr>
         <p:txBody>
-          <a:bodyPr wrap="square" anchor="t"/>
-          <a:lstStyle/>
-          <a:p>
-            <a:pPr algn="l"/>
-            <a:r>
-              <a:rPr sz="1600" b="0">
-                <a:solidFill>
-                  <a:srgbClr val="3D5C62"/>
-                </a:solidFill>
-                <a:latin typeface="Calibri"/>
+          <a:bodyPr wrap="square">
+            <a:spAutoFit/>
+          </a:bodyPr>
+          <a:lstStyle/>
+          <a:p>
+            <a:pPr algn="l">
+              <a:lnSpc>
+                <a:spcPct val="105000"/>
+              </a:lnSpc>
+              <a:spcBef>
+                <a:spcPts val="0"/>
+              </a:spcBef>
+              <a:spcAft>
+                <a:spcPts val="0"/>
+              </a:spcAft>
+            </a:pPr>
+            <a:r>
+              <a:rPr sz="2000" b="0" i="0">
+                <a:solidFill>
+                  <a:srgbClr val="1A2426"/>
+                </a:solidFill>
+                <a:latin typeface="Liberation Serif"/>
               </a:rPr>
-              <a:t>Collections that prioritize follow-ups</a:t>
+              <a:t>Cash application</a:t>
             </a:r>
           </a:p>
         </p:txBody>
@@ -4863,8 +4942,8 @@
         </p:nvSpPr>
         <p:spPr>
           <a:xfrm>
-            <a:off x="685800" y="3520440"/>
-            <a:ext cx="3246120" cy="685800"/>
+            <a:off x="1920240" y="3675888"/>
+            <a:ext cx="8778240" cy="640080"/>
           </a:xfrm>
           <a:prstGeom prst="rect">
             <a:avLst/>
@@ -4872,18 +4951,30 @@
           <a:noFill/>
         </p:spPr>
         <p:txBody>
-          <a:bodyPr wrap="square" anchor="t"/>
-          <a:lstStyle/>
-          <a:p>
-            <a:pPr algn="l"/>
-            <a:r>
-              <a:rPr sz="1600" b="0">
-                <a:solidFill>
-                  <a:srgbClr val="3D5C62"/>
-                </a:solidFill>
-                <a:latin typeface="Calibri"/>
+          <a:bodyPr wrap="square">
+            <a:spAutoFit/>
+          </a:bodyPr>
+          <a:lstStyle/>
+          <a:p>
+            <a:pPr algn="l">
+              <a:lnSpc>
+                <a:spcPct val="105000"/>
+              </a:lnSpc>
+              <a:spcBef>
+                <a:spcPts val="0"/>
+              </a:spcBef>
+              <a:spcAft>
+                <a:spcPts val="0"/>
+              </a:spcAft>
+            </a:pPr>
+            <a:r>
+              <a:rPr sz="1600" b="0" i="0">
+                <a:solidFill>
+                  <a:srgbClr val="5C6566"/>
+                </a:solidFill>
+                <a:latin typeface="Inter"/>
               </a:rPr>
-              <a:t>Cash application that matches payments</a:t>
+              <a:t>Remittances are picked up and matched to invoices, so cash application is not a Friday project.</a:t>
             </a:r>
           </a:p>
         </p:txBody>
@@ -4896,8 +4987,8 @@
         </p:nvSpPr>
         <p:spPr>
           <a:xfrm>
-            <a:off x="685800" y="4297680"/>
-            <a:ext cx="3246120" cy="685800"/>
+            <a:off x="685800" y="4434840"/>
+            <a:ext cx="1097280" cy="365760"/>
           </a:xfrm>
           <a:prstGeom prst="rect">
             <a:avLst/>
@@ -4905,18 +4996,30 @@
           <a:noFill/>
         </p:spPr>
         <p:txBody>
-          <a:bodyPr wrap="square" anchor="t"/>
-          <a:lstStyle/>
-          <a:p>
-            <a:pPr algn="l"/>
-            <a:r>
-              <a:rPr sz="1600" b="0">
-                <a:solidFill>
-                  <a:srgbClr val="3D5C62"/>
-                </a:solidFill>
-                <a:latin typeface="Calibri"/>
+          <a:bodyPr wrap="square">
+            <a:spAutoFit/>
+          </a:bodyPr>
+          <a:lstStyle/>
+          <a:p>
+            <a:pPr algn="l">
+              <a:lnSpc>
+                <a:spcPct val="105000"/>
+              </a:lnSpc>
+              <a:spcBef>
+                <a:spcPts val="0"/>
+              </a:spcBef>
+              <a:spcAft>
+                <a:spcPts val="0"/>
+              </a:spcAft>
+            </a:pPr>
+            <a:r>
+              <a:rPr sz="1600" b="0" i="0">
+                <a:solidFill>
+                  <a:srgbClr val="C45C12"/>
+                </a:solidFill>
+                <a:latin typeface="Liberation Serif"/>
               </a:rPr>
-              <a:t>Credit risk tracked in real time</a:t>
+              <a:t>03</a:t>
             </a:r>
           </a:p>
         </p:txBody>
@@ -4929,8 +5032,8 @@
         </p:nvSpPr>
         <p:spPr>
           <a:xfrm>
-            <a:off x="685800" y="5349240"/>
-            <a:ext cx="3246120" cy="548640"/>
+            <a:off x="1920240" y="4389120"/>
+            <a:ext cx="8686800" cy="365760"/>
           </a:xfrm>
           <a:prstGeom prst="rect">
             <a:avLst/>
@@ -4938,109 +5041,121 @@
           <a:noFill/>
         </p:spPr>
         <p:txBody>
-          <a:bodyPr wrap="square" anchor="t"/>
-          <a:lstStyle/>
-          <a:p>
-            <a:pPr algn="l"/>
-            <a:r>
-              <a:rPr sz="1400" b="1">
-                <a:solidFill>
-                  <a:srgbClr val="FC821F"/>
-                </a:solidFill>
-                <a:latin typeface="Calibri"/>
+          <a:bodyPr wrap="square">
+            <a:spAutoFit/>
+          </a:bodyPr>
+          <a:lstStyle/>
+          <a:p>
+            <a:pPr algn="l">
+              <a:lnSpc>
+                <a:spcPct val="105000"/>
+              </a:lnSpc>
+              <a:spcBef>
+                <a:spcPts val="0"/>
+              </a:spcBef>
+              <a:spcAft>
+                <a:spcPts val="0"/>
+              </a:spcAft>
+            </a:pPr>
+            <a:r>
+              <a:rPr sz="2000" b="0" i="0">
+                <a:solidFill>
+                  <a:srgbClr val="1A2426"/>
+                </a:solidFill>
+                <a:latin typeface="Liberation Serif"/>
               </a:rPr>
-              <a:t>Lower DSO  ·  Less bad debt</a:t>
-            </a:r>
-          </a:p>
-        </p:txBody>
-      </p:sp>
-      <p:sp>
-        <p:nvSpPr>
-          <p:cNvPr id="13" name="Rounded Rectangle 12"/>
-          <p:cNvSpPr/>
-          <p:nvPr/>
-        </p:nvSpPr>
-        <p:spPr>
-          <a:xfrm>
-            <a:off x="4343400" y="1463040"/>
-            <a:ext cx="3703320" cy="4846320"/>
-          </a:xfrm>
-          <a:prstGeom prst="roundRect">
-            <a:avLst>
-              <a:gd name="adj" fmla="val 12000"/>
-            </a:avLst>
-          </a:prstGeom>
-          <a:solidFill>
-            <a:srgbClr val="F3FFFE"/>
-          </a:solidFill>
-          <a:ln w="15875">
-            <a:solidFill>
-              <a:srgbClr val="C0EDEE"/>
-            </a:solidFill>
-          </a:ln>
-        </p:spPr>
-        <p:style>
-          <a:lnRef idx="1">
-            <a:schemeClr val="accent1"/>
-          </a:lnRef>
-          <a:fillRef idx="3">
-            <a:schemeClr val="accent1"/>
-          </a:fillRef>
-          <a:effectRef idx="2">
-            <a:schemeClr val="accent1"/>
-          </a:effectRef>
-          <a:fontRef idx="minor">
-            <a:schemeClr val="lt1"/>
-          </a:fontRef>
-        </p:style>
-        <p:txBody>
-          <a:bodyPr rtlCol="0" anchor="ctr"/>
-          <a:lstStyle/>
-          <a:p>
-            <a:pPr algn="ctr"/>
-          </a:p>
-        </p:txBody>
-      </p:sp>
-      <p:sp>
-        <p:nvSpPr>
-          <p:cNvPr id="14" name="Rectangle 13"/>
-          <p:cNvSpPr/>
-          <p:nvPr/>
-        </p:nvSpPr>
-        <p:spPr>
-          <a:xfrm>
-            <a:off x="4343400" y="1463040"/>
-            <a:ext cx="3703320" cy="109728"/>
-          </a:xfrm>
-          <a:prstGeom prst="rect">
-            <a:avLst/>
-          </a:prstGeom>
-          <a:solidFill>
-            <a:srgbClr val="FC821F"/>
-          </a:solidFill>
-          <a:ln>
-            <a:noFill/>
-          </a:ln>
-        </p:spPr>
-        <p:style>
-          <a:lnRef idx="1">
-            <a:schemeClr val="accent1"/>
-          </a:lnRef>
-          <a:fillRef idx="3">
-            <a:schemeClr val="accent1"/>
-          </a:fillRef>
-          <a:effectRef idx="2">
-            <a:schemeClr val="accent1"/>
-          </a:effectRef>
-          <a:fontRef idx="minor">
-            <a:schemeClr val="lt1"/>
-          </a:fontRef>
-        </p:style>
-        <p:txBody>
-          <a:bodyPr rtlCol="0" anchor="ctr"/>
-          <a:lstStyle/>
-          <a:p>
-            <a:pPr algn="ctr"/>
+              <a:t>Credit</a:t>
+            </a:r>
+          </a:p>
+        </p:txBody>
+      </p:sp>
+      <p:sp>
+        <p:nvSpPr>
+          <p:cNvPr id="13" name="TextBox 12"/>
+          <p:cNvSpPr txBox="1"/>
+          <p:nvPr/>
+        </p:nvSpPr>
+        <p:spPr>
+          <a:xfrm>
+            <a:off x="1920240" y="4818888"/>
+            <a:ext cx="8778240" cy="640080"/>
+          </a:xfrm>
+          <a:prstGeom prst="rect">
+            <a:avLst/>
+          </a:prstGeom>
+          <a:noFill/>
+        </p:spPr>
+        <p:txBody>
+          <a:bodyPr wrap="square">
+            <a:spAutoFit/>
+          </a:bodyPr>
+          <a:lstStyle/>
+          <a:p>
+            <a:pPr algn="l">
+              <a:lnSpc>
+                <a:spcPct val="105000"/>
+              </a:lnSpc>
+              <a:spcBef>
+                <a:spcPts val="0"/>
+              </a:spcBef>
+              <a:spcAft>
+                <a:spcPts val="0"/>
+              </a:spcAft>
+            </a:pPr>
+            <a:r>
+              <a:rPr sz="1600" b="0" i="0">
+                <a:solidFill>
+                  <a:srgbClr val="5C6566"/>
+                </a:solidFill>
+                <a:latin typeface="Inter"/>
+              </a:rPr>
+              <a:t>Customer risk is updated as invoices age, instead of living in a yearly review.</a:t>
+            </a:r>
+          </a:p>
+        </p:txBody>
+      </p:sp>
+      <p:sp>
+        <p:nvSpPr>
+          <p:cNvPr id="14" name="TextBox 13"/>
+          <p:cNvSpPr txBox="1"/>
+          <p:nvPr/>
+        </p:nvSpPr>
+        <p:spPr>
+          <a:xfrm>
+            <a:off x="685800" y="5715000"/>
+            <a:ext cx="10058400" cy="365760"/>
+          </a:xfrm>
+          <a:prstGeom prst="rect">
+            <a:avLst/>
+          </a:prstGeom>
+          <a:noFill/>
+        </p:spPr>
+        <p:txBody>
+          <a:bodyPr wrap="square">
+            <a:spAutoFit/>
+          </a:bodyPr>
+          <a:lstStyle/>
+          <a:p>
+            <a:pPr algn="l">
+              <a:lnSpc>
+                <a:spcPct val="105000"/>
+              </a:lnSpc>
+              <a:spcBef>
+                <a:spcPts val="0"/>
+              </a:spcBef>
+              <a:spcAft>
+                <a:spcPts val="0"/>
+              </a:spcAft>
+            </a:pPr>
+            <a:r>
+              <a:rPr sz="1600" b="0" i="0">
+                <a:solidFill>
+                  <a:srgbClr val="1A2426"/>
+                </a:solidFill>
+                <a:latin typeface="Inter"/>
+              </a:rPr>
+              <a:t>The point is a shorter collection cycle and fewer surprises in bad debt.</a:t>
+            </a:r>
           </a:p>
         </p:txBody>
       </p:sp>
@@ -5052,8 +5167,8 @@
         </p:nvSpPr>
         <p:spPr>
           <a:xfrm>
-            <a:off x="4572000" y="1737360"/>
-            <a:ext cx="3246120" cy="822960"/>
+            <a:off x="640080" y="6446520"/>
+            <a:ext cx="7315200" cy="256032"/>
           </a:xfrm>
           <a:prstGeom prst="rect">
             <a:avLst/>
@@ -5061,18 +5176,30 @@
           <a:noFill/>
         </p:spPr>
         <p:txBody>
-          <a:bodyPr wrap="square" anchor="t"/>
-          <a:lstStyle/>
-          <a:p>
-            <a:pPr algn="l"/>
-            <a:r>
-              <a:rPr sz="2200" b="1">
-                <a:solidFill>
-                  <a:srgbClr val="072F35"/>
-                </a:solidFill>
-                <a:latin typeface="Calibri"/>
+          <a:bodyPr wrap="square">
+            <a:spAutoFit/>
+          </a:bodyPr>
+          <a:lstStyle/>
+          <a:p>
+            <a:pPr algn="l">
+              <a:lnSpc>
+                <a:spcPct val="105000"/>
+              </a:lnSpc>
+              <a:spcBef>
+                <a:spcPts val="0"/>
+              </a:spcBef>
+              <a:spcAft>
+                <a:spcPts val="0"/>
+              </a:spcAft>
+            </a:pPr>
+            <a:r>
+              <a:rPr sz="1100" b="0" i="0">
+                <a:solidFill>
+                  <a:srgbClr val="5C6566"/>
+                </a:solidFill>
+                <a:latin typeface="Inter"/>
               </a:rPr>
-              <a:t>Accounts payable</a:t>
+              <a:t>opencfo.tech</a:t>
             </a:r>
           </a:p>
         </p:txBody>
@@ -5085,8 +5212,8 @@
         </p:nvSpPr>
         <p:spPr>
           <a:xfrm>
-            <a:off x="4572000" y="2743200"/>
-            <a:ext cx="3246120" cy="685800"/>
+            <a:off x="9326880" y="6446520"/>
+            <a:ext cx="2194560" cy="256032"/>
           </a:xfrm>
           <a:prstGeom prst="rect">
             <a:avLst/>
@@ -5094,372 +5221,30 @@
           <a:noFill/>
         </p:spPr>
         <p:txBody>
-          <a:bodyPr wrap="square" anchor="t"/>
-          <a:lstStyle/>
-          <a:p>
-            <a:pPr algn="l"/>
-            <a:r>
-              <a:rPr sz="1600" b="0">
-                <a:solidFill>
-                  <a:srgbClr val="3D5C62"/>
-                </a:solidFill>
-                <a:latin typeface="Calibri"/>
+          <a:bodyPr wrap="square">
+            <a:spAutoFit/>
+          </a:bodyPr>
+          <a:lstStyle/>
+          <a:p>
+            <a:pPr algn="r">
+              <a:lnSpc>
+                <a:spcPct val="105000"/>
+              </a:lnSpc>
+              <a:spcBef>
+                <a:spcPts val="0"/>
+              </a:spcBef>
+              <a:spcAft>
+                <a:spcPts val="0"/>
+              </a:spcAft>
+            </a:pPr>
+            <a:r>
+              <a:rPr sz="1100" b="0" i="0">
+                <a:solidFill>
+                  <a:srgbClr val="5C6566"/>
+                </a:solidFill>
+                <a:latin typeface="Inter"/>
               </a:rPr>
-              <a:t>Invoice capture and 2-way / 3-way match</a:t>
-            </a:r>
-          </a:p>
-        </p:txBody>
-      </p:sp>
-      <p:sp>
-        <p:nvSpPr>
-          <p:cNvPr id="17" name="TextBox 16"/>
-          <p:cNvSpPr txBox="1"/>
-          <p:nvPr/>
-        </p:nvSpPr>
-        <p:spPr>
-          <a:xfrm>
-            <a:off x="4572000" y="3520440"/>
-            <a:ext cx="3246120" cy="685800"/>
-          </a:xfrm>
-          <a:prstGeom prst="rect">
-            <a:avLst/>
-          </a:prstGeom>
-          <a:noFill/>
-        </p:spPr>
-        <p:txBody>
-          <a:bodyPr wrap="square" anchor="t"/>
-          <a:lstStyle/>
-          <a:p>
-            <a:pPr algn="l"/>
-            <a:r>
-              <a:rPr sz="1600" b="0">
-                <a:solidFill>
-                  <a:srgbClr val="3D5C62"/>
-                </a:solidFill>
-                <a:latin typeface="Calibri"/>
-              </a:rPr>
-              <a:t>Payment timing and currency</a:t>
-            </a:r>
-          </a:p>
-        </p:txBody>
-      </p:sp>
-      <p:sp>
-        <p:nvSpPr>
-          <p:cNvPr id="18" name="TextBox 17"/>
-          <p:cNvSpPr txBox="1"/>
-          <p:nvPr/>
-        </p:nvSpPr>
-        <p:spPr>
-          <a:xfrm>
-            <a:off x="4572000" y="4297680"/>
-            <a:ext cx="3246120" cy="685800"/>
-          </a:xfrm>
-          <a:prstGeom prst="rect">
-            <a:avLst/>
-          </a:prstGeom>
-          <a:noFill/>
-        </p:spPr>
-        <p:txBody>
-          <a:bodyPr wrap="square" anchor="t"/>
-          <a:lstStyle/>
-          <a:p>
-            <a:pPr algn="l"/>
-            <a:r>
-              <a:rPr sz="1600" b="0">
-                <a:solidFill>
-                  <a:srgbClr val="3D5C62"/>
-                </a:solidFill>
-                <a:latin typeface="Calibri"/>
-              </a:rPr>
-              <a:t>Vendor bills, receipts, and contracts</a:t>
-            </a:r>
-          </a:p>
-        </p:txBody>
-      </p:sp>
-      <p:sp>
-        <p:nvSpPr>
-          <p:cNvPr id="19" name="TextBox 18"/>
-          <p:cNvSpPr txBox="1"/>
-          <p:nvPr/>
-        </p:nvSpPr>
-        <p:spPr>
-          <a:xfrm>
-            <a:off x="4572000" y="5349240"/>
-            <a:ext cx="3246120" cy="548640"/>
-          </a:xfrm>
-          <a:prstGeom prst="rect">
-            <a:avLst/>
-          </a:prstGeom>
-          <a:noFill/>
-        </p:spPr>
-        <p:txBody>
-          <a:bodyPr wrap="square" anchor="t"/>
-          <a:lstStyle/>
-          <a:p>
-            <a:pPr algn="l"/>
-            <a:r>
-              <a:rPr sz="1400" b="1">
-                <a:solidFill>
-                  <a:srgbClr val="FC821F"/>
-                </a:solidFill>
-                <a:latin typeface="Calibri"/>
-              </a:rPr>
-              <a:t>Stronger DPO  ·  On-time payment</a:t>
-            </a:r>
-          </a:p>
-        </p:txBody>
-      </p:sp>
-      <p:sp>
-        <p:nvSpPr>
-          <p:cNvPr id="20" name="Rounded Rectangle 19"/>
-          <p:cNvSpPr/>
-          <p:nvPr/>
-        </p:nvSpPr>
-        <p:spPr>
-          <a:xfrm>
-            <a:off x="8229600" y="1463040"/>
-            <a:ext cx="3703320" cy="4846320"/>
-          </a:xfrm>
-          <a:prstGeom prst="roundRect">
-            <a:avLst>
-              <a:gd name="adj" fmla="val 12000"/>
-            </a:avLst>
-          </a:prstGeom>
-          <a:solidFill>
-            <a:srgbClr val="F3FFFE"/>
-          </a:solidFill>
-          <a:ln w="15875">
-            <a:solidFill>
-              <a:srgbClr val="C0EDEE"/>
-            </a:solidFill>
-          </a:ln>
-        </p:spPr>
-        <p:style>
-          <a:lnRef idx="1">
-            <a:schemeClr val="accent1"/>
-          </a:lnRef>
-          <a:fillRef idx="3">
-            <a:schemeClr val="accent1"/>
-          </a:fillRef>
-          <a:effectRef idx="2">
-            <a:schemeClr val="accent1"/>
-          </a:effectRef>
-          <a:fontRef idx="minor">
-            <a:schemeClr val="lt1"/>
-          </a:fontRef>
-        </p:style>
-        <p:txBody>
-          <a:bodyPr rtlCol="0" anchor="ctr"/>
-          <a:lstStyle/>
-          <a:p>
-            <a:pPr algn="ctr"/>
-          </a:p>
-        </p:txBody>
-      </p:sp>
-      <p:sp>
-        <p:nvSpPr>
-          <p:cNvPr id="21" name="Rectangle 20"/>
-          <p:cNvSpPr/>
-          <p:nvPr/>
-        </p:nvSpPr>
-        <p:spPr>
-          <a:xfrm>
-            <a:off x="8229600" y="1463040"/>
-            <a:ext cx="3703320" cy="109728"/>
-          </a:xfrm>
-          <a:prstGeom prst="rect">
-            <a:avLst/>
-          </a:prstGeom>
-          <a:solidFill>
-            <a:srgbClr val="FC821F"/>
-          </a:solidFill>
-          <a:ln>
-            <a:noFill/>
-          </a:ln>
-        </p:spPr>
-        <p:style>
-          <a:lnRef idx="1">
-            <a:schemeClr val="accent1"/>
-          </a:lnRef>
-          <a:fillRef idx="3">
-            <a:schemeClr val="accent1"/>
-          </a:fillRef>
-          <a:effectRef idx="2">
-            <a:schemeClr val="accent1"/>
-          </a:effectRef>
-          <a:fontRef idx="minor">
-            <a:schemeClr val="lt1"/>
-          </a:fontRef>
-        </p:style>
-        <p:txBody>
-          <a:bodyPr rtlCol="0" anchor="ctr"/>
-          <a:lstStyle/>
-          <a:p>
-            <a:pPr algn="ctr"/>
-          </a:p>
-        </p:txBody>
-      </p:sp>
-      <p:sp>
-        <p:nvSpPr>
-          <p:cNvPr id="22" name="TextBox 21"/>
-          <p:cNvSpPr txBox="1"/>
-          <p:nvPr/>
-        </p:nvSpPr>
-        <p:spPr>
-          <a:xfrm>
-            <a:off x="8458200" y="1737360"/>
-            <a:ext cx="3246120" cy="822960"/>
-          </a:xfrm>
-          <a:prstGeom prst="rect">
-            <a:avLst/>
-          </a:prstGeom>
-          <a:noFill/>
-        </p:spPr>
-        <p:txBody>
-          <a:bodyPr wrap="square" anchor="t"/>
-          <a:lstStyle/>
-          <a:p>
-            <a:pPr algn="l"/>
-            <a:r>
-              <a:rPr sz="2200" b="1">
-                <a:solidFill>
-                  <a:srgbClr val="072F35"/>
-                </a:solidFill>
-                <a:latin typeface="Calibri"/>
-              </a:rPr>
-              <a:t>Treasury</a:t>
-            </a:r>
-          </a:p>
-        </p:txBody>
-      </p:sp>
-      <p:sp>
-        <p:nvSpPr>
-          <p:cNvPr id="23" name="TextBox 22"/>
-          <p:cNvSpPr txBox="1"/>
-          <p:nvPr/>
-        </p:nvSpPr>
-        <p:spPr>
-          <a:xfrm>
-            <a:off x="8458200" y="2743200"/>
-            <a:ext cx="3246120" cy="685800"/>
-          </a:xfrm>
-          <a:prstGeom prst="rect">
-            <a:avLst/>
-          </a:prstGeom>
-          <a:noFill/>
-        </p:spPr>
-        <p:txBody>
-          <a:bodyPr wrap="square" anchor="t"/>
-          <a:lstStyle/>
-          <a:p>
-            <a:pPr algn="l"/>
-            <a:r>
-              <a:rPr sz="1600" b="0">
-                <a:solidFill>
-                  <a:srgbClr val="3D5C62"/>
-                </a:solidFill>
-                <a:latin typeface="Calibri"/>
-              </a:rPr>
-              <a:t>Cash by account, entity, and currency</a:t>
-            </a:r>
-          </a:p>
-        </p:txBody>
-      </p:sp>
-      <p:sp>
-        <p:nvSpPr>
-          <p:cNvPr id="24" name="TextBox 23"/>
-          <p:cNvSpPr txBox="1"/>
-          <p:nvPr/>
-        </p:nvSpPr>
-        <p:spPr>
-          <a:xfrm>
-            <a:off x="8458200" y="3520440"/>
-            <a:ext cx="3246120" cy="685800"/>
-          </a:xfrm>
-          <a:prstGeom prst="rect">
-            <a:avLst/>
-          </a:prstGeom>
-          <a:noFill/>
-        </p:spPr>
-        <p:txBody>
-          <a:bodyPr wrap="square" anchor="t"/>
-          <a:lstStyle/>
-          <a:p>
-            <a:pPr algn="l"/>
-            <a:r>
-              <a:rPr sz="1600" b="0">
-                <a:solidFill>
-                  <a:srgbClr val="3D5C62"/>
-                </a:solidFill>
-                <a:latin typeface="Calibri"/>
-              </a:rPr>
-              <a:t>Liquidity gaps flagged early</a:t>
-            </a:r>
-          </a:p>
-        </p:txBody>
-      </p:sp>
-      <p:sp>
-        <p:nvSpPr>
-          <p:cNvPr id="25" name="TextBox 24"/>
-          <p:cNvSpPr txBox="1"/>
-          <p:nvPr/>
-        </p:nvSpPr>
-        <p:spPr>
-          <a:xfrm>
-            <a:off x="8458200" y="4297680"/>
-            <a:ext cx="3246120" cy="685800"/>
-          </a:xfrm>
-          <a:prstGeom prst="rect">
-            <a:avLst/>
-          </a:prstGeom>
-          <a:noFill/>
-        </p:spPr>
-        <p:txBody>
-          <a:bodyPr wrap="square" anchor="t"/>
-          <a:lstStyle/>
-          <a:p>
-            <a:pPr algn="l"/>
-            <a:r>
-              <a:rPr sz="1600" b="0">
-                <a:solidFill>
-                  <a:srgbClr val="3D5C62"/>
-                </a:solidFill>
-                <a:latin typeface="Calibri"/>
-              </a:rPr>
-              <a:t>Domestic and cross-border FX</a:t>
-            </a:r>
-          </a:p>
-        </p:txBody>
-      </p:sp>
-      <p:sp>
-        <p:nvSpPr>
-          <p:cNvPr id="26" name="TextBox 25"/>
-          <p:cNvSpPr txBox="1"/>
-          <p:nvPr/>
-        </p:nvSpPr>
-        <p:spPr>
-          <a:xfrm>
-            <a:off x="8458200" y="5349240"/>
-            <a:ext cx="3246120" cy="548640"/>
-          </a:xfrm>
-          <a:prstGeom prst="rect">
-            <a:avLst/>
-          </a:prstGeom>
-          <a:noFill/>
-        </p:spPr>
-        <p:txBody>
-          <a:bodyPr wrap="square" anchor="t"/>
-          <a:lstStyle/>
-          <a:p>
-            <a:pPr algn="l"/>
-            <a:r>
-              <a:rPr sz="1400" b="1">
-                <a:solidFill>
-                  <a:srgbClr val="FC821F"/>
-                </a:solidFill>
-                <a:latin typeface="Calibri"/>
-              </a:rPr>
-              <a:t>Clearer cash  ·  Less FX leakage</a:t>
+              <a:t>4  /  9</a:t>
             </a:r>
           </a:p>
         </p:txBody>
@@ -5497,7 +5282,7 @@
             <a:avLst/>
           </a:prstGeom>
           <a:solidFill>
-            <a:srgbClr val="FFFFFF"/>
+            <a:srgbClr val="F7F5F0"/>
           </a:solidFill>
           <a:ln>
             <a:noFill/>
@@ -5534,13 +5319,13 @@
         <p:spPr>
           <a:xfrm>
             <a:off x="0" y="0"/>
-            <a:ext cx="12191695" cy="109728"/>
+            <a:ext cx="5806440" cy="6858000"/>
           </a:xfrm>
           <a:prstGeom prst="rect">
             <a:avLst/>
           </a:prstGeom>
           <a:solidFill>
-            <a:srgbClr val="FC821F"/>
+            <a:srgbClr val="FFFFFF"/>
           </a:solidFill>
           <a:ln>
             <a:noFill/>
@@ -5576,8 +5361,8 @@
         </p:nvSpPr>
         <p:spPr>
           <a:xfrm>
-            <a:off x="594360" y="365760"/>
-            <a:ext cx="9144000" cy="256032"/>
+            <a:off x="548640" y="457200"/>
+            <a:ext cx="4846320" cy="274320"/>
           </a:xfrm>
           <a:prstGeom prst="rect">
             <a:avLst/>
@@ -5585,18 +5370,30 @@
           <a:noFill/>
         </p:spPr>
         <p:txBody>
-          <a:bodyPr wrap="square" anchor="t"/>
-          <a:lstStyle/>
-          <a:p>
-            <a:pPr algn="l"/>
-            <a:r>
-              <a:rPr sz="1300" b="1">
-                <a:solidFill>
-                  <a:srgbClr val="FC821F"/>
-                </a:solidFill>
-                <a:latin typeface="Calibri"/>
+          <a:bodyPr wrap="square">
+            <a:spAutoFit/>
+          </a:bodyPr>
+          <a:lstStyle/>
+          <a:p>
+            <a:pPr algn="l">
+              <a:lnSpc>
+                <a:spcPct val="105000"/>
+              </a:lnSpc>
+              <a:spcBef>
+                <a:spcPts val="0"/>
+              </a:spcBef>
+              <a:spcAft>
+                <a:spcPts val="0"/>
+              </a:spcAft>
+            </a:pPr>
+            <a:r>
+              <a:rPr sz="1400" b="0" i="0">
+                <a:solidFill>
+                  <a:srgbClr val="C45C12"/>
+                </a:solidFill>
+                <a:latin typeface="Inter"/>
               </a:rPr>
-              <a:t>HOW IT WORKS</a:t>
+              <a:t>Payables</a:t>
             </a:r>
           </a:p>
         </p:txBody>
@@ -5609,8 +5406,8 @@
         </p:nvSpPr>
         <p:spPr>
           <a:xfrm>
-            <a:off x="594360" y="731520"/>
-            <a:ext cx="10972800" cy="731520"/>
+            <a:off x="548640" y="914400"/>
+            <a:ext cx="4846320" cy="1280160"/>
           </a:xfrm>
           <a:prstGeom prst="rect">
             <a:avLst/>
@@ -5618,18 +5415,31 @@
           <a:noFill/>
         </p:spPr>
         <p:txBody>
-          <a:bodyPr wrap="square" anchor="t"/>
-          <a:lstStyle/>
-          <a:p>
-            <a:pPr algn="l"/>
-            <a:r>
-              <a:rPr sz="3400" b="1">
-                <a:solidFill>
-                  <a:srgbClr val="072F35"/>
-                </a:solidFill>
-                <a:latin typeface="Calibri"/>
+          <a:bodyPr wrap="square">
+            <a:spAutoFit/>
+          </a:bodyPr>
+          <a:lstStyle/>
+          <a:p>
+            <a:pPr algn="l">
+              <a:lnSpc>
+                <a:spcPct val="95000"/>
+              </a:lnSpc>
+              <a:spcBef>
+                <a:spcPts val="0"/>
+              </a:spcBef>
+              <a:spcAft>
+                <a:spcPts val="0"/>
+              </a:spcAft>
+            </a:pPr>
+            <a:r>
+              <a:rPr sz="3000" b="0" i="0">
+                <a:solidFill>
+                  <a:srgbClr val="1A2426"/>
+                </a:solidFill>
+                <a:latin typeface="Liberation Serif"/>
               </a:rPr>
-              <a:t>Live in weeks, not months.</a:t>
+              <a:t>Bills, approvals,
+and when you pay.</a:t>
             </a:r>
           </a:p>
         </p:txBody>
@@ -5642,8 +5452,8 @@
         </p:nvSpPr>
         <p:spPr>
           <a:xfrm>
-            <a:off x="594360" y="1600200"/>
-            <a:ext cx="10058400" cy="548640"/>
+            <a:off x="548640" y="2606040"/>
+            <a:ext cx="4754880" cy="2926080"/>
           </a:xfrm>
           <a:prstGeom prst="rect">
             <a:avLst/>
@@ -5651,64 +5461,120 @@
           <a:noFill/>
         </p:spPr>
         <p:txBody>
-          <a:bodyPr wrap="square" anchor="t"/>
-          <a:lstStyle/>
-          <a:p>
-            <a:pPr algn="l"/>
-            <a:r>
-              <a:rPr sz="1800" b="0">
-                <a:solidFill>
-                  <a:srgbClr val="3D5C62"/>
-                </a:solidFill>
-                <a:latin typeface="Calibri"/>
+          <a:bodyPr wrap="square">
+            <a:spAutoFit/>
+          </a:bodyPr>
+          <a:lstStyle/>
+          <a:p>
+            <a:pPr algn="l">
+              <a:lnSpc>
+                <a:spcPct val="115000"/>
+              </a:lnSpc>
+              <a:spcBef>
+                <a:spcPts val="0"/>
+              </a:spcBef>
+              <a:spcAft>
+                <a:spcPts val="0"/>
+              </a:spcAft>
+            </a:pPr>
+            <a:r>
+              <a:rPr sz="1600" b="0" i="0">
+                <a:solidFill>
+                  <a:srgbClr val="5C6566"/>
+                </a:solidFill>
+                <a:latin typeface="Inter"/>
               </a:rPr>
-              <a:t>OpenCFO sits on the systems you already use. Nothing is ripped out.</a:t>
-            </a:r>
-          </a:p>
-        </p:txBody>
-      </p:sp>
-      <p:sp>
-        <p:nvSpPr>
-          <p:cNvPr id="7" name="Rounded Rectangle 6"/>
-          <p:cNvSpPr/>
-          <p:nvPr/>
-        </p:nvSpPr>
-        <p:spPr>
-          <a:xfrm>
-            <a:off x="594360" y="2468880"/>
-            <a:ext cx="3611880" cy="3200400"/>
-          </a:xfrm>
-          <a:prstGeom prst="roundRect">
-            <a:avLst>
-              <a:gd name="adj" fmla="val 12000"/>
-            </a:avLst>
-          </a:prstGeom>
-          <a:solidFill>
-            <a:srgbClr val="072F35"/>
-          </a:solidFill>
-          <a:ln>
-            <a:noFill/>
-          </a:ln>
-        </p:spPr>
-        <p:style>
-          <a:lnRef idx="1">
-            <a:schemeClr val="accent1"/>
-          </a:lnRef>
-          <a:fillRef idx="3">
-            <a:schemeClr val="accent1"/>
-          </a:fillRef>
-          <a:effectRef idx="2">
-            <a:schemeClr val="accent1"/>
-          </a:effectRef>
-          <a:fontRef idx="minor">
-            <a:schemeClr val="lt1"/>
-          </a:fontRef>
-        </p:style>
-        <p:txBody>
-          <a:bodyPr rtlCol="0" anchor="ctr"/>
-          <a:lstStyle/>
-          <a:p>
-            <a:pPr algn="ctr"/>
+              <a:t>Invoices are captured and matched, including 2-way and 3-way match where the purchase order exists.</a:t>
+            </a:r>
+          </a:p>
+          <a:p>
+            <a:pPr algn="l">
+              <a:lnSpc>
+                <a:spcPct val="115000"/>
+              </a:lnSpc>
+              <a:spcBef>
+                <a:spcPts val="1000"/>
+              </a:spcBef>
+              <a:spcAft>
+                <a:spcPts val="0"/>
+              </a:spcAft>
+            </a:pPr>
+            <a:r>
+              <a:rPr sz="1600" b="0" i="0">
+                <a:solidFill>
+                  <a:srgbClr val="5C6566"/>
+                </a:solidFill>
+                <a:latin typeface="Inter"/>
+              </a:rPr>
+              <a:t>Approvals follow the company’s own rules, not a side mailbox.</a:t>
+            </a:r>
+          </a:p>
+          <a:p>
+            <a:pPr algn="l">
+              <a:lnSpc>
+                <a:spcPct val="115000"/>
+              </a:lnSpc>
+              <a:spcBef>
+                <a:spcPts val="1000"/>
+              </a:spcBef>
+              <a:spcAft>
+                <a:spcPts val="0"/>
+              </a:spcAft>
+            </a:pPr>
+            <a:r>
+              <a:rPr sz="1600" b="0" i="0">
+                <a:solidFill>
+                  <a:srgbClr val="5C6566"/>
+                </a:solidFill>
+                <a:latin typeface="Inter"/>
+              </a:rPr>
+              <a:t>Payment timing and currency are chosen on purpose, so cash is not given up early by default.</a:t>
+            </a:r>
+          </a:p>
+        </p:txBody>
+      </p:sp>
+      <p:sp>
+        <p:nvSpPr>
+          <p:cNvPr id="7" name="TextBox 6"/>
+          <p:cNvSpPr txBox="1"/>
+          <p:nvPr/>
+        </p:nvSpPr>
+        <p:spPr>
+          <a:xfrm>
+            <a:off x="6309360" y="457200"/>
+            <a:ext cx="5120640" cy="274320"/>
+          </a:xfrm>
+          <a:prstGeom prst="rect">
+            <a:avLst/>
+          </a:prstGeom>
+          <a:noFill/>
+        </p:spPr>
+        <p:txBody>
+          <a:bodyPr wrap="square">
+            <a:spAutoFit/>
+          </a:bodyPr>
+          <a:lstStyle/>
+          <a:p>
+            <a:pPr algn="l">
+              <a:lnSpc>
+                <a:spcPct val="105000"/>
+              </a:lnSpc>
+              <a:spcBef>
+                <a:spcPts val="0"/>
+              </a:spcBef>
+              <a:spcAft>
+                <a:spcPts val="0"/>
+              </a:spcAft>
+            </a:pPr>
+            <a:r>
+              <a:rPr sz="1400" b="0" i="0">
+                <a:solidFill>
+                  <a:srgbClr val="C45C12"/>
+                </a:solidFill>
+                <a:latin typeface="Inter"/>
+              </a:rPr>
+              <a:t>Treasury</a:t>
+            </a:r>
           </a:p>
         </p:txBody>
       </p:sp>
@@ -5720,8 +5586,8 @@
         </p:nvSpPr>
         <p:spPr>
           <a:xfrm>
-            <a:off x="868680" y="2697480"/>
-            <a:ext cx="3017520" cy="640080"/>
+            <a:off x="6309360" y="914400"/>
+            <a:ext cx="5120640" cy="1371600"/>
           </a:xfrm>
           <a:prstGeom prst="rect">
             <a:avLst/>
@@ -5729,18 +5595,31 @@
           <a:noFill/>
         </p:spPr>
         <p:txBody>
-          <a:bodyPr wrap="square" anchor="t"/>
-          <a:lstStyle/>
-          <a:p>
-            <a:pPr algn="l"/>
-            <a:r>
-              <a:rPr sz="3200" b="1">
-                <a:solidFill>
-                  <a:srgbClr val="49D6CE"/>
-                </a:solidFill>
-                <a:latin typeface="Calibri"/>
+          <a:bodyPr wrap="square">
+            <a:spAutoFit/>
+          </a:bodyPr>
+          <a:lstStyle/>
+          <a:p>
+            <a:pPr algn="l">
+              <a:lnSpc>
+                <a:spcPct val="95000"/>
+              </a:lnSpc>
+              <a:spcBef>
+                <a:spcPts val="0"/>
+              </a:spcBef>
+              <a:spcAft>
+                <a:spcPts val="0"/>
+              </a:spcAft>
+            </a:pPr>
+            <a:r>
+              <a:rPr sz="3000" b="0" i="0">
+                <a:solidFill>
+                  <a:srgbClr val="1A2426"/>
+                </a:solidFill>
+                <a:latin typeface="Liberation Serif"/>
               </a:rPr>
-              <a:t>01</a:t>
+              <a:t>Where the cash is,
+before the close.</a:t>
             </a:r>
           </a:p>
         </p:txBody>
@@ -5753,8 +5632,8 @@
         </p:nvSpPr>
         <p:spPr>
           <a:xfrm>
-            <a:off x="868680" y="3429000"/>
-            <a:ext cx="3017520" cy="548640"/>
+            <a:off x="6309360" y="2606040"/>
+            <a:ext cx="5120640" cy="2926080"/>
           </a:xfrm>
           <a:prstGeom prst="rect">
             <a:avLst/>
@@ -5762,18 +5641,74 @@
           <a:noFill/>
         </p:spPr>
         <p:txBody>
-          <a:bodyPr wrap="square" anchor="t"/>
-          <a:lstStyle/>
-          <a:p>
-            <a:pPr algn="l"/>
-            <a:r>
-              <a:rPr sz="2600" b="1">
-                <a:solidFill>
-                  <a:srgbClr val="FFFFFF"/>
-                </a:solidFill>
-                <a:latin typeface="Calibri"/>
+          <a:bodyPr wrap="square">
+            <a:spAutoFit/>
+          </a:bodyPr>
+          <a:lstStyle/>
+          <a:p>
+            <a:pPr algn="l">
+              <a:lnSpc>
+                <a:spcPct val="115000"/>
+              </a:lnSpc>
+              <a:spcBef>
+                <a:spcPts val="0"/>
+              </a:spcBef>
+              <a:spcAft>
+                <a:spcPts val="0"/>
+              </a:spcAft>
+            </a:pPr>
+            <a:r>
+              <a:rPr sz="1600" b="0" i="0">
+                <a:solidFill>
+                  <a:srgbClr val="5C6566"/>
+                </a:solidFill>
+                <a:latin typeface="Inter"/>
               </a:rPr>
-              <a:t>Connect</a:t>
+              <a:t>Balances across accounts, entities, and currencies, rather than one exported file per bank.</a:t>
+            </a:r>
+          </a:p>
+          <a:p>
+            <a:pPr algn="l">
+              <a:lnSpc>
+                <a:spcPct val="115000"/>
+              </a:lnSpc>
+              <a:spcBef>
+                <a:spcPts val="1000"/>
+              </a:spcBef>
+              <a:spcAft>
+                <a:spcPts val="0"/>
+              </a:spcAft>
+            </a:pPr>
+            <a:r>
+              <a:rPr sz="1600" b="0" i="0">
+                <a:solidFill>
+                  <a:srgbClr val="5C6566"/>
+                </a:solidFill>
+                <a:latin typeface="Inter"/>
+              </a:rPr>
+              <a:t>Gaps in liquidity show up while there is still time to do something about them.</a:t>
+            </a:r>
+          </a:p>
+          <a:p>
+            <a:pPr algn="l">
+              <a:lnSpc>
+                <a:spcPct val="115000"/>
+              </a:lnSpc>
+              <a:spcBef>
+                <a:spcPts val="1000"/>
+              </a:spcBef>
+              <a:spcAft>
+                <a:spcPts val="0"/>
+              </a:spcAft>
+            </a:pPr>
+            <a:r>
+              <a:rPr sz="1600" b="0" i="0">
+                <a:solidFill>
+                  <a:srgbClr val="5C6566"/>
+                </a:solidFill>
+                <a:latin typeface="Inter"/>
+              </a:rPr>
+              <a:t>Domestic and cross-border payments, with the FX rate treated as part of the decision.</a:t>
             </a:r>
           </a:p>
         </p:txBody>
@@ -5786,8 +5721,8 @@
         </p:nvSpPr>
         <p:spPr>
           <a:xfrm>
-            <a:off x="868680" y="4160520"/>
-            <a:ext cx="3017520" cy="1188720"/>
+            <a:off x="640080" y="6446520"/>
+            <a:ext cx="7315200" cy="256032"/>
           </a:xfrm>
           <a:prstGeom prst="rect">
             <a:avLst/>
@@ -5795,77 +5730,44 @@
           <a:noFill/>
         </p:spPr>
         <p:txBody>
-          <a:bodyPr wrap="square" anchor="t"/>
-          <a:lstStyle/>
-          <a:p>
-            <a:pPr algn="l"/>
-            <a:r>
-              <a:rPr sz="1600" b="0">
-                <a:solidFill>
-                  <a:srgbClr val="D5F4F4"/>
-                </a:solidFill>
-                <a:latin typeface="Calibri"/>
+          <a:bodyPr wrap="square">
+            <a:spAutoFit/>
+          </a:bodyPr>
+          <a:lstStyle/>
+          <a:p>
+            <a:pPr algn="l">
+              <a:lnSpc>
+                <a:spcPct val="105000"/>
+              </a:lnSpc>
+              <a:spcBef>
+                <a:spcPts val="0"/>
+              </a:spcBef>
+              <a:spcAft>
+                <a:spcPts val="0"/>
+              </a:spcAft>
+            </a:pPr>
+            <a:r>
+              <a:rPr sz="1100" b="0" i="0">
+                <a:solidFill>
+                  <a:srgbClr val="5C6566"/>
+                </a:solidFill>
+                <a:latin typeface="Inter"/>
               </a:rPr>
-              <a:t>Link the ERP, the accounting system, and the banks. Existing workflows stay in place.</a:t>
-            </a:r>
-          </a:p>
-        </p:txBody>
-      </p:sp>
-      <p:sp>
-        <p:nvSpPr>
-          <p:cNvPr id="11" name="Rounded Rectangle 10"/>
-          <p:cNvSpPr/>
-          <p:nvPr/>
-        </p:nvSpPr>
-        <p:spPr>
-          <a:xfrm>
-            <a:off x="4389120" y="2468880"/>
-            <a:ext cx="3611880" cy="3200400"/>
-          </a:xfrm>
-          <a:prstGeom prst="roundRect">
-            <a:avLst>
-              <a:gd name="adj" fmla="val 12000"/>
-            </a:avLst>
-          </a:prstGeom>
-          <a:solidFill>
-            <a:srgbClr val="072F35"/>
-          </a:solidFill>
-          <a:ln>
-            <a:noFill/>
-          </a:ln>
-        </p:spPr>
-        <p:style>
-          <a:lnRef idx="1">
-            <a:schemeClr val="accent1"/>
-          </a:lnRef>
-          <a:fillRef idx="3">
-            <a:schemeClr val="accent1"/>
-          </a:fillRef>
-          <a:effectRef idx="2">
-            <a:schemeClr val="accent1"/>
-          </a:effectRef>
-          <a:fontRef idx="minor">
-            <a:schemeClr val="lt1"/>
-          </a:fontRef>
-        </p:style>
-        <p:txBody>
-          <a:bodyPr rtlCol="0" anchor="ctr"/>
-          <a:lstStyle/>
-          <a:p>
-            <a:pPr algn="ctr"/>
-          </a:p>
-        </p:txBody>
-      </p:sp>
-      <p:sp>
-        <p:nvSpPr>
-          <p:cNvPr id="12" name="TextBox 11"/>
+              <a:t>opencfo.tech</a:t>
+            </a:r>
+          </a:p>
+        </p:txBody>
+      </p:sp>
+      <p:sp>
+        <p:nvSpPr>
+          <p:cNvPr id="11" name="TextBox 10"/>
           <p:cNvSpPr txBox="1"/>
           <p:nvPr/>
         </p:nvSpPr>
         <p:spPr>
           <a:xfrm>
-            <a:off x="4663440" y="2697480"/>
-            <a:ext cx="3017520" cy="640080"/>
+            <a:off x="9326880" y="6446520"/>
+            <a:ext cx="2194560" cy="256032"/>
           </a:xfrm>
           <a:prstGeom prst="rect">
             <a:avLst/>
@@ -5873,228 +5775,30 @@
           <a:noFill/>
         </p:spPr>
         <p:txBody>
-          <a:bodyPr wrap="square" anchor="t"/>
-          <a:lstStyle/>
-          <a:p>
-            <a:pPr algn="l"/>
-            <a:r>
-              <a:rPr sz="3200" b="1">
-                <a:solidFill>
-                  <a:srgbClr val="49D6CE"/>
-                </a:solidFill>
-                <a:latin typeface="Calibri"/>
+          <a:bodyPr wrap="square">
+            <a:spAutoFit/>
+          </a:bodyPr>
+          <a:lstStyle/>
+          <a:p>
+            <a:pPr algn="r">
+              <a:lnSpc>
+                <a:spcPct val="105000"/>
+              </a:lnSpc>
+              <a:spcBef>
+                <a:spcPts val="0"/>
+              </a:spcBef>
+              <a:spcAft>
+                <a:spcPts val="0"/>
+              </a:spcAft>
+            </a:pPr>
+            <a:r>
+              <a:rPr sz="1100" b="0" i="0">
+                <a:solidFill>
+                  <a:srgbClr val="5C6566"/>
+                </a:solidFill>
+                <a:latin typeface="Inter"/>
               </a:rPr>
-              <a:t>02</a:t>
-            </a:r>
-          </a:p>
-        </p:txBody>
-      </p:sp>
-      <p:sp>
-        <p:nvSpPr>
-          <p:cNvPr id="13" name="TextBox 12"/>
-          <p:cNvSpPr txBox="1"/>
-          <p:nvPr/>
-        </p:nvSpPr>
-        <p:spPr>
-          <a:xfrm>
-            <a:off x="4663440" y="3429000"/>
-            <a:ext cx="3017520" cy="548640"/>
-          </a:xfrm>
-          <a:prstGeom prst="rect">
-            <a:avLst/>
-          </a:prstGeom>
-          <a:noFill/>
-        </p:spPr>
-        <p:txBody>
-          <a:bodyPr wrap="square" anchor="t"/>
-          <a:lstStyle/>
-          <a:p>
-            <a:pPr algn="l"/>
-            <a:r>
-              <a:rPr sz="2600" b="1">
-                <a:solidFill>
-                  <a:srgbClr val="FFFFFF"/>
-                </a:solidFill>
-                <a:latin typeface="Calibri"/>
-              </a:rPr>
-              <a:t>Configure</a:t>
-            </a:r>
-          </a:p>
-        </p:txBody>
-      </p:sp>
-      <p:sp>
-        <p:nvSpPr>
-          <p:cNvPr id="14" name="TextBox 13"/>
-          <p:cNvSpPr txBox="1"/>
-          <p:nvPr/>
-        </p:nvSpPr>
-        <p:spPr>
-          <a:xfrm>
-            <a:off x="4663440" y="4160520"/>
-            <a:ext cx="3017520" cy="1188720"/>
-          </a:xfrm>
-          <a:prstGeom prst="rect">
-            <a:avLst/>
-          </a:prstGeom>
-          <a:noFill/>
-        </p:spPr>
-        <p:txBody>
-          <a:bodyPr wrap="square" anchor="t"/>
-          <a:lstStyle/>
-          <a:p>
-            <a:pPr algn="l"/>
-            <a:r>
-              <a:rPr sz="1600" b="0">
-                <a:solidFill>
-                  <a:srgbClr val="D5F4F4"/>
-                </a:solidFill>
-                <a:latin typeface="Calibri"/>
-              </a:rPr>
-              <a:t>Set the rules for payments, reconciliation, collections, and reporting.</a:t>
-            </a:r>
-          </a:p>
-        </p:txBody>
-      </p:sp>
-      <p:sp>
-        <p:nvSpPr>
-          <p:cNvPr id="15" name="Rounded Rectangle 14"/>
-          <p:cNvSpPr/>
-          <p:nvPr/>
-        </p:nvSpPr>
-        <p:spPr>
-          <a:xfrm>
-            <a:off x="8183880" y="2468880"/>
-            <a:ext cx="3611880" cy="3200400"/>
-          </a:xfrm>
-          <a:prstGeom prst="roundRect">
-            <a:avLst>
-              <a:gd name="adj" fmla="val 12000"/>
-            </a:avLst>
-          </a:prstGeom>
-          <a:solidFill>
-            <a:srgbClr val="072F35"/>
-          </a:solidFill>
-          <a:ln>
-            <a:noFill/>
-          </a:ln>
-        </p:spPr>
-        <p:style>
-          <a:lnRef idx="1">
-            <a:schemeClr val="accent1"/>
-          </a:lnRef>
-          <a:fillRef idx="3">
-            <a:schemeClr val="accent1"/>
-          </a:fillRef>
-          <a:effectRef idx="2">
-            <a:schemeClr val="accent1"/>
-          </a:effectRef>
-          <a:fontRef idx="minor">
-            <a:schemeClr val="lt1"/>
-          </a:fontRef>
-        </p:style>
-        <p:txBody>
-          <a:bodyPr rtlCol="0" anchor="ctr"/>
-          <a:lstStyle/>
-          <a:p>
-            <a:pPr algn="ctr"/>
-          </a:p>
-        </p:txBody>
-      </p:sp>
-      <p:sp>
-        <p:nvSpPr>
-          <p:cNvPr id="16" name="TextBox 15"/>
-          <p:cNvSpPr txBox="1"/>
-          <p:nvPr/>
-        </p:nvSpPr>
-        <p:spPr>
-          <a:xfrm>
-            <a:off x="8458200" y="2697480"/>
-            <a:ext cx="3017520" cy="640080"/>
-          </a:xfrm>
-          <a:prstGeom prst="rect">
-            <a:avLst/>
-          </a:prstGeom>
-          <a:noFill/>
-        </p:spPr>
-        <p:txBody>
-          <a:bodyPr wrap="square" anchor="t"/>
-          <a:lstStyle/>
-          <a:p>
-            <a:pPr algn="l"/>
-            <a:r>
-              <a:rPr sz="3200" b="1">
-                <a:solidFill>
-                  <a:srgbClr val="49D6CE"/>
-                </a:solidFill>
-                <a:latin typeface="Calibri"/>
-              </a:rPr>
-              <a:t>03</a:t>
-            </a:r>
-          </a:p>
-        </p:txBody>
-      </p:sp>
-      <p:sp>
-        <p:nvSpPr>
-          <p:cNvPr id="17" name="TextBox 16"/>
-          <p:cNvSpPr txBox="1"/>
-          <p:nvPr/>
-        </p:nvSpPr>
-        <p:spPr>
-          <a:xfrm>
-            <a:off x="8458200" y="3429000"/>
-            <a:ext cx="3017520" cy="548640"/>
-          </a:xfrm>
-          <a:prstGeom prst="rect">
-            <a:avLst/>
-          </a:prstGeom>
-          <a:noFill/>
-        </p:spPr>
-        <p:txBody>
-          <a:bodyPr wrap="square" anchor="t"/>
-          <a:lstStyle/>
-          <a:p>
-            <a:pPr algn="l"/>
-            <a:r>
-              <a:rPr sz="2600" b="1">
-                <a:solidFill>
-                  <a:srgbClr val="FFFFFF"/>
-                </a:solidFill>
-                <a:latin typeface="Calibri"/>
-              </a:rPr>
-              <a:t>Optimize</a:t>
-            </a:r>
-          </a:p>
-        </p:txBody>
-      </p:sp>
-      <p:sp>
-        <p:nvSpPr>
-          <p:cNvPr id="18" name="TextBox 17"/>
-          <p:cNvSpPr txBox="1"/>
-          <p:nvPr/>
-        </p:nvSpPr>
-        <p:spPr>
-          <a:xfrm>
-            <a:off x="8458200" y="4160520"/>
-            <a:ext cx="3017520" cy="1188720"/>
-          </a:xfrm>
-          <a:prstGeom prst="rect">
-            <a:avLst/>
-          </a:prstGeom>
-          <a:noFill/>
-        </p:spPr>
-        <p:txBody>
-          <a:bodyPr wrap="square" anchor="t"/>
-          <a:lstStyle/>
-          <a:p>
-            <a:pPr algn="l"/>
-            <a:r>
-              <a:rPr sz="1600" b="0">
-                <a:solidFill>
-                  <a:srgbClr val="D5F4F4"/>
-                </a:solidFill>
-                <a:latin typeface="Calibri"/>
-              </a:rPr>
-              <a:t>Agents keep working the cash cycle. Working capital improves as the rules run.</a:t>
+              <a:t>5  /  9</a:t>
             </a:r>
           </a:p>
         </p:txBody>
@@ -6132,7 +5836,7 @@
             <a:avLst/>
           </a:prstGeom>
           <a:solidFill>
-            <a:srgbClr val="F3FFFE"/>
+            <a:srgbClr val="F7F5F0"/>
           </a:solidFill>
           <a:ln>
             <a:noFill/>
@@ -6168,8 +5872,8 @@
         </p:nvSpPr>
         <p:spPr>
           <a:xfrm>
-            <a:off x="548640" y="320040"/>
-            <a:ext cx="10972800" cy="256032"/>
+            <a:off x="685800" y="457200"/>
+            <a:ext cx="10058400" cy="274320"/>
           </a:xfrm>
           <a:prstGeom prst="rect">
             <a:avLst/>
@@ -6177,18 +5881,30 @@
           <a:noFill/>
         </p:spPr>
         <p:txBody>
-          <a:bodyPr wrap="square" anchor="t"/>
-          <a:lstStyle/>
-          <a:p>
-            <a:pPr algn="l"/>
-            <a:r>
-              <a:rPr sz="1300" b="1">
-                <a:solidFill>
-                  <a:srgbClr val="FC821F"/>
-                </a:solidFill>
-                <a:latin typeface="Calibri"/>
+          <a:bodyPr wrap="square">
+            <a:spAutoFit/>
+          </a:bodyPr>
+          <a:lstStyle/>
+          <a:p>
+            <a:pPr algn="l">
+              <a:lnSpc>
+                <a:spcPct val="105000"/>
+              </a:lnSpc>
+              <a:spcBef>
+                <a:spcPts val="0"/>
+              </a:spcBef>
+              <a:spcAft>
+                <a:spcPts val="0"/>
+              </a:spcAft>
+            </a:pPr>
+            <a:r>
+              <a:rPr sz="1400" b="0" i="0">
+                <a:solidFill>
+                  <a:srgbClr val="C45C12"/>
+                </a:solidFill>
+                <a:latin typeface="Inter"/>
               </a:rPr>
-              <a:t>WHY FINANCE TEAMS BUY</a:t>
+              <a:t>Getting started</a:t>
             </a:r>
           </a:p>
         </p:txBody>
@@ -6201,8 +5917,8 @@
         </p:nvSpPr>
         <p:spPr>
           <a:xfrm>
-            <a:off x="548640" y="640080"/>
-            <a:ext cx="10972800" cy="640080"/>
+            <a:off x="685800" y="868680"/>
+            <a:ext cx="10058400" cy="1097280"/>
           </a:xfrm>
           <a:prstGeom prst="rect">
             <a:avLst/>
@@ -6210,45 +5926,53 @@
           <a:noFill/>
         </p:spPr>
         <p:txBody>
-          <a:bodyPr wrap="square" anchor="t"/>
-          <a:lstStyle/>
-          <a:p>
-            <a:pPr algn="l"/>
-            <a:r>
-              <a:rPr sz="3000" b="1">
-                <a:solidFill>
-                  <a:srgbClr val="072F35"/>
-                </a:solidFill>
-                <a:latin typeface="Calibri"/>
+          <a:bodyPr wrap="square">
+            <a:spAutoFit/>
+          </a:bodyPr>
+          <a:lstStyle/>
+          <a:p>
+            <a:pPr algn="l">
+              <a:lnSpc>
+                <a:spcPct val="105000"/>
+              </a:lnSpc>
+              <a:spcBef>
+                <a:spcPts val="0"/>
+              </a:spcBef>
+              <a:spcAft>
+                <a:spcPts val="0"/>
+              </a:spcAft>
+            </a:pPr>
+            <a:r>
+              <a:rPr sz="3400" b="0" i="0">
+                <a:solidFill>
+                  <a:srgbClr val="1A2426"/>
+                </a:solidFill>
+                <a:latin typeface="Liberation Serif"/>
               </a:rPr>
-              <a:t>Better control of the cash conversion cycle.</a:t>
-            </a:r>
-          </a:p>
-        </p:txBody>
-      </p:sp>
-      <p:sp>
-        <p:nvSpPr>
-          <p:cNvPr id="5" name="Rounded Rectangle 4"/>
+              <a:t>Weeks, not a new ERP project.</a:t>
+            </a:r>
+          </a:p>
+        </p:txBody>
+      </p:sp>
+      <p:sp>
+        <p:nvSpPr>
+          <p:cNvPr id="5" name="Rectangle 4"/>
           <p:cNvSpPr/>
           <p:nvPr/>
         </p:nvSpPr>
         <p:spPr>
           <a:xfrm>
-            <a:off x="502920" y="1691640"/>
-            <a:ext cx="3657600" cy="2011680"/>
-          </a:xfrm>
-          <a:prstGeom prst="roundRect">
-            <a:avLst>
-              <a:gd name="adj" fmla="val 12000"/>
-            </a:avLst>
+            <a:off x="685800" y="2468880"/>
+            <a:ext cx="10789920" cy="9525"/>
+          </a:xfrm>
+          <a:prstGeom prst="rect">
+            <a:avLst/>
           </a:prstGeom>
           <a:solidFill>
-            <a:srgbClr val="FFFFFF"/>
+            <a:srgbClr val="D8D1C6"/>
           </a:solidFill>
-          <a:ln w="15875">
-            <a:solidFill>
-              <a:srgbClr val="C0EDEE"/>
-            </a:solidFill>
+          <a:ln>
+            <a:noFill/>
           </a:ln>
         </p:spPr>
         <p:style>
@@ -6281,8 +6005,8 @@
         </p:nvSpPr>
         <p:spPr>
           <a:xfrm>
-            <a:off x="731520" y="1965960"/>
-            <a:ext cx="3200400" cy="640080"/>
+            <a:off x="685800" y="2633472"/>
+            <a:ext cx="2103120" cy="640080"/>
           </a:xfrm>
           <a:prstGeom prst="rect">
             <a:avLst/>
@@ -6290,18 +6014,30 @@
           <a:noFill/>
         </p:spPr>
         <p:txBody>
-          <a:bodyPr wrap="square" anchor="t"/>
-          <a:lstStyle/>
-          <a:p>
-            <a:pPr algn="l"/>
-            <a:r>
-              <a:rPr sz="1800" b="1">
-                <a:solidFill>
-                  <a:srgbClr val="072F35"/>
-                </a:solidFill>
-                <a:latin typeface="Calibri"/>
+          <a:bodyPr wrap="square">
+            <a:spAutoFit/>
+          </a:bodyPr>
+          <a:lstStyle/>
+          <a:p>
+            <a:pPr algn="l">
+              <a:lnSpc>
+                <a:spcPct val="105000"/>
+              </a:lnSpc>
+              <a:spcBef>
+                <a:spcPts val="0"/>
+              </a:spcBef>
+              <a:spcAft>
+                <a:spcPts val="0"/>
+              </a:spcAft>
+            </a:pPr>
+            <a:r>
+              <a:rPr sz="2000" b="0" i="0">
+                <a:solidFill>
+                  <a:srgbClr val="1A2426"/>
+                </a:solidFill>
+                <a:latin typeface="Liberation Serif"/>
               </a:rPr>
-              <a:t>Shorter cash cycle</a:t>
+              <a:t>First</a:t>
             </a:r>
           </a:p>
         </p:txBody>
@@ -6314,8 +6050,8 @@
         </p:nvSpPr>
         <p:spPr>
           <a:xfrm>
-            <a:off x="731520" y="2697480"/>
-            <a:ext cx="3200400" cy="731520"/>
+            <a:off x="3017520" y="2670048"/>
+            <a:ext cx="8412480" cy="777240"/>
           </a:xfrm>
           <a:prstGeom prst="rect">
             <a:avLst/>
@@ -6323,45 +6059,53 @@
           <a:noFill/>
         </p:spPr>
         <p:txBody>
-          <a:bodyPr wrap="square" anchor="t"/>
-          <a:lstStyle/>
-          <a:p>
-            <a:pPr algn="l"/>
-            <a:r>
-              <a:rPr sz="1500" b="0">
-                <a:solidFill>
-                  <a:srgbClr val="3D5C62"/>
-                </a:solidFill>
-                <a:latin typeface="Calibri"/>
+          <a:bodyPr wrap="square">
+            <a:spAutoFit/>
+          </a:bodyPr>
+          <a:lstStyle/>
+          <a:p>
+            <a:pPr algn="l">
+              <a:lnSpc>
+                <a:spcPct val="110000"/>
+              </a:lnSpc>
+              <a:spcBef>
+                <a:spcPts val="0"/>
+              </a:spcBef>
+              <a:spcAft>
+                <a:spcPts val="0"/>
+              </a:spcAft>
+            </a:pPr>
+            <a:r>
+              <a:rPr sz="1600" b="0" i="0">
+                <a:solidFill>
+                  <a:srgbClr val="5C6566"/>
+                </a:solidFill>
+                <a:latin typeface="Inter"/>
               </a:rPr>
-              <a:t>Receivables, payables, and treasury move together.</a:t>
-            </a:r>
-          </a:p>
-        </p:txBody>
-      </p:sp>
-      <p:sp>
-        <p:nvSpPr>
-          <p:cNvPr id="8" name="Rounded Rectangle 7"/>
+              <a:t>Connect the ERP, the accounting system, and the banks. People keep working in the tools they already have.</a:t>
+            </a:r>
+          </a:p>
+        </p:txBody>
+      </p:sp>
+      <p:sp>
+        <p:nvSpPr>
+          <p:cNvPr id="8" name="Rectangle 7"/>
           <p:cNvSpPr/>
           <p:nvPr/>
         </p:nvSpPr>
         <p:spPr>
           <a:xfrm>
-            <a:off x="4343400" y="1691640"/>
-            <a:ext cx="3657600" cy="2011680"/>
-          </a:xfrm>
-          <a:prstGeom prst="roundRect">
-            <a:avLst>
-              <a:gd name="adj" fmla="val 12000"/>
-            </a:avLst>
+            <a:off x="685800" y="3611880"/>
+            <a:ext cx="10789920" cy="9525"/>
+          </a:xfrm>
+          <a:prstGeom prst="rect">
+            <a:avLst/>
           </a:prstGeom>
           <a:solidFill>
-            <a:srgbClr val="FFFFFF"/>
+            <a:srgbClr val="D8D1C6"/>
           </a:solidFill>
-          <a:ln w="15875">
-            <a:solidFill>
-              <a:srgbClr val="C0EDEE"/>
-            </a:solidFill>
+          <a:ln>
+            <a:noFill/>
           </a:ln>
         </p:spPr>
         <p:style>
@@ -6394,8 +6138,8 @@
         </p:nvSpPr>
         <p:spPr>
           <a:xfrm>
-            <a:off x="4572000" y="1965960"/>
-            <a:ext cx="3200400" cy="640080"/>
+            <a:off x="685800" y="3776472"/>
+            <a:ext cx="2103120" cy="640080"/>
           </a:xfrm>
           <a:prstGeom prst="rect">
             <a:avLst/>
@@ -6403,18 +6147,30 @@
           <a:noFill/>
         </p:spPr>
         <p:txBody>
-          <a:bodyPr wrap="square" anchor="t"/>
-          <a:lstStyle/>
-          <a:p>
-            <a:pPr algn="l"/>
-            <a:r>
-              <a:rPr sz="1800" b="1">
-                <a:solidFill>
-                  <a:srgbClr val="072F35"/>
-                </a:solidFill>
-                <a:latin typeface="Calibri"/>
+          <a:bodyPr wrap="square">
+            <a:spAutoFit/>
+          </a:bodyPr>
+          <a:lstStyle/>
+          <a:p>
+            <a:pPr algn="l">
+              <a:lnSpc>
+                <a:spcPct val="105000"/>
+              </a:lnSpc>
+              <a:spcBef>
+                <a:spcPts val="0"/>
+              </a:spcBef>
+              <a:spcAft>
+                <a:spcPts val="0"/>
+              </a:spcAft>
+            </a:pPr>
+            <a:r>
+              <a:rPr sz="2000" b="0" i="0">
+                <a:solidFill>
+                  <a:srgbClr val="1A2426"/>
+                </a:solidFill>
+                <a:latin typeface="Liberation Serif"/>
               </a:rPr>
-              <a:t>More working capital</a:t>
+              <a:t>Then</a:t>
             </a:r>
           </a:p>
         </p:txBody>
@@ -6427,8 +6183,8 @@
         </p:nvSpPr>
         <p:spPr>
           <a:xfrm>
-            <a:off x="4572000" y="2697480"/>
-            <a:ext cx="3200400" cy="731520"/>
+            <a:off x="3017520" y="3813048"/>
+            <a:ext cx="8412480" cy="777240"/>
           </a:xfrm>
           <a:prstGeom prst="rect">
             <a:avLst/>
@@ -6436,45 +6192,53 @@
           <a:noFill/>
         </p:spPr>
         <p:txBody>
-          <a:bodyPr wrap="square" anchor="t"/>
-          <a:lstStyle/>
-          <a:p>
-            <a:pPr algn="l"/>
-            <a:r>
-              <a:rPr sz="1500" b="0">
-                <a:solidFill>
-                  <a:srgbClr val="3D5C62"/>
-                </a:solidFill>
-                <a:latin typeface="Calibri"/>
+          <a:bodyPr wrap="square">
+            <a:spAutoFit/>
+          </a:bodyPr>
+          <a:lstStyle/>
+          <a:p>
+            <a:pPr algn="l">
+              <a:lnSpc>
+                <a:spcPct val="110000"/>
+              </a:lnSpc>
+              <a:spcBef>
+                <a:spcPts val="0"/>
+              </a:spcBef>
+              <a:spcAft>
+                <a:spcPts val="0"/>
+              </a:spcAft>
+            </a:pPr>
+            <a:r>
+              <a:rPr sz="1600" b="0" i="0">
+                <a:solidFill>
+                  <a:srgbClr val="5C6566"/>
+                </a:solidFill>
+                <a:latin typeface="Inter"/>
               </a:rPr>
-              <a:t>Cash comes out of the process without adding risk.</a:t>
-            </a:r>
-          </a:p>
-        </p:txBody>
-      </p:sp>
-      <p:sp>
-        <p:nvSpPr>
-          <p:cNvPr id="11" name="Rounded Rectangle 10"/>
+              <a:t>Put in the rules the team already uses for payment, reconciliation, and who gets chased.</a:t>
+            </a:r>
+          </a:p>
+        </p:txBody>
+      </p:sp>
+      <p:sp>
+        <p:nvSpPr>
+          <p:cNvPr id="11" name="Rectangle 10"/>
           <p:cNvSpPr/>
           <p:nvPr/>
         </p:nvSpPr>
         <p:spPr>
           <a:xfrm>
-            <a:off x="8183880" y="1691640"/>
-            <a:ext cx="3657600" cy="2011680"/>
-          </a:xfrm>
-          <a:prstGeom prst="roundRect">
-            <a:avLst>
-              <a:gd name="adj" fmla="val 12000"/>
-            </a:avLst>
+            <a:off x="685800" y="4754880"/>
+            <a:ext cx="10789920" cy="9525"/>
+          </a:xfrm>
+          <a:prstGeom prst="rect">
+            <a:avLst/>
           </a:prstGeom>
           <a:solidFill>
-            <a:srgbClr val="FFFFFF"/>
+            <a:srgbClr val="D8D1C6"/>
           </a:solidFill>
-          <a:ln w="15875">
-            <a:solidFill>
-              <a:srgbClr val="C0EDEE"/>
-            </a:solidFill>
+          <a:ln>
+            <a:noFill/>
           </a:ln>
         </p:spPr>
         <p:style>
@@ -6507,8 +6271,8 @@
         </p:nvSpPr>
         <p:spPr>
           <a:xfrm>
-            <a:off x="8412480" y="1965960"/>
-            <a:ext cx="3200400" cy="640080"/>
+            <a:off x="685800" y="4919472"/>
+            <a:ext cx="2103120" cy="640080"/>
           </a:xfrm>
           <a:prstGeom prst="rect">
             <a:avLst/>
@@ -6516,18 +6280,30 @@
           <a:noFill/>
         </p:spPr>
         <p:txBody>
-          <a:bodyPr wrap="square" anchor="t"/>
-          <a:lstStyle/>
-          <a:p>
-            <a:pPr algn="l"/>
-            <a:r>
-              <a:rPr sz="1800" b="1">
-                <a:solidFill>
-                  <a:srgbClr val="072F35"/>
-                </a:solidFill>
-                <a:latin typeface="Calibri"/>
+          <a:bodyPr wrap="square">
+            <a:spAutoFit/>
+          </a:bodyPr>
+          <a:lstStyle/>
+          <a:p>
+            <a:pPr algn="l">
+              <a:lnSpc>
+                <a:spcPct val="105000"/>
+              </a:lnSpc>
+              <a:spcBef>
+                <a:spcPts val="0"/>
+              </a:spcBef>
+              <a:spcAft>
+                <a:spcPts val="0"/>
+              </a:spcAft>
+            </a:pPr>
+            <a:r>
+              <a:rPr sz="2000" b="0" i="0">
+                <a:solidFill>
+                  <a:srgbClr val="1A2426"/>
+                </a:solidFill>
+                <a:latin typeface="Liberation Serif"/>
               </a:rPr>
-              <a:t>Faster decisions</a:t>
+              <a:t>After that</a:t>
             </a:r>
           </a:p>
         </p:txBody>
@@ -6540,8 +6316,8 @@
         </p:nvSpPr>
         <p:spPr>
           <a:xfrm>
-            <a:off x="8412480" y="2697480"/>
-            <a:ext cx="3200400" cy="731520"/>
+            <a:off x="3017520" y="4956048"/>
+            <a:ext cx="8412480" cy="777240"/>
           </a:xfrm>
           <a:prstGeom prst="rect">
             <a:avLst/>
@@ -6549,66 +6325,76 @@
           <a:noFill/>
         </p:spPr>
         <p:txBody>
-          <a:bodyPr wrap="square" anchor="t"/>
-          <a:lstStyle/>
-          <a:p>
-            <a:pPr algn="l"/>
-            <a:r>
-              <a:rPr sz="1500" b="0">
-                <a:solidFill>
-                  <a:srgbClr val="3D5C62"/>
-                </a:solidFill>
-                <a:latin typeface="Calibri"/>
+          <a:bodyPr wrap="square">
+            <a:spAutoFit/>
+          </a:bodyPr>
+          <a:lstStyle/>
+          <a:p>
+            <a:pPr algn="l">
+              <a:lnSpc>
+                <a:spcPct val="110000"/>
+              </a:lnSpc>
+              <a:spcBef>
+                <a:spcPts val="0"/>
+              </a:spcBef>
+              <a:spcAft>
+                <a:spcPts val="0"/>
+              </a:spcAft>
+            </a:pPr>
+            <a:r>
+              <a:rPr sz="1600" b="0" i="0">
+                <a:solidFill>
+                  <a:srgbClr val="5C6566"/>
+                </a:solidFill>
+                <a:latin typeface="Inter"/>
               </a:rPr>
-              <a:t>One live view replaces the delayed close pack.</a:t>
-            </a:r>
-          </a:p>
-        </p:txBody>
-      </p:sp>
-      <p:sp>
-        <p:nvSpPr>
-          <p:cNvPr id="14" name="Rounded Rectangle 13"/>
-          <p:cNvSpPr/>
-          <p:nvPr/>
-        </p:nvSpPr>
-        <p:spPr>
-          <a:xfrm>
-            <a:off x="502920" y="3931920"/>
-            <a:ext cx="3657600" cy="2011680"/>
-          </a:xfrm>
-          <a:prstGeom prst="roundRect">
-            <a:avLst>
-              <a:gd name="adj" fmla="val 12000"/>
-            </a:avLst>
-          </a:prstGeom>
-          <a:solidFill>
-            <a:srgbClr val="FFFFFF"/>
-          </a:solidFill>
-          <a:ln w="15875">
-            <a:solidFill>
-              <a:srgbClr val="C0EDEE"/>
-            </a:solidFill>
-          </a:ln>
-        </p:spPr>
-        <p:style>
-          <a:lnRef idx="1">
-            <a:schemeClr val="accent1"/>
-          </a:lnRef>
-          <a:fillRef idx="3">
-            <a:schemeClr val="accent1"/>
-          </a:fillRef>
-          <a:effectRef idx="2">
-            <a:schemeClr val="accent1"/>
-          </a:effectRef>
-          <a:fontRef idx="minor">
-            <a:schemeClr val="lt1"/>
-          </a:fontRef>
-        </p:style>
-        <p:txBody>
-          <a:bodyPr rtlCol="0" anchor="ctr"/>
-          <a:lstStyle/>
-          <a:p>
-            <a:pPr algn="ctr"/>
+              <a:t>The workflows run. Collections, matching, and the cash view keep updating without a new monthly project.</a:t>
+            </a:r>
+          </a:p>
+        </p:txBody>
+      </p:sp>
+      <p:sp>
+        <p:nvSpPr>
+          <p:cNvPr id="14" name="TextBox 13"/>
+          <p:cNvSpPr txBox="1"/>
+          <p:nvPr/>
+        </p:nvSpPr>
+        <p:spPr>
+          <a:xfrm>
+            <a:off x="640080" y="6446520"/>
+            <a:ext cx="7315200" cy="256032"/>
+          </a:xfrm>
+          <a:prstGeom prst="rect">
+            <a:avLst/>
+          </a:prstGeom>
+          <a:noFill/>
+        </p:spPr>
+        <p:txBody>
+          <a:bodyPr wrap="square">
+            <a:spAutoFit/>
+          </a:bodyPr>
+          <a:lstStyle/>
+          <a:p>
+            <a:pPr algn="l">
+              <a:lnSpc>
+                <a:spcPct val="105000"/>
+              </a:lnSpc>
+              <a:spcBef>
+                <a:spcPts val="0"/>
+              </a:spcBef>
+              <a:spcAft>
+                <a:spcPts val="0"/>
+              </a:spcAft>
+            </a:pPr>
+            <a:r>
+              <a:rPr sz="1100" b="0" i="0">
+                <a:solidFill>
+                  <a:srgbClr val="5C6566"/>
+                </a:solidFill>
+                <a:latin typeface="Inter"/>
+              </a:rPr>
+              <a:t>opencfo.tech</a:t>
+            </a:r>
           </a:p>
         </p:txBody>
       </p:sp>
@@ -6620,8 +6406,8 @@
         </p:nvSpPr>
         <p:spPr>
           <a:xfrm>
-            <a:off x="731520" y="4206240"/>
-            <a:ext cx="3200400" cy="640080"/>
+            <a:off x="9326880" y="6446520"/>
+            <a:ext cx="2194560" cy="256032"/>
           </a:xfrm>
           <a:prstGeom prst="rect">
             <a:avLst/>
@@ -6629,277 +6415,30 @@
           <a:noFill/>
         </p:spPr>
         <p:txBody>
-          <a:bodyPr wrap="square" anchor="t"/>
-          <a:lstStyle/>
-          <a:p>
-            <a:pPr algn="l"/>
-            <a:r>
-              <a:rPr sz="1800" b="1">
-                <a:solidFill>
-                  <a:srgbClr val="072F35"/>
-                </a:solidFill>
-                <a:latin typeface="Calibri"/>
+          <a:bodyPr wrap="square">
+            <a:spAutoFit/>
+          </a:bodyPr>
+          <a:lstStyle/>
+          <a:p>
+            <a:pPr algn="r">
+              <a:lnSpc>
+                <a:spcPct val="105000"/>
+              </a:lnSpc>
+              <a:spcBef>
+                <a:spcPts val="0"/>
+              </a:spcBef>
+              <a:spcAft>
+                <a:spcPts val="0"/>
+              </a:spcAft>
+            </a:pPr>
+            <a:r>
+              <a:rPr sz="1100" b="0" i="0">
+                <a:solidFill>
+                  <a:srgbClr val="5C6566"/>
+                </a:solidFill>
+                <a:latin typeface="Inter"/>
               </a:rPr>
-              <a:t>Earlier risk signals</a:t>
-            </a:r>
-          </a:p>
-        </p:txBody>
-      </p:sp>
-      <p:sp>
-        <p:nvSpPr>
-          <p:cNvPr id="16" name="TextBox 15"/>
-          <p:cNvSpPr txBox="1"/>
-          <p:nvPr/>
-        </p:nvSpPr>
-        <p:spPr>
-          <a:xfrm>
-            <a:off x="731520" y="4937760"/>
-            <a:ext cx="3200400" cy="731520"/>
-          </a:xfrm>
-          <a:prstGeom prst="rect">
-            <a:avLst/>
-          </a:prstGeom>
-          <a:noFill/>
-        </p:spPr>
-        <p:txBody>
-          <a:bodyPr wrap="square" anchor="t"/>
-          <a:lstStyle/>
-          <a:p>
-            <a:pPr algn="l"/>
-            <a:r>
-              <a:rPr sz="1500" b="0">
-                <a:solidFill>
-                  <a:srgbClr val="3D5C62"/>
-                </a:solidFill>
-                <a:latin typeface="Calibri"/>
-              </a:rPr>
-              <a:t>Liquidity gaps show up before they hit the forecast.</a:t>
-            </a:r>
-          </a:p>
-        </p:txBody>
-      </p:sp>
-      <p:sp>
-        <p:nvSpPr>
-          <p:cNvPr id="17" name="Rounded Rectangle 16"/>
-          <p:cNvSpPr/>
-          <p:nvPr/>
-        </p:nvSpPr>
-        <p:spPr>
-          <a:xfrm>
-            <a:off x="4343400" y="3931920"/>
-            <a:ext cx="3657600" cy="2011680"/>
-          </a:xfrm>
-          <a:prstGeom prst="roundRect">
-            <a:avLst>
-              <a:gd name="adj" fmla="val 12000"/>
-            </a:avLst>
-          </a:prstGeom>
-          <a:solidFill>
-            <a:srgbClr val="FFFFFF"/>
-          </a:solidFill>
-          <a:ln w="15875">
-            <a:solidFill>
-              <a:srgbClr val="C0EDEE"/>
-            </a:solidFill>
-          </a:ln>
-        </p:spPr>
-        <p:style>
-          <a:lnRef idx="1">
-            <a:schemeClr val="accent1"/>
-          </a:lnRef>
-          <a:fillRef idx="3">
-            <a:schemeClr val="accent1"/>
-          </a:fillRef>
-          <a:effectRef idx="2">
-            <a:schemeClr val="accent1"/>
-          </a:effectRef>
-          <a:fontRef idx="minor">
-            <a:schemeClr val="lt1"/>
-          </a:fontRef>
-        </p:style>
-        <p:txBody>
-          <a:bodyPr rtlCol="0" anchor="ctr"/>
-          <a:lstStyle/>
-          <a:p>
-            <a:pPr algn="ctr"/>
-          </a:p>
-        </p:txBody>
-      </p:sp>
-      <p:sp>
-        <p:nvSpPr>
-          <p:cNvPr id="18" name="TextBox 17"/>
-          <p:cNvSpPr txBox="1"/>
-          <p:nvPr/>
-        </p:nvSpPr>
-        <p:spPr>
-          <a:xfrm>
-            <a:off x="4572000" y="4206240"/>
-            <a:ext cx="3200400" cy="640080"/>
-          </a:xfrm>
-          <a:prstGeom prst="rect">
-            <a:avLst/>
-          </a:prstGeom>
-          <a:noFill/>
-        </p:spPr>
-        <p:txBody>
-          <a:bodyPr wrap="square" anchor="t"/>
-          <a:lstStyle/>
-          <a:p>
-            <a:pPr algn="l"/>
-            <a:r>
-              <a:rPr sz="1800" b="1">
-                <a:solidFill>
-                  <a:srgbClr val="072F35"/>
-                </a:solidFill>
-                <a:latin typeface="Calibri"/>
-              </a:rPr>
-              <a:t>Less manual work</a:t>
-            </a:r>
-          </a:p>
-        </p:txBody>
-      </p:sp>
-      <p:sp>
-        <p:nvSpPr>
-          <p:cNvPr id="19" name="TextBox 18"/>
-          <p:cNvSpPr txBox="1"/>
-          <p:nvPr/>
-        </p:nvSpPr>
-        <p:spPr>
-          <a:xfrm>
-            <a:off x="4572000" y="4937760"/>
-            <a:ext cx="3200400" cy="731520"/>
-          </a:xfrm>
-          <a:prstGeom prst="rect">
-            <a:avLst/>
-          </a:prstGeom>
-          <a:noFill/>
-        </p:spPr>
-        <p:txBody>
-          <a:bodyPr wrap="square" anchor="t"/>
-          <a:lstStyle/>
-          <a:p>
-            <a:pPr algn="l"/>
-            <a:r>
-              <a:rPr sz="1500" b="0">
-                <a:solidFill>
-                  <a:srgbClr val="3D5C62"/>
-                </a:solidFill>
-                <a:latin typeface="Calibri"/>
-              </a:rPr>
-              <a:t>Matching, cleanup, and follow-up run as workflows.</a:t>
-            </a:r>
-          </a:p>
-        </p:txBody>
-      </p:sp>
-      <p:sp>
-        <p:nvSpPr>
-          <p:cNvPr id="20" name="Rounded Rectangle 19"/>
-          <p:cNvSpPr/>
-          <p:nvPr/>
-        </p:nvSpPr>
-        <p:spPr>
-          <a:xfrm>
-            <a:off x="8183880" y="3931920"/>
-            <a:ext cx="3657600" cy="2011680"/>
-          </a:xfrm>
-          <a:prstGeom prst="roundRect">
-            <a:avLst>
-              <a:gd name="adj" fmla="val 12000"/>
-            </a:avLst>
-          </a:prstGeom>
-          <a:solidFill>
-            <a:srgbClr val="FFFFFF"/>
-          </a:solidFill>
-          <a:ln w="15875">
-            <a:solidFill>
-              <a:srgbClr val="C0EDEE"/>
-            </a:solidFill>
-          </a:ln>
-        </p:spPr>
-        <p:style>
-          <a:lnRef idx="1">
-            <a:schemeClr val="accent1"/>
-          </a:lnRef>
-          <a:fillRef idx="3">
-            <a:schemeClr val="accent1"/>
-          </a:fillRef>
-          <a:effectRef idx="2">
-            <a:schemeClr val="accent1"/>
-          </a:effectRef>
-          <a:fontRef idx="minor">
-            <a:schemeClr val="lt1"/>
-          </a:fontRef>
-        </p:style>
-        <p:txBody>
-          <a:bodyPr rtlCol="0" anchor="ctr"/>
-          <a:lstStyle/>
-          <a:p>
-            <a:pPr algn="ctr"/>
-          </a:p>
-        </p:txBody>
-      </p:sp>
-      <p:sp>
-        <p:nvSpPr>
-          <p:cNvPr id="21" name="TextBox 20"/>
-          <p:cNvSpPr txBox="1"/>
-          <p:nvPr/>
-        </p:nvSpPr>
-        <p:spPr>
-          <a:xfrm>
-            <a:off x="8412480" y="4206240"/>
-            <a:ext cx="3200400" cy="640080"/>
-          </a:xfrm>
-          <a:prstGeom prst="rect">
-            <a:avLst/>
-          </a:prstGeom>
-          <a:noFill/>
-        </p:spPr>
-        <p:txBody>
-          <a:bodyPr wrap="square" anchor="t"/>
-          <a:lstStyle/>
-          <a:p>
-            <a:pPr algn="l"/>
-            <a:r>
-              <a:rPr sz="1800" b="1">
-                <a:solidFill>
-                  <a:srgbClr val="072F35"/>
-                </a:solidFill>
-                <a:latin typeface="Calibri"/>
-              </a:rPr>
-              <a:t>Works with the ERP</a:t>
-            </a:r>
-          </a:p>
-        </p:txBody>
-      </p:sp>
-      <p:sp>
-        <p:nvSpPr>
-          <p:cNvPr id="22" name="TextBox 21"/>
-          <p:cNvSpPr txBox="1"/>
-          <p:nvPr/>
-        </p:nvSpPr>
-        <p:spPr>
-          <a:xfrm>
-            <a:off x="8412480" y="4937760"/>
-            <a:ext cx="3200400" cy="731520"/>
-          </a:xfrm>
-          <a:prstGeom prst="rect">
-            <a:avLst/>
-          </a:prstGeom>
-          <a:noFill/>
-        </p:spPr>
-        <p:txBody>
-          <a:bodyPr wrap="square" anchor="t"/>
-          <a:lstStyle/>
-          <a:p>
-            <a:pPr algn="l"/>
-            <a:r>
-              <a:rPr sz="1500" b="0">
-                <a:solidFill>
-                  <a:srgbClr val="3D5C62"/>
-                </a:solidFill>
-                <a:latin typeface="Calibri"/>
-              </a:rPr>
-              <a:t>The ledger stays the system of record.</a:t>
+              <a:t>6  /  9</a:t>
             </a:r>
           </a:p>
         </p:txBody>
@@ -6937,7 +6476,7 @@
             <a:avLst/>
           </a:prstGeom>
           <a:solidFill>
-            <a:srgbClr val="FFFFFF"/>
+            <a:srgbClr val="F7F5F0"/>
           </a:solidFill>
           <a:ln>
             <a:noFill/>
@@ -6967,44 +6506,46 @@
       </p:sp>
       <p:sp>
         <p:nvSpPr>
-          <p:cNvPr id="3" name="Rectangle 2"/>
-          <p:cNvSpPr/>
-          <p:nvPr/>
-        </p:nvSpPr>
-        <p:spPr>
-          <a:xfrm>
-            <a:off x="0" y="0"/>
-            <a:ext cx="12191695" cy="109728"/>
-          </a:xfrm>
-          <a:prstGeom prst="rect">
-            <a:avLst/>
-          </a:prstGeom>
-          <a:solidFill>
-            <a:srgbClr val="FC821F"/>
-          </a:solidFill>
-          <a:ln>
-            <a:noFill/>
-          </a:ln>
-        </p:spPr>
-        <p:style>
-          <a:lnRef idx="1">
-            <a:schemeClr val="accent1"/>
-          </a:lnRef>
-          <a:fillRef idx="3">
-            <a:schemeClr val="accent1"/>
-          </a:fillRef>
-          <a:effectRef idx="2">
-            <a:schemeClr val="accent1"/>
-          </a:effectRef>
-          <a:fontRef idx="minor">
-            <a:schemeClr val="lt1"/>
-          </a:fontRef>
-        </p:style>
-        <p:txBody>
-          <a:bodyPr rtlCol="0" anchor="ctr"/>
-          <a:lstStyle/>
-          <a:p>
-            <a:pPr algn="ctr"/>
+          <p:cNvPr id="3" name="TextBox 2"/>
+          <p:cNvSpPr txBox="1"/>
+          <p:nvPr/>
+        </p:nvSpPr>
+        <p:spPr>
+          <a:xfrm>
+            <a:off x="685800" y="502920"/>
+            <a:ext cx="10058400" cy="274320"/>
+          </a:xfrm>
+          <a:prstGeom prst="rect">
+            <a:avLst/>
+          </a:prstGeom>
+          <a:noFill/>
+        </p:spPr>
+        <p:txBody>
+          <a:bodyPr wrap="square">
+            <a:spAutoFit/>
+          </a:bodyPr>
+          <a:lstStyle/>
+          <a:p>
+            <a:pPr algn="l">
+              <a:lnSpc>
+                <a:spcPct val="105000"/>
+              </a:lnSpc>
+              <a:spcBef>
+                <a:spcPts val="0"/>
+              </a:spcBef>
+              <a:spcAft>
+                <a:spcPts val="0"/>
+              </a:spcAft>
+            </a:pPr>
+            <a:r>
+              <a:rPr sz="1400" b="0" i="0">
+                <a:solidFill>
+                  <a:srgbClr val="C45C12"/>
+                </a:solidFill>
+                <a:latin typeface="Inter"/>
+              </a:rPr>
+              <a:t>Who this is for</a:t>
+            </a:r>
           </a:p>
         </p:txBody>
       </p:sp>
@@ -7016,8 +6557,8 @@
         </p:nvSpPr>
         <p:spPr>
           <a:xfrm>
-            <a:off x="594360" y="365760"/>
-            <a:ext cx="9144000" cy="256032"/>
+            <a:off x="685800" y="1005840"/>
+            <a:ext cx="10241280" cy="1828800"/>
           </a:xfrm>
           <a:prstGeom prst="rect">
             <a:avLst/>
@@ -7025,18 +6566,31 @@
           <a:noFill/>
         </p:spPr>
         <p:txBody>
-          <a:bodyPr wrap="square" anchor="t"/>
-          <a:lstStyle/>
-          <a:p>
-            <a:pPr algn="l"/>
-            <a:r>
-              <a:rPr sz="1300" b="1">
-                <a:solidFill>
-                  <a:srgbClr val="FC821F"/>
-                </a:solidFill>
-                <a:latin typeface="Calibri"/>
+          <a:bodyPr wrap="square">
+            <a:spAutoFit/>
+          </a:bodyPr>
+          <a:lstStyle/>
+          <a:p>
+            <a:pPr algn="l">
+              <a:lnSpc>
+                <a:spcPct val="98000"/>
+              </a:lnSpc>
+              <a:spcBef>
+                <a:spcPts val="0"/>
+              </a:spcBef>
+              <a:spcAft>
+                <a:spcPts val="0"/>
+              </a:spcAft>
+            </a:pPr>
+            <a:r>
+              <a:rPr sz="3400" b="0" i="0">
+                <a:solidFill>
+                  <a:srgbClr val="1A2426"/>
+                </a:solidFill>
+                <a:latin typeface="Liberation Serif"/>
               </a:rPr>
-              <a:t>WHO IT IS FOR</a:t>
+              <a:t>A small finance team with a real ERP
+and too much work around it.</a:t>
             </a:r>
           </a:p>
         </p:txBody>
@@ -7049,8 +6603,8 @@
         </p:nvSpPr>
         <p:spPr>
           <a:xfrm>
-            <a:off x="594360" y="777240"/>
-            <a:ext cx="10972800" cy="1005840"/>
+            <a:off x="685800" y="3200400"/>
+            <a:ext cx="9875520" cy="2194560"/>
           </a:xfrm>
           <a:prstGeom prst="rect">
             <a:avLst/>
@@ -7058,65 +6612,76 @@
           <a:noFill/>
         </p:spPr>
         <p:txBody>
-          <a:bodyPr wrap="square" anchor="t"/>
-          <a:lstStyle/>
-          <a:p>
-            <a:pPr algn="l"/>
-            <a:r>
-              <a:rPr sz="3200" b="1">
-                <a:solidFill>
-                  <a:srgbClr val="072F35"/>
-                </a:solidFill>
-                <a:latin typeface="Calibri"/>
+          <a:bodyPr wrap="square">
+            <a:spAutoFit/>
+          </a:bodyPr>
+          <a:lstStyle/>
+          <a:p>
+            <a:pPr algn="l">
+              <a:lnSpc>
+                <a:spcPct val="120000"/>
+              </a:lnSpc>
+              <a:spcBef>
+                <a:spcPts val="0"/>
+              </a:spcBef>
+              <a:spcAft>
+                <a:spcPts val="0"/>
+              </a:spcAft>
+            </a:pPr>
+            <a:r>
+              <a:rPr sz="1800" b="0" i="0">
+                <a:solidFill>
+                  <a:srgbClr val="5C6566"/>
+                </a:solidFill>
+                <a:latin typeface="Inter"/>
               </a:rPr>
-              <a:t>Lean finance teams that have an ERP
-and still run cash in spreadsheets.</a:t>
-            </a:r>
-          </a:p>
-        </p:txBody>
-      </p:sp>
-      <p:sp>
-        <p:nvSpPr>
-          <p:cNvPr id="6" name="Rounded Rectangle 5"/>
-          <p:cNvSpPr/>
-          <p:nvPr/>
-        </p:nvSpPr>
-        <p:spPr>
-          <a:xfrm>
-            <a:off x="594360" y="2880360"/>
-            <a:ext cx="164592" cy="868680"/>
-          </a:xfrm>
-          <a:prstGeom prst="roundRect">
-            <a:avLst>
-              <a:gd name="adj" fmla="val 12000"/>
-            </a:avLst>
-          </a:prstGeom>
-          <a:solidFill>
-            <a:srgbClr val="FC821F"/>
-          </a:solidFill>
-          <a:ln>
-            <a:noFill/>
-          </a:ln>
-        </p:spPr>
-        <p:style>
-          <a:lnRef idx="1">
-            <a:schemeClr val="accent1"/>
-          </a:lnRef>
-          <a:fillRef idx="3">
-            <a:schemeClr val="accent1"/>
-          </a:fillRef>
-          <a:effectRef idx="2">
-            <a:schemeClr val="accent1"/>
-          </a:effectRef>
-          <a:fontRef idx="minor">
-            <a:schemeClr val="lt1"/>
-          </a:fontRef>
-        </p:style>
-        <p:txBody>
-          <a:bodyPr rtlCol="0" anchor="ctr"/>
-          <a:lstStyle/>
-          <a:p>
-            <a:pPr algn="ctr"/>
+              <a:t>Usually a controller, sometimes the CFO. More than one entity is common. They are not looking for another general ledger. They want the collection calls, the invoice match, and the cash position handled without hiring for it.</a:t>
+            </a:r>
+          </a:p>
+        </p:txBody>
+      </p:sp>
+      <p:sp>
+        <p:nvSpPr>
+          <p:cNvPr id="6" name="TextBox 5"/>
+          <p:cNvSpPr txBox="1"/>
+          <p:nvPr/>
+        </p:nvSpPr>
+        <p:spPr>
+          <a:xfrm>
+            <a:off x="685800" y="5212080"/>
+            <a:ext cx="9875520" cy="731520"/>
+          </a:xfrm>
+          <a:prstGeom prst="rect">
+            <a:avLst/>
+          </a:prstGeom>
+          <a:noFill/>
+        </p:spPr>
+        <p:txBody>
+          <a:bodyPr wrap="square">
+            <a:spAutoFit/>
+          </a:bodyPr>
+          <a:lstStyle/>
+          <a:p>
+            <a:pPr algn="l">
+              <a:lnSpc>
+                <a:spcPct val="115000"/>
+              </a:lnSpc>
+              <a:spcBef>
+                <a:spcPts val="0"/>
+              </a:spcBef>
+              <a:spcAft>
+                <a:spcPts val="0"/>
+              </a:spcAft>
+            </a:pPr>
+            <a:r>
+              <a:rPr sz="1800" b="0" i="0">
+                <a:solidFill>
+                  <a:srgbClr val="1A2426"/>
+                </a:solidFill>
+                <a:latin typeface="Inter"/>
+              </a:rPr>
+              <a:t>If the team is still on spreadsheets for everything, this is early for them. If the ERP is in and the cash work is still manual, it fits.</a:t>
+            </a:r>
           </a:p>
         </p:txBody>
       </p:sp>
@@ -7128,8 +6693,8 @@
         </p:nvSpPr>
         <p:spPr>
           <a:xfrm>
-            <a:off x="1051560" y="2880360"/>
-            <a:ext cx="9144000" cy="365760"/>
+            <a:off x="640080" y="6446520"/>
+            <a:ext cx="7315200" cy="256032"/>
           </a:xfrm>
           <a:prstGeom prst="rect">
             <a:avLst/>
@@ -7137,18 +6702,30 @@
           <a:noFill/>
         </p:spPr>
         <p:txBody>
-          <a:bodyPr wrap="square" anchor="t"/>
-          <a:lstStyle/>
-          <a:p>
-            <a:pPr algn="l"/>
-            <a:r>
-              <a:rPr sz="2000" b="1">
-                <a:solidFill>
-                  <a:srgbClr val="072F35"/>
-                </a:solidFill>
-                <a:latin typeface="Calibri"/>
+          <a:bodyPr wrap="square">
+            <a:spAutoFit/>
+          </a:bodyPr>
+          <a:lstStyle/>
+          <a:p>
+            <a:pPr algn="l">
+              <a:lnSpc>
+                <a:spcPct val="105000"/>
+              </a:lnSpc>
+              <a:spcBef>
+                <a:spcPts val="0"/>
+              </a:spcBef>
+              <a:spcAft>
+                <a:spcPts val="0"/>
+              </a:spcAft>
+            </a:pPr>
+            <a:r>
+              <a:rPr sz="1100" b="0" i="0">
+                <a:solidFill>
+                  <a:srgbClr val="5C6566"/>
+                </a:solidFill>
+                <a:latin typeface="Inter"/>
               </a:rPr>
-              <a:t>CFO and controller</a:t>
+              <a:t>opencfo.tech</a:t>
             </a:r>
           </a:p>
         </p:txBody>
@@ -7161,8 +6738,8 @@
         </p:nvSpPr>
         <p:spPr>
           <a:xfrm>
-            <a:off x="1051560" y="3264408"/>
-            <a:ext cx="9601200" cy="411480"/>
+            <a:off x="9326880" y="6446520"/>
+            <a:ext cx="2194560" cy="256032"/>
           </a:xfrm>
           <a:prstGeom prst="rect">
             <a:avLst/>
@@ -7170,240 +6747,30 @@
           <a:noFill/>
         </p:spPr>
         <p:txBody>
-          <a:bodyPr wrap="square" anchor="t"/>
-          <a:lstStyle/>
-          <a:p>
-            <a:pPr algn="l"/>
-            <a:r>
-              <a:rPr sz="1600" b="0">
-                <a:solidFill>
-                  <a:srgbClr val="3D5C62"/>
-                </a:solidFill>
-                <a:latin typeface="Calibri"/>
+          <a:bodyPr wrap="square">
+            <a:spAutoFit/>
+          </a:bodyPr>
+          <a:lstStyle/>
+          <a:p>
+            <a:pPr algn="r">
+              <a:lnSpc>
+                <a:spcPct val="105000"/>
+              </a:lnSpc>
+              <a:spcBef>
+                <a:spcPts val="0"/>
+              </a:spcBef>
+              <a:spcAft>
+                <a:spcPts val="0"/>
+              </a:spcAft>
+            </a:pPr>
+            <a:r>
+              <a:rPr sz="1100" b="0" i="0">
+                <a:solidFill>
+                  <a:srgbClr val="5C6566"/>
+                </a:solidFill>
+                <a:latin typeface="Inter"/>
               </a:rPr>
-              <a:t>Need DSO, DPO, and liquidity in one place, without another close.</a:t>
-            </a:r>
-          </a:p>
-        </p:txBody>
-      </p:sp>
-      <p:sp>
-        <p:nvSpPr>
-          <p:cNvPr id="9" name="Rounded Rectangle 8"/>
-          <p:cNvSpPr/>
-          <p:nvPr/>
-        </p:nvSpPr>
-        <p:spPr>
-          <a:xfrm>
-            <a:off x="594360" y="4023360"/>
-            <a:ext cx="164592" cy="868680"/>
-          </a:xfrm>
-          <a:prstGeom prst="roundRect">
-            <a:avLst>
-              <a:gd name="adj" fmla="val 12000"/>
-            </a:avLst>
-          </a:prstGeom>
-          <a:solidFill>
-            <a:srgbClr val="FC821F"/>
-          </a:solidFill>
-          <a:ln>
-            <a:noFill/>
-          </a:ln>
-        </p:spPr>
-        <p:style>
-          <a:lnRef idx="1">
-            <a:schemeClr val="accent1"/>
-          </a:lnRef>
-          <a:fillRef idx="3">
-            <a:schemeClr val="accent1"/>
-          </a:fillRef>
-          <a:effectRef idx="2">
-            <a:schemeClr val="accent1"/>
-          </a:effectRef>
-          <a:fontRef idx="minor">
-            <a:schemeClr val="lt1"/>
-          </a:fontRef>
-        </p:style>
-        <p:txBody>
-          <a:bodyPr rtlCol="0" anchor="ctr"/>
-          <a:lstStyle/>
-          <a:p>
-            <a:pPr algn="ctr"/>
-          </a:p>
-        </p:txBody>
-      </p:sp>
-      <p:sp>
-        <p:nvSpPr>
-          <p:cNvPr id="10" name="TextBox 9"/>
-          <p:cNvSpPr txBox="1"/>
-          <p:nvPr/>
-        </p:nvSpPr>
-        <p:spPr>
-          <a:xfrm>
-            <a:off x="1051560" y="4023360"/>
-            <a:ext cx="9144000" cy="365760"/>
-          </a:xfrm>
-          <a:prstGeom prst="rect">
-            <a:avLst/>
-          </a:prstGeom>
-          <a:noFill/>
-        </p:spPr>
-        <p:txBody>
-          <a:bodyPr wrap="square" anchor="t"/>
-          <a:lstStyle/>
-          <a:p>
-            <a:pPr algn="l"/>
-            <a:r>
-              <a:rPr sz="2000" b="1">
-                <a:solidFill>
-                  <a:srgbClr val="072F35"/>
-                </a:solidFill>
-                <a:latin typeface="Calibri"/>
-              </a:rPr>
-              <a:t>Finance operations</a:t>
-            </a:r>
-          </a:p>
-        </p:txBody>
-      </p:sp>
-      <p:sp>
-        <p:nvSpPr>
-          <p:cNvPr id="11" name="TextBox 10"/>
-          <p:cNvSpPr txBox="1"/>
-          <p:nvPr/>
-        </p:nvSpPr>
-        <p:spPr>
-          <a:xfrm>
-            <a:off x="1051560" y="4407408"/>
-            <a:ext cx="9601200" cy="411480"/>
-          </a:xfrm>
-          <a:prstGeom prst="rect">
-            <a:avLst/>
-          </a:prstGeom>
-          <a:noFill/>
-        </p:spPr>
-        <p:txBody>
-          <a:bodyPr wrap="square" anchor="t"/>
-          <a:lstStyle/>
-          <a:p>
-            <a:pPr algn="l"/>
-            <a:r>
-              <a:rPr sz="1600" b="0">
-                <a:solidFill>
-                  <a:srgbClr val="3D5C62"/>
-                </a:solidFill>
-                <a:latin typeface="Calibri"/>
-              </a:rPr>
-              <a:t>Need collections, bills, and reconciliations off the manual queue.</a:t>
-            </a:r>
-          </a:p>
-        </p:txBody>
-      </p:sp>
-      <p:sp>
-        <p:nvSpPr>
-          <p:cNvPr id="12" name="Rounded Rectangle 11"/>
-          <p:cNvSpPr/>
-          <p:nvPr/>
-        </p:nvSpPr>
-        <p:spPr>
-          <a:xfrm>
-            <a:off x="594360" y="5166360"/>
-            <a:ext cx="164592" cy="868680"/>
-          </a:xfrm>
-          <a:prstGeom prst="roundRect">
-            <a:avLst>
-              <a:gd name="adj" fmla="val 12000"/>
-            </a:avLst>
-          </a:prstGeom>
-          <a:solidFill>
-            <a:srgbClr val="FC821F"/>
-          </a:solidFill>
-          <a:ln>
-            <a:noFill/>
-          </a:ln>
-        </p:spPr>
-        <p:style>
-          <a:lnRef idx="1">
-            <a:schemeClr val="accent1"/>
-          </a:lnRef>
-          <a:fillRef idx="3">
-            <a:schemeClr val="accent1"/>
-          </a:fillRef>
-          <a:effectRef idx="2">
-            <a:schemeClr val="accent1"/>
-          </a:effectRef>
-          <a:fontRef idx="minor">
-            <a:schemeClr val="lt1"/>
-          </a:fontRef>
-        </p:style>
-        <p:txBody>
-          <a:bodyPr rtlCol="0" anchor="ctr"/>
-          <a:lstStyle/>
-          <a:p>
-            <a:pPr algn="ctr"/>
-          </a:p>
-        </p:txBody>
-      </p:sp>
-      <p:sp>
-        <p:nvSpPr>
-          <p:cNvPr id="13" name="TextBox 12"/>
-          <p:cNvSpPr txBox="1"/>
-          <p:nvPr/>
-        </p:nvSpPr>
-        <p:spPr>
-          <a:xfrm>
-            <a:off x="1051560" y="5166360"/>
-            <a:ext cx="9144000" cy="365760"/>
-          </a:xfrm>
-          <a:prstGeom prst="rect">
-            <a:avLst/>
-          </a:prstGeom>
-          <a:noFill/>
-        </p:spPr>
-        <p:txBody>
-          <a:bodyPr wrap="square" anchor="t"/>
-          <a:lstStyle/>
-          <a:p>
-            <a:pPr algn="l"/>
-            <a:r>
-              <a:rPr sz="2000" b="1">
-                <a:solidFill>
-                  <a:srgbClr val="072F35"/>
-                </a:solidFill>
-                <a:latin typeface="Calibri"/>
-              </a:rPr>
-              <a:t>Multi-entity companies</a:t>
-            </a:r>
-          </a:p>
-        </p:txBody>
-      </p:sp>
-      <p:sp>
-        <p:nvSpPr>
-          <p:cNvPr id="14" name="TextBox 13"/>
-          <p:cNvSpPr txBox="1"/>
-          <p:nvPr/>
-        </p:nvSpPr>
-        <p:spPr>
-          <a:xfrm>
-            <a:off x="1051560" y="5550408"/>
-            <a:ext cx="9601200" cy="411480"/>
-          </a:xfrm>
-          <a:prstGeom prst="rect">
-            <a:avLst/>
-          </a:prstGeom>
-          <a:noFill/>
-        </p:spPr>
-        <p:txBody>
-          <a:bodyPr wrap="square" anchor="t"/>
-          <a:lstStyle/>
-          <a:p>
-            <a:pPr algn="l"/>
-            <a:r>
-              <a:rPr sz="1600" b="0">
-                <a:solidFill>
-                  <a:srgbClr val="3D5C62"/>
-                </a:solidFill>
-                <a:latin typeface="Calibri"/>
-              </a:rPr>
-              <a:t>Need cash, currency, and approvals across entities and banks.</a:t>
+              <a:t>7  /  9</a:t>
             </a:r>
           </a:p>
         </p:txBody>
@@ -7441,7 +6808,7 @@
             <a:avLst/>
           </a:prstGeom>
           <a:solidFill>
-            <a:srgbClr val="FFFFFF"/>
+            <a:srgbClr val="F7F5F0"/>
           </a:solidFill>
           <a:ln>
             <a:noFill/>
@@ -7471,20 +6838,202 @@
       </p:sp>
       <p:sp>
         <p:nvSpPr>
-          <p:cNvPr id="3" name="Rectangle 2"/>
+          <p:cNvPr id="3" name="TextBox 2"/>
+          <p:cNvSpPr txBox="1"/>
+          <p:nvPr/>
+        </p:nvSpPr>
+        <p:spPr>
+          <a:xfrm>
+            <a:off x="685800" y="457200"/>
+            <a:ext cx="10058400" cy="274320"/>
+          </a:xfrm>
+          <a:prstGeom prst="rect">
+            <a:avLst/>
+          </a:prstGeom>
+          <a:noFill/>
+        </p:spPr>
+        <p:txBody>
+          <a:bodyPr wrap="square">
+            <a:spAutoFit/>
+          </a:bodyPr>
+          <a:lstStyle/>
+          <a:p>
+            <a:pPr algn="l">
+              <a:lnSpc>
+                <a:spcPct val="105000"/>
+              </a:lnSpc>
+              <a:spcBef>
+                <a:spcPts val="0"/>
+              </a:spcBef>
+              <a:spcAft>
+                <a:spcPts val="0"/>
+              </a:spcAft>
+            </a:pPr>
+            <a:r>
+              <a:rPr sz="1400" b="0" i="0">
+                <a:solidFill>
+                  <a:srgbClr val="C45C12"/>
+                </a:solidFill>
+                <a:latin typeface="Inter"/>
+              </a:rPr>
+              <a:t>Systems and pricing</a:t>
+            </a:r>
+          </a:p>
+        </p:txBody>
+      </p:sp>
+      <p:sp>
+        <p:nvSpPr>
+          <p:cNvPr id="4" name="TextBox 3"/>
+          <p:cNvSpPr txBox="1"/>
+          <p:nvPr/>
+        </p:nvSpPr>
+        <p:spPr>
+          <a:xfrm>
+            <a:off x="685800" y="914400"/>
+            <a:ext cx="10515600" cy="1188720"/>
+          </a:xfrm>
+          <a:prstGeom prst="rect">
+            <a:avLst/>
+          </a:prstGeom>
+          <a:noFill/>
+        </p:spPr>
+        <p:txBody>
+          <a:bodyPr wrap="square">
+            <a:spAutoFit/>
+          </a:bodyPr>
+          <a:lstStyle/>
+          <a:p>
+            <a:pPr algn="l">
+              <a:lnSpc>
+                <a:spcPct val="98000"/>
+              </a:lnSpc>
+              <a:spcBef>
+                <a:spcPts val="0"/>
+              </a:spcBef>
+              <a:spcAft>
+                <a:spcPts val="0"/>
+              </a:spcAft>
+            </a:pPr>
+            <a:r>
+              <a:rPr sz="3200" b="0" i="0">
+                <a:solidFill>
+                  <a:srgbClr val="1A2426"/>
+                </a:solidFill>
+                <a:latin typeface="Liberation Serif"/>
+              </a:rPr>
+              <a:t>It connects to the systems
+already on the finance stack.</a:t>
+            </a:r>
+          </a:p>
+        </p:txBody>
+      </p:sp>
+      <p:sp>
+        <p:nvSpPr>
+          <p:cNvPr id="5" name="TextBox 4"/>
+          <p:cNvSpPr txBox="1"/>
+          <p:nvPr/>
+        </p:nvSpPr>
+        <p:spPr>
+          <a:xfrm>
+            <a:off x="685800" y="2468880"/>
+            <a:ext cx="10058400" cy="1005840"/>
+          </a:xfrm>
+          <a:prstGeom prst="rect">
+            <a:avLst/>
+          </a:prstGeom>
+          <a:noFill/>
+        </p:spPr>
+        <p:txBody>
+          <a:bodyPr wrap="square">
+            <a:spAutoFit/>
+          </a:bodyPr>
+          <a:lstStyle/>
+          <a:p>
+            <a:pPr algn="l">
+              <a:lnSpc>
+                <a:spcPct val="125000"/>
+              </a:lnSpc>
+              <a:spcBef>
+                <a:spcPts val="0"/>
+              </a:spcBef>
+              <a:spcAft>
+                <a:spcPts val="0"/>
+              </a:spcAft>
+            </a:pPr>
+            <a:r>
+              <a:rPr sz="2000" b="0" i="0">
+                <a:solidFill>
+                  <a:srgbClr val="1A2426"/>
+                </a:solidFill>
+                <a:latin typeface="Inter"/>
+              </a:rPr>
+              <a:t>NetSuite    Dynamics 365    QuickBooks    Sage
+Zoho Books    Zuora    Exact    SWIFT</a:t>
+            </a:r>
+          </a:p>
+        </p:txBody>
+      </p:sp>
+      <p:sp>
+        <p:nvSpPr>
+          <p:cNvPr id="6" name="TextBox 5"/>
+          <p:cNvSpPr txBox="1"/>
+          <p:nvPr/>
+        </p:nvSpPr>
+        <p:spPr>
+          <a:xfrm>
+            <a:off x="685800" y="3703320"/>
+            <a:ext cx="9601200" cy="640080"/>
+          </a:xfrm>
+          <a:prstGeom prst="rect">
+            <a:avLst/>
+          </a:prstGeom>
+          <a:noFill/>
+        </p:spPr>
+        <p:txBody>
+          <a:bodyPr wrap="square">
+            <a:spAutoFit/>
+          </a:bodyPr>
+          <a:lstStyle/>
+          <a:p>
+            <a:pPr algn="l">
+              <a:lnSpc>
+                <a:spcPct val="115000"/>
+              </a:lnSpc>
+              <a:spcBef>
+                <a:spcPts val="0"/>
+              </a:spcBef>
+              <a:spcAft>
+                <a:spcPts val="0"/>
+              </a:spcAft>
+            </a:pPr>
+            <a:r>
+              <a:rPr sz="1600" b="0" i="0">
+                <a:solidFill>
+                  <a:srgbClr val="5C6566"/>
+                </a:solidFill>
+                <a:latin typeface="Inter"/>
+              </a:rPr>
+              <a:t>Anything off that list is a custom connection. We do that during onboarding, not as a six-month integration project.</a:t>
+            </a:r>
+          </a:p>
+        </p:txBody>
+      </p:sp>
+      <p:sp>
+        <p:nvSpPr>
+          <p:cNvPr id="7" name="Rectangle 6"/>
           <p:cNvSpPr/>
           <p:nvPr/>
         </p:nvSpPr>
         <p:spPr>
           <a:xfrm>
-            <a:off x="0" y="0"/>
-            <a:ext cx="12191695" cy="109728"/>
+            <a:off x="685800" y="4572000"/>
+            <a:ext cx="10789920" cy="9525"/>
           </a:xfrm>
           <a:prstGeom prst="rect">
             <a:avLst/>
           </a:prstGeom>
           <a:solidFill>
-            <a:srgbClr val="FC821F"/>
+            <a:srgbClr val="D8D1C6"/>
           </a:solidFill>
           <a:ln>
             <a:noFill/>
@@ -7514,14 +7063,14 @@
       </p:sp>
       <p:sp>
         <p:nvSpPr>
-          <p:cNvPr id="4" name="TextBox 3"/>
+          <p:cNvPr id="8" name="TextBox 7"/>
           <p:cNvSpPr txBox="1"/>
           <p:nvPr/>
         </p:nvSpPr>
         <p:spPr>
           <a:xfrm>
-            <a:off x="548640" y="320040"/>
-            <a:ext cx="10972800" cy="256032"/>
+            <a:off x="685800" y="4800600"/>
+            <a:ext cx="10058400" cy="1097280"/>
           </a:xfrm>
           <a:prstGeom prst="rect">
             <a:avLst/>
@@ -7529,179 +7078,53 @@
           <a:noFill/>
         </p:spPr>
         <p:txBody>
-          <a:bodyPr wrap="square" anchor="t"/>
-          <a:lstStyle/>
-          <a:p>
-            <a:pPr algn="l"/>
-            <a:r>
-              <a:rPr sz="1300" b="1">
-                <a:solidFill>
-                  <a:srgbClr val="FC821F"/>
-                </a:solidFill>
-                <a:latin typeface="Calibri"/>
+          <a:bodyPr wrap="square">
+            <a:spAutoFit/>
+          </a:bodyPr>
+          <a:lstStyle/>
+          <a:p>
+            <a:pPr algn="l">
+              <a:lnSpc>
+                <a:spcPct val="105000"/>
+              </a:lnSpc>
+              <a:spcBef>
+                <a:spcPts val="0"/>
+              </a:spcBef>
+              <a:spcAft>
+                <a:spcPts val="0"/>
+              </a:spcAft>
+            </a:pPr>
+            <a:r>
+              <a:rPr sz="1400" b="0" i="0">
+                <a:solidFill>
+                  <a:srgbClr val="C45C12"/>
+                </a:solidFill>
+                <a:latin typeface="Inter"/>
               </a:rPr>
-              <a:t>HOW IT FITS</a:t>
-            </a:r>
-          </a:p>
-        </p:txBody>
-      </p:sp>
-      <p:sp>
-        <p:nvSpPr>
-          <p:cNvPr id="5" name="TextBox 4"/>
-          <p:cNvSpPr txBox="1"/>
-          <p:nvPr/>
-        </p:nvSpPr>
-        <p:spPr>
-          <a:xfrm>
-            <a:off x="548640" y="640080"/>
-            <a:ext cx="10972800" cy="548640"/>
-          </a:xfrm>
-          <a:prstGeom prst="rect">
-            <a:avLst/>
-          </a:prstGeom>
-          <a:noFill/>
-        </p:spPr>
-        <p:txBody>
-          <a:bodyPr wrap="square" anchor="t"/>
-          <a:lstStyle/>
-          <a:p>
-            <a:pPr algn="l"/>
-            <a:r>
-              <a:rPr sz="3000" b="1">
-                <a:solidFill>
-                  <a:srgbClr val="072F35"/>
-                </a:solidFill>
-                <a:latin typeface="Calibri"/>
+              <a:t>Pricing</a:t>
+            </a:r>
+          </a:p>
+          <a:p>
+            <a:pPr algn="l">
+              <a:lnSpc>
+                <a:spcPct val="115000"/>
+              </a:lnSpc>
+              <a:spcBef>
+                <a:spcPts val="600"/>
+              </a:spcBef>
+              <a:spcAft>
+                <a:spcPts val="0"/>
+              </a:spcAft>
+            </a:pPr>
+            <a:r>
+              <a:rPr sz="1800" b="0" i="0">
+                <a:solidFill>
+                  <a:srgbClr val="1A2426"/>
+                </a:solidFill>
+                <a:latin typeface="Inter"/>
               </a:rPr>
-              <a:t>Connects to the stack. Priced on value.</a:t>
-            </a:r>
-          </a:p>
-        </p:txBody>
-      </p:sp>
-      <p:sp>
-        <p:nvSpPr>
-          <p:cNvPr id="6" name="Rounded Rectangle 5"/>
-          <p:cNvSpPr/>
-          <p:nvPr/>
-        </p:nvSpPr>
-        <p:spPr>
-          <a:xfrm>
-            <a:off x="548640" y="1554480"/>
-            <a:ext cx="2697480" cy="868680"/>
-          </a:xfrm>
-          <a:prstGeom prst="roundRect">
-            <a:avLst>
-              <a:gd name="adj" fmla="val 12000"/>
-            </a:avLst>
-          </a:prstGeom>
-          <a:solidFill>
-            <a:srgbClr val="F3FFFE"/>
-          </a:solidFill>
-          <a:ln w="15875">
-            <a:solidFill>
-              <a:srgbClr val="C0EDEE"/>
-            </a:solidFill>
-          </a:ln>
-        </p:spPr>
-        <p:style>
-          <a:lnRef idx="1">
-            <a:schemeClr val="accent1"/>
-          </a:lnRef>
-          <a:fillRef idx="3">
-            <a:schemeClr val="accent1"/>
-          </a:fillRef>
-          <a:effectRef idx="2">
-            <a:schemeClr val="accent1"/>
-          </a:effectRef>
-          <a:fontRef idx="minor">
-            <a:schemeClr val="lt1"/>
-          </a:fontRef>
-        </p:style>
-        <p:txBody>
-          <a:bodyPr rtlCol="0" anchor="ctr"/>
-          <a:lstStyle/>
-          <a:p>
-            <a:pPr algn="ctr"/>
-          </a:p>
-        </p:txBody>
-      </p:sp>
-      <p:sp>
-        <p:nvSpPr>
-          <p:cNvPr id="7" name="TextBox 6"/>
-          <p:cNvSpPr txBox="1"/>
-          <p:nvPr/>
-        </p:nvSpPr>
-        <p:spPr>
-          <a:xfrm>
-            <a:off x="548640" y="1783080"/>
-            <a:ext cx="2697480" cy="411480"/>
-          </a:xfrm>
-          <a:prstGeom prst="rect">
-            <a:avLst/>
-          </a:prstGeom>
-          <a:noFill/>
-        </p:spPr>
-        <p:txBody>
-          <a:bodyPr wrap="square" anchor="t"/>
-          <a:lstStyle/>
-          <a:p>
-            <a:pPr algn="ctr"/>
-            <a:r>
-              <a:rPr sz="1600" b="1">
-                <a:solidFill>
-                  <a:srgbClr val="072F35"/>
-                </a:solidFill>
-                <a:latin typeface="Calibri"/>
-              </a:rPr>
-              <a:t>NetSuite</a:t>
-            </a:r>
-          </a:p>
-        </p:txBody>
-      </p:sp>
-      <p:sp>
-        <p:nvSpPr>
-          <p:cNvPr id="8" name="Rounded Rectangle 7"/>
-          <p:cNvSpPr/>
-          <p:nvPr/>
-        </p:nvSpPr>
-        <p:spPr>
-          <a:xfrm>
-            <a:off x="3429000" y="1554480"/>
-            <a:ext cx="2697480" cy="868680"/>
-          </a:xfrm>
-          <a:prstGeom prst="roundRect">
-            <a:avLst>
-              <a:gd name="adj" fmla="val 12000"/>
-            </a:avLst>
-          </a:prstGeom>
-          <a:solidFill>
-            <a:srgbClr val="F3FFFE"/>
-          </a:solidFill>
-          <a:ln w="15875">
-            <a:solidFill>
-              <a:srgbClr val="C0EDEE"/>
-            </a:solidFill>
-          </a:ln>
-        </p:spPr>
-        <p:style>
-          <a:lnRef idx="1">
-            <a:schemeClr val="accent1"/>
-          </a:lnRef>
-          <a:fillRef idx="3">
-            <a:schemeClr val="accent1"/>
-          </a:fillRef>
-          <a:effectRef idx="2">
-            <a:schemeClr val="accent1"/>
-          </a:effectRef>
-          <a:fontRef idx="minor">
-            <a:schemeClr val="lt1"/>
-          </a:fontRef>
-        </p:style>
-        <p:txBody>
-          <a:bodyPr rtlCol="0" anchor="ctr"/>
-          <a:lstStyle/>
-          <a:p>
-            <a:pPr algn="ctr"/>
+              <a:t>Start on a trial. Pay when the cash cycle is actually moving. Onboarding is guided, and a normal go-live is measured in weeks.</a:t>
+            </a:r>
           </a:p>
         </p:txBody>
       </p:sp>
@@ -7713,8 +7136,8 @@
         </p:nvSpPr>
         <p:spPr>
           <a:xfrm>
-            <a:off x="3429000" y="1783080"/>
-            <a:ext cx="2697480" cy="411480"/>
+            <a:off x="640080" y="6446520"/>
+            <a:ext cx="7315200" cy="256032"/>
           </a:xfrm>
           <a:prstGeom prst="rect">
             <a:avLst/>
@@ -7722,79 +7145,44 @@
           <a:noFill/>
         </p:spPr>
         <p:txBody>
-          <a:bodyPr wrap="square" anchor="t"/>
-          <a:lstStyle/>
-          <a:p>
-            <a:pPr algn="ctr"/>
-            <a:r>
-              <a:rPr sz="1600" b="1">
-                <a:solidFill>
-                  <a:srgbClr val="072F35"/>
-                </a:solidFill>
-                <a:latin typeface="Calibri"/>
+          <a:bodyPr wrap="square">
+            <a:spAutoFit/>
+          </a:bodyPr>
+          <a:lstStyle/>
+          <a:p>
+            <a:pPr algn="l">
+              <a:lnSpc>
+                <a:spcPct val="105000"/>
+              </a:lnSpc>
+              <a:spcBef>
+                <a:spcPts val="0"/>
+              </a:spcBef>
+              <a:spcAft>
+                <a:spcPts val="0"/>
+              </a:spcAft>
+            </a:pPr>
+            <a:r>
+              <a:rPr sz="1100" b="0" i="0">
+                <a:solidFill>
+                  <a:srgbClr val="5C6566"/>
+                </a:solidFill>
+                <a:latin typeface="Inter"/>
               </a:rPr>
-              <a:t>Dynamics 365</a:t>
-            </a:r>
-          </a:p>
-        </p:txBody>
-      </p:sp>
-      <p:sp>
-        <p:nvSpPr>
-          <p:cNvPr id="10" name="Rounded Rectangle 9"/>
-          <p:cNvSpPr/>
-          <p:nvPr/>
-        </p:nvSpPr>
-        <p:spPr>
-          <a:xfrm>
-            <a:off x="6309359" y="1554480"/>
-            <a:ext cx="2697480" cy="868680"/>
-          </a:xfrm>
-          <a:prstGeom prst="roundRect">
-            <a:avLst>
-              <a:gd name="adj" fmla="val 12000"/>
-            </a:avLst>
-          </a:prstGeom>
-          <a:solidFill>
-            <a:srgbClr val="F3FFFE"/>
-          </a:solidFill>
-          <a:ln w="15875">
-            <a:solidFill>
-              <a:srgbClr val="C0EDEE"/>
-            </a:solidFill>
-          </a:ln>
-        </p:spPr>
-        <p:style>
-          <a:lnRef idx="1">
-            <a:schemeClr val="accent1"/>
-          </a:lnRef>
-          <a:fillRef idx="3">
-            <a:schemeClr val="accent1"/>
-          </a:fillRef>
-          <a:effectRef idx="2">
-            <a:schemeClr val="accent1"/>
-          </a:effectRef>
-          <a:fontRef idx="minor">
-            <a:schemeClr val="lt1"/>
-          </a:fontRef>
-        </p:style>
-        <p:txBody>
-          <a:bodyPr rtlCol="0" anchor="ctr"/>
-          <a:lstStyle/>
-          <a:p>
-            <a:pPr algn="ctr"/>
-          </a:p>
-        </p:txBody>
-      </p:sp>
-      <p:sp>
-        <p:nvSpPr>
-          <p:cNvPr id="11" name="TextBox 10"/>
+              <a:t>opencfo.tech</a:t>
+            </a:r>
+          </a:p>
+        </p:txBody>
+      </p:sp>
+      <p:sp>
+        <p:nvSpPr>
+          <p:cNvPr id="10" name="TextBox 9"/>
           <p:cNvSpPr txBox="1"/>
           <p:nvPr/>
         </p:nvSpPr>
         <p:spPr>
           <a:xfrm>
-            <a:off x="6309359" y="1783080"/>
-            <a:ext cx="2697480" cy="411480"/>
+            <a:off x="9326880" y="6446520"/>
+            <a:ext cx="2194560" cy="256032"/>
           </a:xfrm>
           <a:prstGeom prst="rect">
             <a:avLst/>
@@ -7802,563 +7190,30 @@
           <a:noFill/>
         </p:spPr>
         <p:txBody>
-          <a:bodyPr wrap="square" anchor="t"/>
-          <a:lstStyle/>
-          <a:p>
-            <a:pPr algn="ctr"/>
-            <a:r>
-              <a:rPr sz="1600" b="1">
-                <a:solidFill>
-                  <a:srgbClr val="072F35"/>
-                </a:solidFill>
-                <a:latin typeface="Calibri"/>
+          <a:bodyPr wrap="square">
+            <a:spAutoFit/>
+          </a:bodyPr>
+          <a:lstStyle/>
+          <a:p>
+            <a:pPr algn="r">
+              <a:lnSpc>
+                <a:spcPct val="105000"/>
+              </a:lnSpc>
+              <a:spcBef>
+                <a:spcPts val="0"/>
+              </a:spcBef>
+              <a:spcAft>
+                <a:spcPts val="0"/>
+              </a:spcAft>
+            </a:pPr>
+            <a:r>
+              <a:rPr sz="1100" b="0" i="0">
+                <a:solidFill>
+                  <a:srgbClr val="5C6566"/>
+                </a:solidFill>
+                <a:latin typeface="Inter"/>
               </a:rPr>
-              <a:t>QuickBooks</a:t>
-            </a:r>
-          </a:p>
-        </p:txBody>
-      </p:sp>
-      <p:sp>
-        <p:nvSpPr>
-          <p:cNvPr id="12" name="Rounded Rectangle 11"/>
-          <p:cNvSpPr/>
-          <p:nvPr/>
-        </p:nvSpPr>
-        <p:spPr>
-          <a:xfrm>
-            <a:off x="9189719" y="1554480"/>
-            <a:ext cx="2697480" cy="868680"/>
-          </a:xfrm>
-          <a:prstGeom prst="roundRect">
-            <a:avLst>
-              <a:gd name="adj" fmla="val 12000"/>
-            </a:avLst>
-          </a:prstGeom>
-          <a:solidFill>
-            <a:srgbClr val="F3FFFE"/>
-          </a:solidFill>
-          <a:ln w="15875">
-            <a:solidFill>
-              <a:srgbClr val="C0EDEE"/>
-            </a:solidFill>
-          </a:ln>
-        </p:spPr>
-        <p:style>
-          <a:lnRef idx="1">
-            <a:schemeClr val="accent1"/>
-          </a:lnRef>
-          <a:fillRef idx="3">
-            <a:schemeClr val="accent1"/>
-          </a:fillRef>
-          <a:effectRef idx="2">
-            <a:schemeClr val="accent1"/>
-          </a:effectRef>
-          <a:fontRef idx="minor">
-            <a:schemeClr val="lt1"/>
-          </a:fontRef>
-        </p:style>
-        <p:txBody>
-          <a:bodyPr rtlCol="0" anchor="ctr"/>
-          <a:lstStyle/>
-          <a:p>
-            <a:pPr algn="ctr"/>
-          </a:p>
-        </p:txBody>
-      </p:sp>
-      <p:sp>
-        <p:nvSpPr>
-          <p:cNvPr id="13" name="TextBox 12"/>
-          <p:cNvSpPr txBox="1"/>
-          <p:nvPr/>
-        </p:nvSpPr>
-        <p:spPr>
-          <a:xfrm>
-            <a:off x="9189719" y="1783080"/>
-            <a:ext cx="2697480" cy="411480"/>
-          </a:xfrm>
-          <a:prstGeom prst="rect">
-            <a:avLst/>
-          </a:prstGeom>
-          <a:noFill/>
-        </p:spPr>
-        <p:txBody>
-          <a:bodyPr wrap="square" anchor="t"/>
-          <a:lstStyle/>
-          <a:p>
-            <a:pPr algn="ctr"/>
-            <a:r>
-              <a:rPr sz="1600" b="1">
-                <a:solidFill>
-                  <a:srgbClr val="072F35"/>
-                </a:solidFill>
-                <a:latin typeface="Calibri"/>
-              </a:rPr>
-              <a:t>Sage</a:t>
-            </a:r>
-          </a:p>
-        </p:txBody>
-      </p:sp>
-      <p:sp>
-        <p:nvSpPr>
-          <p:cNvPr id="14" name="Rounded Rectangle 13"/>
-          <p:cNvSpPr/>
-          <p:nvPr/>
-        </p:nvSpPr>
-        <p:spPr>
-          <a:xfrm>
-            <a:off x="548640" y="2606039"/>
-            <a:ext cx="2697480" cy="868680"/>
-          </a:xfrm>
-          <a:prstGeom prst="roundRect">
-            <a:avLst>
-              <a:gd name="adj" fmla="val 12000"/>
-            </a:avLst>
-          </a:prstGeom>
-          <a:solidFill>
-            <a:srgbClr val="F3FFFE"/>
-          </a:solidFill>
-          <a:ln w="15875">
-            <a:solidFill>
-              <a:srgbClr val="C0EDEE"/>
-            </a:solidFill>
-          </a:ln>
-        </p:spPr>
-        <p:style>
-          <a:lnRef idx="1">
-            <a:schemeClr val="accent1"/>
-          </a:lnRef>
-          <a:fillRef idx="3">
-            <a:schemeClr val="accent1"/>
-          </a:fillRef>
-          <a:effectRef idx="2">
-            <a:schemeClr val="accent1"/>
-          </a:effectRef>
-          <a:fontRef idx="minor">
-            <a:schemeClr val="lt1"/>
-          </a:fontRef>
-        </p:style>
-        <p:txBody>
-          <a:bodyPr rtlCol="0" anchor="ctr"/>
-          <a:lstStyle/>
-          <a:p>
-            <a:pPr algn="ctr"/>
-          </a:p>
-        </p:txBody>
-      </p:sp>
-      <p:sp>
-        <p:nvSpPr>
-          <p:cNvPr id="15" name="TextBox 14"/>
-          <p:cNvSpPr txBox="1"/>
-          <p:nvPr/>
-        </p:nvSpPr>
-        <p:spPr>
-          <a:xfrm>
-            <a:off x="548640" y="2834639"/>
-            <a:ext cx="2697480" cy="411480"/>
-          </a:xfrm>
-          <a:prstGeom prst="rect">
-            <a:avLst/>
-          </a:prstGeom>
-          <a:noFill/>
-        </p:spPr>
-        <p:txBody>
-          <a:bodyPr wrap="square" anchor="t"/>
-          <a:lstStyle/>
-          <a:p>
-            <a:pPr algn="ctr"/>
-            <a:r>
-              <a:rPr sz="1600" b="1">
-                <a:solidFill>
-                  <a:srgbClr val="072F35"/>
-                </a:solidFill>
-                <a:latin typeface="Calibri"/>
-              </a:rPr>
-              <a:t>Zoho Books</a:t>
-            </a:r>
-          </a:p>
-        </p:txBody>
-      </p:sp>
-      <p:sp>
-        <p:nvSpPr>
-          <p:cNvPr id="16" name="Rounded Rectangle 15"/>
-          <p:cNvSpPr/>
-          <p:nvPr/>
-        </p:nvSpPr>
-        <p:spPr>
-          <a:xfrm>
-            <a:off x="3429000" y="2606039"/>
-            <a:ext cx="2697480" cy="868680"/>
-          </a:xfrm>
-          <a:prstGeom prst="roundRect">
-            <a:avLst>
-              <a:gd name="adj" fmla="val 12000"/>
-            </a:avLst>
-          </a:prstGeom>
-          <a:solidFill>
-            <a:srgbClr val="F3FFFE"/>
-          </a:solidFill>
-          <a:ln w="15875">
-            <a:solidFill>
-              <a:srgbClr val="C0EDEE"/>
-            </a:solidFill>
-          </a:ln>
-        </p:spPr>
-        <p:style>
-          <a:lnRef idx="1">
-            <a:schemeClr val="accent1"/>
-          </a:lnRef>
-          <a:fillRef idx="3">
-            <a:schemeClr val="accent1"/>
-          </a:fillRef>
-          <a:effectRef idx="2">
-            <a:schemeClr val="accent1"/>
-          </a:effectRef>
-          <a:fontRef idx="minor">
-            <a:schemeClr val="lt1"/>
-          </a:fontRef>
-        </p:style>
-        <p:txBody>
-          <a:bodyPr rtlCol="0" anchor="ctr"/>
-          <a:lstStyle/>
-          <a:p>
-            <a:pPr algn="ctr"/>
-          </a:p>
-        </p:txBody>
-      </p:sp>
-      <p:sp>
-        <p:nvSpPr>
-          <p:cNvPr id="17" name="TextBox 16"/>
-          <p:cNvSpPr txBox="1"/>
-          <p:nvPr/>
-        </p:nvSpPr>
-        <p:spPr>
-          <a:xfrm>
-            <a:off x="3429000" y="2834639"/>
-            <a:ext cx="2697480" cy="411480"/>
-          </a:xfrm>
-          <a:prstGeom prst="rect">
-            <a:avLst/>
-          </a:prstGeom>
-          <a:noFill/>
-        </p:spPr>
-        <p:txBody>
-          <a:bodyPr wrap="square" anchor="t"/>
-          <a:lstStyle/>
-          <a:p>
-            <a:pPr algn="ctr"/>
-            <a:r>
-              <a:rPr sz="1600" b="1">
-                <a:solidFill>
-                  <a:srgbClr val="072F35"/>
-                </a:solidFill>
-                <a:latin typeface="Calibri"/>
-              </a:rPr>
-              <a:t>Zuora</a:t>
-            </a:r>
-          </a:p>
-        </p:txBody>
-      </p:sp>
-      <p:sp>
-        <p:nvSpPr>
-          <p:cNvPr id="18" name="Rounded Rectangle 17"/>
-          <p:cNvSpPr/>
-          <p:nvPr/>
-        </p:nvSpPr>
-        <p:spPr>
-          <a:xfrm>
-            <a:off x="6309359" y="2606039"/>
-            <a:ext cx="2697480" cy="868680"/>
-          </a:xfrm>
-          <a:prstGeom prst="roundRect">
-            <a:avLst>
-              <a:gd name="adj" fmla="val 12000"/>
-            </a:avLst>
-          </a:prstGeom>
-          <a:solidFill>
-            <a:srgbClr val="F3FFFE"/>
-          </a:solidFill>
-          <a:ln w="15875">
-            <a:solidFill>
-              <a:srgbClr val="C0EDEE"/>
-            </a:solidFill>
-          </a:ln>
-        </p:spPr>
-        <p:style>
-          <a:lnRef idx="1">
-            <a:schemeClr val="accent1"/>
-          </a:lnRef>
-          <a:fillRef idx="3">
-            <a:schemeClr val="accent1"/>
-          </a:fillRef>
-          <a:effectRef idx="2">
-            <a:schemeClr val="accent1"/>
-          </a:effectRef>
-          <a:fontRef idx="minor">
-            <a:schemeClr val="lt1"/>
-          </a:fontRef>
-        </p:style>
-        <p:txBody>
-          <a:bodyPr rtlCol="0" anchor="ctr"/>
-          <a:lstStyle/>
-          <a:p>
-            <a:pPr algn="ctr"/>
-          </a:p>
-        </p:txBody>
-      </p:sp>
-      <p:sp>
-        <p:nvSpPr>
-          <p:cNvPr id="19" name="TextBox 18"/>
-          <p:cNvSpPr txBox="1"/>
-          <p:nvPr/>
-        </p:nvSpPr>
-        <p:spPr>
-          <a:xfrm>
-            <a:off x="6309359" y="2834639"/>
-            <a:ext cx="2697480" cy="411480"/>
-          </a:xfrm>
-          <a:prstGeom prst="rect">
-            <a:avLst/>
-          </a:prstGeom>
-          <a:noFill/>
-        </p:spPr>
-        <p:txBody>
-          <a:bodyPr wrap="square" anchor="t"/>
-          <a:lstStyle/>
-          <a:p>
-            <a:pPr algn="ctr"/>
-            <a:r>
-              <a:rPr sz="1600" b="1">
-                <a:solidFill>
-                  <a:srgbClr val="072F35"/>
-                </a:solidFill>
-                <a:latin typeface="Calibri"/>
-              </a:rPr>
-              <a:t>Exact</a:t>
-            </a:r>
-          </a:p>
-        </p:txBody>
-      </p:sp>
-      <p:sp>
-        <p:nvSpPr>
-          <p:cNvPr id="20" name="Rounded Rectangle 19"/>
-          <p:cNvSpPr/>
-          <p:nvPr/>
-        </p:nvSpPr>
-        <p:spPr>
-          <a:xfrm>
-            <a:off x="9189719" y="2606039"/>
-            <a:ext cx="2697480" cy="868680"/>
-          </a:xfrm>
-          <a:prstGeom prst="roundRect">
-            <a:avLst>
-              <a:gd name="adj" fmla="val 12000"/>
-            </a:avLst>
-          </a:prstGeom>
-          <a:solidFill>
-            <a:srgbClr val="F3FFFE"/>
-          </a:solidFill>
-          <a:ln w="15875">
-            <a:solidFill>
-              <a:srgbClr val="C0EDEE"/>
-            </a:solidFill>
-          </a:ln>
-        </p:spPr>
-        <p:style>
-          <a:lnRef idx="1">
-            <a:schemeClr val="accent1"/>
-          </a:lnRef>
-          <a:fillRef idx="3">
-            <a:schemeClr val="accent1"/>
-          </a:fillRef>
-          <a:effectRef idx="2">
-            <a:schemeClr val="accent1"/>
-          </a:effectRef>
-          <a:fontRef idx="minor">
-            <a:schemeClr val="lt1"/>
-          </a:fontRef>
-        </p:style>
-        <p:txBody>
-          <a:bodyPr rtlCol="0" anchor="ctr"/>
-          <a:lstStyle/>
-          <a:p>
-            <a:pPr algn="ctr"/>
-          </a:p>
-        </p:txBody>
-      </p:sp>
-      <p:sp>
-        <p:nvSpPr>
-          <p:cNvPr id="21" name="TextBox 20"/>
-          <p:cNvSpPr txBox="1"/>
-          <p:nvPr/>
-        </p:nvSpPr>
-        <p:spPr>
-          <a:xfrm>
-            <a:off x="9189719" y="2834639"/>
-            <a:ext cx="2697480" cy="411480"/>
-          </a:xfrm>
-          <a:prstGeom prst="rect">
-            <a:avLst/>
-          </a:prstGeom>
-          <a:noFill/>
-        </p:spPr>
-        <p:txBody>
-          <a:bodyPr wrap="square" anchor="t"/>
-          <a:lstStyle/>
-          <a:p>
-            <a:pPr algn="ctr"/>
-            <a:r>
-              <a:rPr sz="1600" b="1">
-                <a:solidFill>
-                  <a:srgbClr val="072F35"/>
-                </a:solidFill>
-                <a:latin typeface="Calibri"/>
-              </a:rPr>
-              <a:t>SWIFT</a:t>
-            </a:r>
-          </a:p>
-        </p:txBody>
-      </p:sp>
-      <p:sp>
-        <p:nvSpPr>
-          <p:cNvPr id="22" name="TextBox 21"/>
-          <p:cNvSpPr txBox="1"/>
-          <p:nvPr/>
-        </p:nvSpPr>
-        <p:spPr>
-          <a:xfrm>
-            <a:off x="548640" y="3886200"/>
-            <a:ext cx="10972800" cy="365760"/>
-          </a:xfrm>
-          <a:prstGeom prst="rect">
-            <a:avLst/>
-          </a:prstGeom>
-          <a:noFill/>
-        </p:spPr>
-        <p:txBody>
-          <a:bodyPr wrap="square" anchor="t"/>
-          <a:lstStyle/>
-          <a:p>
-            <a:pPr algn="l"/>
-            <a:r>
-              <a:rPr sz="1600" b="0">
-                <a:solidFill>
-                  <a:srgbClr val="3D5C62"/>
-                </a:solidFill>
-                <a:latin typeface="Calibri"/>
-              </a:rPr>
-              <a:t>Custom bank and ERP connections are available.</a:t>
-            </a:r>
-          </a:p>
-        </p:txBody>
-      </p:sp>
-      <p:sp>
-        <p:nvSpPr>
-          <p:cNvPr id="23" name="Rounded Rectangle 22"/>
-          <p:cNvSpPr/>
-          <p:nvPr/>
-        </p:nvSpPr>
-        <p:spPr>
-          <a:xfrm>
-            <a:off x="548640" y="4480560"/>
-            <a:ext cx="11064240" cy="1737360"/>
-          </a:xfrm>
-          <a:prstGeom prst="roundRect">
-            <a:avLst>
-              <a:gd name="adj" fmla="val 12000"/>
-            </a:avLst>
-          </a:prstGeom>
-          <a:solidFill>
-            <a:srgbClr val="072F35"/>
-          </a:solidFill>
-          <a:ln>
-            <a:noFill/>
-          </a:ln>
-        </p:spPr>
-        <p:style>
-          <a:lnRef idx="1">
-            <a:schemeClr val="accent1"/>
-          </a:lnRef>
-          <a:fillRef idx="3">
-            <a:schemeClr val="accent1"/>
-          </a:fillRef>
-          <a:effectRef idx="2">
-            <a:schemeClr val="accent1"/>
-          </a:effectRef>
-          <a:fontRef idx="minor">
-            <a:schemeClr val="lt1"/>
-          </a:fontRef>
-        </p:style>
-        <p:txBody>
-          <a:bodyPr rtlCol="0" anchor="ctr"/>
-          <a:lstStyle/>
-          <a:p>
-            <a:pPr algn="ctr"/>
-          </a:p>
-        </p:txBody>
-      </p:sp>
-      <p:sp>
-        <p:nvSpPr>
-          <p:cNvPr id="24" name="TextBox 23"/>
-          <p:cNvSpPr txBox="1"/>
-          <p:nvPr/>
-        </p:nvSpPr>
-        <p:spPr>
-          <a:xfrm>
-            <a:off x="868680" y="4709160"/>
-            <a:ext cx="10424160" cy="411480"/>
-          </a:xfrm>
-          <a:prstGeom prst="rect">
-            <a:avLst/>
-          </a:prstGeom>
-          <a:noFill/>
-        </p:spPr>
-        <p:txBody>
-          <a:bodyPr wrap="square" anchor="t"/>
-          <a:lstStyle/>
-          <a:p>
-            <a:pPr algn="l"/>
-            <a:r>
-              <a:rPr sz="1400" b="1">
-                <a:solidFill>
-                  <a:srgbClr val="49D6CE"/>
-                </a:solidFill>
-                <a:latin typeface="Calibri"/>
-              </a:rPr>
-              <a:t>Commercial model</a:t>
-            </a:r>
-          </a:p>
-        </p:txBody>
-      </p:sp>
-      <p:sp>
-        <p:nvSpPr>
-          <p:cNvPr id="25" name="TextBox 24"/>
-          <p:cNvSpPr txBox="1"/>
-          <p:nvPr/>
-        </p:nvSpPr>
-        <p:spPr>
-          <a:xfrm>
-            <a:off x="868680" y="5120640"/>
-            <a:ext cx="10424160" cy="822960"/>
-          </a:xfrm>
-          <a:prstGeom prst="rect">
-            <a:avLst/>
-          </a:prstGeom>
-          <a:noFill/>
-        </p:spPr>
-        <p:txBody>
-          <a:bodyPr wrap="square" anchor="t"/>
-          <a:lstStyle/>
-          <a:p>
-            <a:pPr algn="l"/>
-            <a:r>
-              <a:rPr sz="2000" b="0">
-                <a:solidFill>
-                  <a:srgbClr val="FFFFFF"/>
-                </a:solidFill>
-                <a:latin typeface="Calibri"/>
-              </a:rPr>
-              <a:t>Start on a trial. Pay when the platform is returning cash-cycle value.
-Guided onboarding takes a customer live in weeks.</a:t>
+              <a:t>8  /  9</a:t>
             </a:r>
           </a:p>
         </p:txBody>
@@ -8396,7 +7251,7 @@
             <a:avLst/>
           </a:prstGeom>
           <a:solidFill>
-            <a:srgbClr val="072F35"/>
+            <a:srgbClr val="1A2426"/>
           </a:solidFill>
           <a:ln>
             <a:noFill/>
@@ -8432,14 +7287,14 @@
         </p:nvSpPr>
         <p:spPr>
           <a:xfrm>
-            <a:off x="0" y="0"/>
-            <a:ext cx="164592" cy="6858000"/>
+            <a:off x="731520" y="1554480"/>
+            <a:ext cx="1051560" cy="38100"/>
           </a:xfrm>
           <a:prstGeom prst="rect">
             <a:avLst/>
           </a:prstGeom>
           <a:solidFill>
-            <a:srgbClr val="FC821F"/>
+            <a:srgbClr val="C45C12"/>
           </a:solidFill>
           <a:ln>
             <a:noFill/>
@@ -8475,8 +7330,8 @@
         </p:nvSpPr>
         <p:spPr>
           <a:xfrm>
-            <a:off x="685800" y="502920"/>
-            <a:ext cx="9144000" cy="274320"/>
+            <a:off x="731520" y="1828800"/>
+            <a:ext cx="10058400" cy="1645920"/>
           </a:xfrm>
           <a:prstGeom prst="rect">
             <a:avLst/>
@@ -8484,18 +7339,31 @@
           <a:noFill/>
         </p:spPr>
         <p:txBody>
-          <a:bodyPr wrap="square" anchor="t"/>
-          <a:lstStyle/>
-          <a:p>
-            <a:pPr algn="l"/>
-            <a:r>
-              <a:rPr sz="1300" b="1">
-                <a:solidFill>
-                  <a:srgbClr val="49D6CE"/>
-                </a:solidFill>
-                <a:latin typeface="Calibri"/>
+          <a:bodyPr wrap="square">
+            <a:spAutoFit/>
+          </a:bodyPr>
+          <a:lstStyle/>
+          <a:p>
+            <a:pPr algn="l">
+              <a:lnSpc>
+                <a:spcPct val="98000"/>
+              </a:lnSpc>
+              <a:spcBef>
+                <a:spcPts val="0"/>
+              </a:spcBef>
+              <a:spcAft>
+                <a:spcPts val="0"/>
+              </a:spcAft>
+            </a:pPr>
+            <a:r>
+              <a:rPr sz="3600" b="0" i="0">
+                <a:solidFill>
+                  <a:srgbClr val="FFFCF7"/>
+                </a:solidFill>
+                <a:latin typeface="Liberation Serif"/>
               </a:rPr>
-              <a:t>THE ASK</a:t>
+              <a:t>If the cash work is still
+manual, we should talk.</a:t>
             </a:r>
           </a:p>
         </p:txBody>
@@ -8508,8 +7376,8 @@
         </p:nvSpPr>
         <p:spPr>
           <a:xfrm>
-            <a:off x="685800" y="1051560"/>
-            <a:ext cx="10515600" cy="1463040"/>
+            <a:off x="731520" y="3931920"/>
+            <a:ext cx="7315200" cy="1097280"/>
           </a:xfrm>
           <a:prstGeom prst="rect">
             <a:avLst/>
@@ -8517,19 +7385,30 @@
           <a:noFill/>
         </p:spPr>
         <p:txBody>
-          <a:bodyPr wrap="square" anchor="t"/>
-          <a:lstStyle/>
-          <a:p>
-            <a:pPr algn="l"/>
-            <a:r>
-              <a:rPr sz="4000" b="1">
-                <a:solidFill>
-                  <a:srgbClr val="FFFFFF"/>
-                </a:solidFill>
-                <a:latin typeface="Calibri"/>
+          <a:bodyPr wrap="square">
+            <a:spAutoFit/>
+          </a:bodyPr>
+          <a:lstStyle/>
+          <a:p>
+            <a:pPr algn="l">
+              <a:lnSpc>
+                <a:spcPct val="115000"/>
+              </a:lnSpc>
+              <a:spcBef>
+                <a:spcPts val="0"/>
+              </a:spcBef>
+              <a:spcAft>
+                <a:spcPts val="0"/>
+              </a:spcAft>
+            </a:pPr>
+            <a:r>
+              <a:rPr sz="1800" b="0" i="0">
+                <a:solidFill>
+                  <a:srgbClr val="C9D0CE"/>
+                </a:solidFill>
+                <a:latin typeface="Inter"/>
               </a:rPr>
-              <a:t>Voice for the calls
-finance still makes by hand.</a:t>
+              <a:t>A 30-minute call is enough to see whether the ERP and the banks are a fit. We reply within one business day.</a:t>
             </a:r>
           </a:p>
         </p:txBody>
@@ -8542,8 +7421,8 @@
         </p:nvSpPr>
         <p:spPr>
           <a:xfrm>
-            <a:off x="685800" y="3063240"/>
-            <a:ext cx="10058400" cy="1371600"/>
+            <a:off x="731520" y="5623560"/>
+            <a:ext cx="5486400" cy="640080"/>
           </a:xfrm>
           <a:prstGeom prst="rect">
             <a:avLst/>
@@ -8551,216 +7430,52 @@
           <a:noFill/>
         </p:spPr>
         <p:txBody>
-          <a:bodyPr wrap="square" anchor="t"/>
-          <a:lstStyle/>
-          <a:p>
-            <a:pPr algn="l"/>
-            <a:r>
-              <a:rPr sz="1800" b="0">
-                <a:solidFill>
-                  <a:srgbClr val="D5F4F4"/>
-                </a:solidFill>
-                <a:latin typeface="Calibri"/>
+          <a:bodyPr wrap="square">
+            <a:spAutoFit/>
+          </a:bodyPr>
+          <a:lstStyle/>
+          <a:p>
+            <a:pPr algn="l">
+              <a:lnSpc>
+                <a:spcPct val="105000"/>
+              </a:lnSpc>
+              <a:spcBef>
+                <a:spcPts val="0"/>
+              </a:spcBef>
+              <a:spcAft>
+                <a:spcPts val="0"/>
+              </a:spcAft>
+            </a:pPr>
+            <a:r>
+              <a:rPr sz="2000" b="0" i="0">
+                <a:solidFill>
+                  <a:srgbClr val="FFFCF7"/>
+                </a:solidFill>
+                <a:latin typeface="Inter"/>
               </a:rPr>
-              <a:t>OpenCFO will use a branded voice agent for overdue-invoice calls and vendor payment-status calls. The agent states the amount, records a promise or a dispute, and writes the result back to the receivable or the bill.</a:t>
-            </a:r>
-          </a:p>
-        </p:txBody>
-      </p:sp>
-      <p:sp>
-        <p:nvSpPr>
-          <p:cNvPr id="7" name="TextBox 6"/>
-          <p:cNvSpPr txBox="1"/>
-          <p:nvPr/>
-        </p:nvSpPr>
-        <p:spPr>
-          <a:xfrm>
-            <a:off x="685800" y="4892040"/>
-            <a:ext cx="3291840" cy="274320"/>
-          </a:xfrm>
-          <a:prstGeom prst="rect">
-            <a:avLst/>
-          </a:prstGeom>
-          <a:noFill/>
-        </p:spPr>
-        <p:txBody>
-          <a:bodyPr wrap="square" anchor="t"/>
-          <a:lstStyle/>
-          <a:p>
-            <a:pPr algn="l"/>
-            <a:r>
-              <a:rPr sz="1200" b="1">
-                <a:solidFill>
-                  <a:srgbClr val="49D6CE"/>
-                </a:solidFill>
-                <a:latin typeface="Calibri"/>
-              </a:rPr>
-              <a:t>SITE</a:t>
-            </a:r>
-          </a:p>
-        </p:txBody>
-      </p:sp>
-      <p:sp>
-        <p:nvSpPr>
-          <p:cNvPr id="8" name="TextBox 7"/>
-          <p:cNvSpPr txBox="1"/>
-          <p:nvPr/>
-        </p:nvSpPr>
-        <p:spPr>
-          <a:xfrm>
-            <a:off x="685800" y="5212080"/>
-            <a:ext cx="3383280" cy="640080"/>
-          </a:xfrm>
-          <a:prstGeom prst="rect">
-            <a:avLst/>
-          </a:prstGeom>
-          <a:noFill/>
-        </p:spPr>
-        <p:txBody>
-          <a:bodyPr wrap="square" anchor="t"/>
-          <a:lstStyle/>
-          <a:p>
-            <a:pPr algn="l"/>
-            <a:r>
-              <a:rPr sz="1600" b="1">
-                <a:solidFill>
-                  <a:srgbClr val="FFFFFF"/>
-                </a:solidFill>
-                <a:latin typeface="Calibri"/>
+              <a:t>info@opencfo.tech</a:t>
+            </a:r>
+          </a:p>
+          <a:p>
+            <a:pPr algn="l">
+              <a:lnSpc>
+                <a:spcPct val="105000"/>
+              </a:lnSpc>
+              <a:spcBef>
+                <a:spcPts val="400"/>
+              </a:spcBef>
+              <a:spcAft>
+                <a:spcPts val="0"/>
+              </a:spcAft>
+            </a:pPr>
+            <a:r>
+              <a:rPr sz="1600" b="0" i="0">
+                <a:solidFill>
+                  <a:srgbClr val="C45C12"/>
+                </a:solidFill>
+                <a:latin typeface="Inter"/>
               </a:rPr>
               <a:t>opencfo.tech</a:t>
-            </a:r>
-          </a:p>
-        </p:txBody>
-      </p:sp>
-      <p:sp>
-        <p:nvSpPr>
-          <p:cNvPr id="9" name="TextBox 8"/>
-          <p:cNvSpPr txBox="1"/>
-          <p:nvPr/>
-        </p:nvSpPr>
-        <p:spPr>
-          <a:xfrm>
-            <a:off x="4343400" y="4892040"/>
-            <a:ext cx="3291840" cy="274320"/>
-          </a:xfrm>
-          <a:prstGeom prst="rect">
-            <a:avLst/>
-          </a:prstGeom>
-          <a:noFill/>
-        </p:spPr>
-        <p:txBody>
-          <a:bodyPr wrap="square" anchor="t"/>
-          <a:lstStyle/>
-          <a:p>
-            <a:pPr algn="l"/>
-            <a:r>
-              <a:rPr sz="1200" b="1">
-                <a:solidFill>
-                  <a:srgbClr val="49D6CE"/>
-                </a:solidFill>
-                <a:latin typeface="Calibri"/>
-              </a:rPr>
-              <a:t>EMAIL</a:t>
-            </a:r>
-          </a:p>
-        </p:txBody>
-      </p:sp>
-      <p:sp>
-        <p:nvSpPr>
-          <p:cNvPr id="10" name="TextBox 9"/>
-          <p:cNvSpPr txBox="1"/>
-          <p:nvPr/>
-        </p:nvSpPr>
-        <p:spPr>
-          <a:xfrm>
-            <a:off x="4343400" y="5212080"/>
-            <a:ext cx="3383280" cy="640080"/>
-          </a:xfrm>
-          <a:prstGeom prst="rect">
-            <a:avLst/>
-          </a:prstGeom>
-          <a:noFill/>
-        </p:spPr>
-        <p:txBody>
-          <a:bodyPr wrap="square" anchor="t"/>
-          <a:lstStyle/>
-          <a:p>
-            <a:pPr algn="l"/>
-            <a:r>
-              <a:rPr sz="1600" b="1">
-                <a:solidFill>
-                  <a:srgbClr val="FFFFFF"/>
-                </a:solidFill>
-                <a:latin typeface="Calibri"/>
-              </a:rPr>
-              <a:t>info@opencfo.tech</a:t>
-            </a:r>
-          </a:p>
-        </p:txBody>
-      </p:sp>
-      <p:sp>
-        <p:nvSpPr>
-          <p:cNvPr id="11" name="TextBox 10"/>
-          <p:cNvSpPr txBox="1"/>
-          <p:nvPr/>
-        </p:nvSpPr>
-        <p:spPr>
-          <a:xfrm>
-            <a:off x="8001000" y="4892040"/>
-            <a:ext cx="3291840" cy="274320"/>
-          </a:xfrm>
-          <a:prstGeom prst="rect">
-            <a:avLst/>
-          </a:prstGeom>
-          <a:noFill/>
-        </p:spPr>
-        <p:txBody>
-          <a:bodyPr wrap="square" anchor="t"/>
-          <a:lstStyle/>
-          <a:p>
-            <a:pPr algn="l"/>
-            <a:r>
-              <a:rPr sz="1200" b="1">
-                <a:solidFill>
-                  <a:srgbClr val="49D6CE"/>
-                </a:solidFill>
-                <a:latin typeface="Calibri"/>
-              </a:rPr>
-              <a:t>DEMO</a:t>
-            </a:r>
-          </a:p>
-        </p:txBody>
-      </p:sp>
-      <p:sp>
-        <p:nvSpPr>
-          <p:cNvPr id="12" name="TextBox 11"/>
-          <p:cNvSpPr txBox="1"/>
-          <p:nvPr/>
-        </p:nvSpPr>
-        <p:spPr>
-          <a:xfrm>
-            <a:off x="8001000" y="5212080"/>
-            <a:ext cx="3383280" cy="640080"/>
-          </a:xfrm>
-          <a:prstGeom prst="rect">
-            <a:avLst/>
-          </a:prstGeom>
-          <a:noFill/>
-        </p:spPr>
-        <p:txBody>
-          <a:bodyPr wrap="square" anchor="t"/>
-          <a:lstStyle/>
-          <a:p>
-            <a:pPr algn="l"/>
-            <a:r>
-              <a:rPr sz="1600" b="1">
-                <a:solidFill>
-                  <a:srgbClr val="FFFFFF"/>
-                </a:solidFill>
-                <a:latin typeface="Calibri"/>
-              </a:rPr>
-              <a:t>Book a 30-minute call from the site</a:t>
             </a:r>
           </a:p>
         </p:txBody>
